--- a/docs/Attention_Figures.pptx
+++ b/docs/Attention_Figures.pptx
@@ -6,6 +6,7 @@
   </p:sldMasterIdLst>
   <p:sldIdLst>
     <p:sldId id="256" r:id="rId2"/>
+    <p:sldId id="257" r:id="rId3"/>
   </p:sldIdLst>
   <p:sldSz cx="12192000" cy="6858000"/>
   <p:notesSz cx="6858000" cy="9144000"/>
@@ -5627,6 +5628,2417 @@
 </p:sld>
 </file>
 
+<file path=ppt/slides/slide2.xml><?xml version="1.0" encoding="utf-8"?>
+<p:sld xmlns:a="http://schemas.openxmlformats.org/drawingml/2006/main" xmlns:r="http://schemas.openxmlformats.org/officeDocument/2006/relationships" xmlns:p="http://schemas.openxmlformats.org/presentationml/2006/main">
+  <p:cSld>
+    <p:spTree>
+      <p:nvGrpSpPr>
+        <p:cNvPr id="1" name=""/>
+        <p:cNvGrpSpPr/>
+        <p:nvPr/>
+      </p:nvGrpSpPr>
+      <p:grpSpPr>
+        <a:xfrm>
+          <a:off x="0" y="0"/>
+          <a:ext cx="0" cy="0"/>
+          <a:chOff x="0" y="0"/>
+          <a:chExt cx="0" cy="0"/>
+        </a:xfrm>
+      </p:grpSpPr>
+      <p:grpSp>
+        <p:nvGrpSpPr>
+          <p:cNvPr id="97" name="Group 96">
+            <a:extLst>
+              <a:ext uri="{FF2B5EF4-FFF2-40B4-BE49-F238E27FC236}">
+                <a16:creationId xmlns:a16="http://schemas.microsoft.com/office/drawing/2014/main" id="{3DC84395-078A-3B68-2670-1F779BCC5749}"/>
+              </a:ext>
+            </a:extLst>
+          </p:cNvPr>
+          <p:cNvGrpSpPr/>
+          <p:nvPr/>
+        </p:nvGrpSpPr>
+        <p:grpSpPr>
+          <a:xfrm>
+            <a:off x="3092278" y="2402335"/>
+            <a:ext cx="5684065" cy="2443508"/>
+            <a:chOff x="3092278" y="2402335"/>
+            <a:chExt cx="5684065" cy="2443508"/>
+          </a:xfrm>
+        </p:grpSpPr>
+        <p:sp>
+          <p:nvSpPr>
+            <p:cNvPr id="9" name="Rectangle 8">
+              <a:extLst>
+                <a:ext uri="{FF2B5EF4-FFF2-40B4-BE49-F238E27FC236}">
+                  <a16:creationId xmlns:a16="http://schemas.microsoft.com/office/drawing/2014/main" id="{7B74BAE7-54E1-72CA-5FA4-6DA69B52E495}"/>
+                </a:ext>
+              </a:extLst>
+            </p:cNvPr>
+            <p:cNvSpPr/>
+            <p:nvPr/>
+          </p:nvSpPr>
+          <p:spPr>
+            <a:xfrm>
+              <a:off x="6693444" y="3228060"/>
+              <a:ext cx="242828" cy="239034"/>
+            </a:xfrm>
+            <a:prstGeom prst="rect">
+              <a:avLst/>
+            </a:prstGeom>
+            <a:solidFill>
+              <a:schemeClr val="accent1">
+                <a:alpha val="30400"/>
+              </a:schemeClr>
+            </a:solidFill>
+          </p:spPr>
+          <p:style>
+            <a:lnRef idx="2">
+              <a:schemeClr val="accent1">
+                <a:shade val="15000"/>
+              </a:schemeClr>
+            </a:lnRef>
+            <a:fillRef idx="1">
+              <a:schemeClr val="accent1"/>
+            </a:fillRef>
+            <a:effectRef idx="0">
+              <a:schemeClr val="accent1"/>
+            </a:effectRef>
+            <a:fontRef idx="minor">
+              <a:schemeClr val="lt1"/>
+            </a:fontRef>
+          </p:style>
+          <p:txBody>
+            <a:bodyPr rtlCol="0" anchor="ctr"/>
+            <a:lstStyle/>
+            <a:p>
+              <a:pPr algn="ctr"/>
+              <a:endParaRPr lang="en-US"/>
+            </a:p>
+          </p:txBody>
+        </p:sp>
+        <p:sp>
+          <p:nvSpPr>
+            <p:cNvPr id="10" name="Rectangle 9">
+              <a:extLst>
+                <a:ext uri="{FF2B5EF4-FFF2-40B4-BE49-F238E27FC236}">
+                  <a16:creationId xmlns:a16="http://schemas.microsoft.com/office/drawing/2014/main" id="{75C2FEA7-5BF0-F93A-2415-4664AE3EC17D}"/>
+                </a:ext>
+              </a:extLst>
+            </p:cNvPr>
+            <p:cNvSpPr/>
+            <p:nvPr/>
+          </p:nvSpPr>
+          <p:spPr>
+            <a:xfrm>
+              <a:off x="6545552" y="2538946"/>
+              <a:ext cx="242828" cy="239034"/>
+            </a:xfrm>
+            <a:prstGeom prst="rect">
+              <a:avLst/>
+            </a:prstGeom>
+            <a:solidFill>
+              <a:schemeClr val="accent1">
+                <a:alpha val="76000"/>
+              </a:schemeClr>
+            </a:solidFill>
+          </p:spPr>
+          <p:style>
+            <a:lnRef idx="2">
+              <a:schemeClr val="accent1">
+                <a:shade val="15000"/>
+              </a:schemeClr>
+            </a:lnRef>
+            <a:fillRef idx="1">
+              <a:schemeClr val="accent1"/>
+            </a:fillRef>
+            <a:effectRef idx="0">
+              <a:schemeClr val="accent1"/>
+            </a:effectRef>
+            <a:fontRef idx="minor">
+              <a:schemeClr val="lt1"/>
+            </a:fontRef>
+          </p:style>
+          <p:txBody>
+            <a:bodyPr rtlCol="0" anchor="ctr"/>
+            <a:lstStyle/>
+            <a:p>
+              <a:pPr algn="ctr"/>
+              <a:endParaRPr lang="en-US"/>
+            </a:p>
+          </p:txBody>
+        </p:sp>
+        <p:sp>
+          <p:nvSpPr>
+            <p:cNvPr id="11" name="Rectangle 10">
+              <a:extLst>
+                <a:ext uri="{FF2B5EF4-FFF2-40B4-BE49-F238E27FC236}">
+                  <a16:creationId xmlns:a16="http://schemas.microsoft.com/office/drawing/2014/main" id="{753F21AA-73DD-7DE4-9CB9-9A6273AA5EE0}"/>
+                </a:ext>
+              </a:extLst>
+            </p:cNvPr>
+            <p:cNvSpPr/>
+            <p:nvPr/>
+          </p:nvSpPr>
+          <p:spPr>
+            <a:xfrm>
+              <a:off x="6545552" y="4155272"/>
+              <a:ext cx="242828" cy="239034"/>
+            </a:xfrm>
+            <a:prstGeom prst="rect">
+              <a:avLst/>
+            </a:prstGeom>
+            <a:pattFill prst="wdDnDiag">
+              <a:fgClr>
+                <a:schemeClr val="accent1"/>
+              </a:fgClr>
+              <a:bgClr>
+                <a:schemeClr val="bg1"/>
+              </a:bgClr>
+            </a:pattFill>
+          </p:spPr>
+          <p:style>
+            <a:lnRef idx="2">
+              <a:schemeClr val="accent1">
+                <a:shade val="15000"/>
+              </a:schemeClr>
+            </a:lnRef>
+            <a:fillRef idx="1">
+              <a:schemeClr val="accent1"/>
+            </a:fillRef>
+            <a:effectRef idx="0">
+              <a:schemeClr val="accent1"/>
+            </a:effectRef>
+            <a:fontRef idx="minor">
+              <a:schemeClr val="lt1"/>
+            </a:fontRef>
+          </p:style>
+          <p:txBody>
+            <a:bodyPr rtlCol="0" anchor="ctr"/>
+            <a:lstStyle/>
+            <a:p>
+              <a:pPr algn="ctr"/>
+              <a:endParaRPr lang="en-US"/>
+            </a:p>
+          </p:txBody>
+        </p:sp>
+        <p:cxnSp>
+          <p:nvCxnSpPr>
+            <p:cNvPr id="14" name="Straight Arrow Connector 13">
+              <a:extLst>
+                <a:ext uri="{FF2B5EF4-FFF2-40B4-BE49-F238E27FC236}">
+                  <a16:creationId xmlns:a16="http://schemas.microsoft.com/office/drawing/2014/main" id="{F00B0163-D958-C7BF-8D90-0B3BCD16ED84}"/>
+                </a:ext>
+              </a:extLst>
+            </p:cNvPr>
+            <p:cNvCxnSpPr>
+              <a:cxnSpLocks/>
+              <a:stCxn id="9" idx="0"/>
+              <a:endCxn id="10" idx="2"/>
+            </p:cNvCxnSpPr>
+            <p:nvPr/>
+          </p:nvCxnSpPr>
+          <p:spPr>
+            <a:xfrm flipH="1" flipV="1">
+              <a:off x="6666966" y="2777980"/>
+              <a:ext cx="147892" cy="450080"/>
+            </a:xfrm>
+            <a:prstGeom prst="straightConnector1">
+              <a:avLst/>
+            </a:prstGeom>
+            <a:ln w="9525">
+              <a:tailEnd type="triangle"/>
+            </a:ln>
+          </p:spPr>
+          <p:style>
+            <a:lnRef idx="2">
+              <a:schemeClr val="accent1"/>
+            </a:lnRef>
+            <a:fillRef idx="0">
+              <a:schemeClr val="accent1"/>
+            </a:fillRef>
+            <a:effectRef idx="1">
+              <a:schemeClr val="accent1"/>
+            </a:effectRef>
+            <a:fontRef idx="minor">
+              <a:schemeClr val="tx1"/>
+            </a:fontRef>
+          </p:style>
+        </p:cxnSp>
+        <p:cxnSp>
+          <p:nvCxnSpPr>
+            <p:cNvPr id="15" name="Straight Arrow Connector 14">
+              <a:extLst>
+                <a:ext uri="{FF2B5EF4-FFF2-40B4-BE49-F238E27FC236}">
+                  <a16:creationId xmlns:a16="http://schemas.microsoft.com/office/drawing/2014/main" id="{9E0F8AAC-C2F2-F359-3A67-AF750DE455EF}"/>
+                </a:ext>
+              </a:extLst>
+            </p:cNvPr>
+            <p:cNvCxnSpPr>
+              <a:cxnSpLocks/>
+              <a:stCxn id="11" idx="0"/>
+              <a:endCxn id="9" idx="2"/>
+            </p:cNvCxnSpPr>
+            <p:nvPr/>
+          </p:nvCxnSpPr>
+          <p:spPr>
+            <a:xfrm flipV="1">
+              <a:off x="6666966" y="3467094"/>
+              <a:ext cx="147892" cy="688178"/>
+            </a:xfrm>
+            <a:prstGeom prst="straightConnector1">
+              <a:avLst/>
+            </a:prstGeom>
+            <a:ln w="9525">
+              <a:tailEnd type="triangle"/>
+            </a:ln>
+          </p:spPr>
+          <p:style>
+            <a:lnRef idx="2">
+              <a:schemeClr val="accent1"/>
+            </a:lnRef>
+            <a:fillRef idx="0">
+              <a:schemeClr val="accent1"/>
+            </a:fillRef>
+            <a:effectRef idx="1">
+              <a:schemeClr val="accent1"/>
+            </a:effectRef>
+            <a:fontRef idx="minor">
+              <a:schemeClr val="tx1"/>
+            </a:fontRef>
+          </p:style>
+        </p:cxnSp>
+        <p:sp>
+          <p:nvSpPr>
+            <p:cNvPr id="18" name="Rectangle 17">
+              <a:extLst>
+                <a:ext uri="{FF2B5EF4-FFF2-40B4-BE49-F238E27FC236}">
+                  <a16:creationId xmlns:a16="http://schemas.microsoft.com/office/drawing/2014/main" id="{3C816DCF-B119-D7B6-D76F-3AC8E934F96C}"/>
+                </a:ext>
+              </a:extLst>
+            </p:cNvPr>
+            <p:cNvSpPr/>
+            <p:nvPr/>
+          </p:nvSpPr>
+          <p:spPr>
+            <a:xfrm>
+              <a:off x="8098837" y="3228060"/>
+              <a:ext cx="242828" cy="239034"/>
+            </a:xfrm>
+            <a:prstGeom prst="rect">
+              <a:avLst/>
+            </a:prstGeom>
+            <a:solidFill>
+              <a:schemeClr val="accent1">
+                <a:alpha val="30400"/>
+              </a:schemeClr>
+            </a:solidFill>
+          </p:spPr>
+          <p:style>
+            <a:lnRef idx="2">
+              <a:schemeClr val="accent1">
+                <a:shade val="15000"/>
+              </a:schemeClr>
+            </a:lnRef>
+            <a:fillRef idx="1">
+              <a:schemeClr val="accent1"/>
+            </a:fillRef>
+            <a:effectRef idx="0">
+              <a:schemeClr val="accent1"/>
+            </a:effectRef>
+            <a:fontRef idx="minor">
+              <a:schemeClr val="lt1"/>
+            </a:fontRef>
+          </p:style>
+          <p:txBody>
+            <a:bodyPr rtlCol="0" anchor="ctr"/>
+            <a:lstStyle/>
+            <a:p>
+              <a:pPr algn="ctr"/>
+              <a:endParaRPr lang="en-US"/>
+            </a:p>
+          </p:txBody>
+        </p:sp>
+        <p:sp>
+          <p:nvSpPr>
+            <p:cNvPr id="19" name="Rectangle 18">
+              <a:extLst>
+                <a:ext uri="{FF2B5EF4-FFF2-40B4-BE49-F238E27FC236}">
+                  <a16:creationId xmlns:a16="http://schemas.microsoft.com/office/drawing/2014/main" id="{B89C26ED-1639-9221-B2E3-8FC6170EF70C}"/>
+                </a:ext>
+              </a:extLst>
+            </p:cNvPr>
+            <p:cNvSpPr/>
+            <p:nvPr/>
+          </p:nvSpPr>
+          <p:spPr>
+            <a:xfrm>
+              <a:off x="7996509" y="2544287"/>
+              <a:ext cx="242828" cy="239034"/>
+            </a:xfrm>
+            <a:prstGeom prst="rect">
+              <a:avLst/>
+            </a:prstGeom>
+            <a:solidFill>
+              <a:schemeClr val="accent1">
+                <a:alpha val="76000"/>
+              </a:schemeClr>
+            </a:solidFill>
+          </p:spPr>
+          <p:style>
+            <a:lnRef idx="2">
+              <a:schemeClr val="accent1">
+                <a:shade val="15000"/>
+              </a:schemeClr>
+            </a:lnRef>
+            <a:fillRef idx="1">
+              <a:schemeClr val="accent1"/>
+            </a:fillRef>
+            <a:effectRef idx="0">
+              <a:schemeClr val="accent1"/>
+            </a:effectRef>
+            <a:fontRef idx="minor">
+              <a:schemeClr val="lt1"/>
+            </a:fontRef>
+          </p:style>
+          <p:txBody>
+            <a:bodyPr rtlCol="0" anchor="ctr"/>
+            <a:lstStyle/>
+            <a:p>
+              <a:pPr algn="ctr"/>
+              <a:endParaRPr lang="en-US"/>
+            </a:p>
+          </p:txBody>
+        </p:sp>
+        <p:sp>
+          <p:nvSpPr>
+            <p:cNvPr id="20" name="Rectangle 19">
+              <a:extLst>
+                <a:ext uri="{FF2B5EF4-FFF2-40B4-BE49-F238E27FC236}">
+                  <a16:creationId xmlns:a16="http://schemas.microsoft.com/office/drawing/2014/main" id="{A7236B1E-3FCD-1E18-A4CF-57634E7E93D8}"/>
+                </a:ext>
+              </a:extLst>
+            </p:cNvPr>
+            <p:cNvSpPr/>
+            <p:nvPr/>
+          </p:nvSpPr>
+          <p:spPr>
+            <a:xfrm>
+              <a:off x="7996509" y="4160613"/>
+              <a:ext cx="242828" cy="239034"/>
+            </a:xfrm>
+            <a:prstGeom prst="rect">
+              <a:avLst/>
+            </a:prstGeom>
+            <a:pattFill prst="wdDnDiag">
+              <a:fgClr>
+                <a:schemeClr val="accent1"/>
+              </a:fgClr>
+              <a:bgClr>
+                <a:schemeClr val="bg1"/>
+              </a:bgClr>
+            </a:pattFill>
+          </p:spPr>
+          <p:style>
+            <a:lnRef idx="2">
+              <a:schemeClr val="accent1">
+                <a:shade val="15000"/>
+              </a:schemeClr>
+            </a:lnRef>
+            <a:fillRef idx="1">
+              <a:schemeClr val="accent1"/>
+            </a:fillRef>
+            <a:effectRef idx="0">
+              <a:schemeClr val="accent1"/>
+            </a:effectRef>
+            <a:fontRef idx="minor">
+              <a:schemeClr val="lt1"/>
+            </a:fontRef>
+          </p:style>
+          <p:txBody>
+            <a:bodyPr rtlCol="0" anchor="ctr"/>
+            <a:lstStyle/>
+            <a:p>
+              <a:pPr algn="ctr"/>
+              <a:endParaRPr lang="en-US"/>
+            </a:p>
+          </p:txBody>
+        </p:sp>
+        <p:cxnSp>
+          <p:nvCxnSpPr>
+            <p:cNvPr id="21" name="Straight Arrow Connector 20">
+              <a:extLst>
+                <a:ext uri="{FF2B5EF4-FFF2-40B4-BE49-F238E27FC236}">
+                  <a16:creationId xmlns:a16="http://schemas.microsoft.com/office/drawing/2014/main" id="{BA43662E-6319-37CE-3081-EE8146916FB6}"/>
+                </a:ext>
+              </a:extLst>
+            </p:cNvPr>
+            <p:cNvCxnSpPr>
+              <a:cxnSpLocks/>
+              <a:stCxn id="18" idx="0"/>
+            </p:cNvCxnSpPr>
+            <p:nvPr/>
+          </p:nvCxnSpPr>
+          <p:spPr>
+            <a:xfrm flipH="1" flipV="1">
+              <a:off x="8109922" y="2781871"/>
+              <a:ext cx="110329" cy="446189"/>
+            </a:xfrm>
+            <a:prstGeom prst="straightConnector1">
+              <a:avLst/>
+            </a:prstGeom>
+            <a:ln w="9525">
+              <a:tailEnd type="triangle"/>
+            </a:ln>
+          </p:spPr>
+          <p:style>
+            <a:lnRef idx="2">
+              <a:schemeClr val="accent1"/>
+            </a:lnRef>
+            <a:fillRef idx="0">
+              <a:schemeClr val="accent1"/>
+            </a:fillRef>
+            <a:effectRef idx="1">
+              <a:schemeClr val="accent1"/>
+            </a:effectRef>
+            <a:fontRef idx="minor">
+              <a:schemeClr val="tx1"/>
+            </a:fontRef>
+          </p:style>
+        </p:cxnSp>
+        <p:cxnSp>
+          <p:nvCxnSpPr>
+            <p:cNvPr id="22" name="Straight Arrow Connector 21">
+              <a:extLst>
+                <a:ext uri="{FF2B5EF4-FFF2-40B4-BE49-F238E27FC236}">
+                  <a16:creationId xmlns:a16="http://schemas.microsoft.com/office/drawing/2014/main" id="{ADCBA30D-B8B3-B65A-0003-B7E04DE11A3D}"/>
+                </a:ext>
+              </a:extLst>
+            </p:cNvPr>
+            <p:cNvCxnSpPr>
+              <a:cxnSpLocks/>
+              <a:endCxn id="18" idx="2"/>
+            </p:cNvCxnSpPr>
+            <p:nvPr/>
+          </p:nvCxnSpPr>
+          <p:spPr>
+            <a:xfrm flipV="1">
+              <a:off x="8109823" y="3467094"/>
+              <a:ext cx="110428" cy="692069"/>
+            </a:xfrm>
+            <a:prstGeom prst="straightConnector1">
+              <a:avLst/>
+            </a:prstGeom>
+            <a:ln w="9525">
+              <a:tailEnd type="triangle"/>
+            </a:ln>
+          </p:spPr>
+          <p:style>
+            <a:lnRef idx="2">
+              <a:schemeClr val="accent1"/>
+            </a:lnRef>
+            <a:fillRef idx="0">
+              <a:schemeClr val="accent1"/>
+            </a:fillRef>
+            <a:effectRef idx="1">
+              <a:schemeClr val="accent1"/>
+            </a:effectRef>
+            <a:fontRef idx="minor">
+              <a:schemeClr val="tx1"/>
+            </a:fontRef>
+          </p:style>
+        </p:cxnSp>
+        <p:cxnSp>
+          <p:nvCxnSpPr>
+            <p:cNvPr id="23" name="Straight Arrow Connector 22">
+              <a:extLst>
+                <a:ext uri="{FF2B5EF4-FFF2-40B4-BE49-F238E27FC236}">
+                  <a16:creationId xmlns:a16="http://schemas.microsoft.com/office/drawing/2014/main" id="{045F0B07-291D-36EE-9648-615194E53F06}"/>
+                </a:ext>
+              </a:extLst>
+            </p:cNvPr>
+            <p:cNvCxnSpPr>
+              <a:cxnSpLocks/>
+              <a:endCxn id="18" idx="1"/>
+            </p:cNvCxnSpPr>
+            <p:nvPr/>
+          </p:nvCxnSpPr>
+          <p:spPr>
+            <a:xfrm>
+              <a:off x="6936272" y="3345250"/>
+              <a:ext cx="1162565" cy="2327"/>
+            </a:xfrm>
+            <a:prstGeom prst="straightConnector1">
+              <a:avLst/>
+            </a:prstGeom>
+            <a:ln w="9525">
+              <a:tailEnd type="triangle"/>
+            </a:ln>
+          </p:spPr>
+          <p:style>
+            <a:lnRef idx="2">
+              <a:schemeClr val="accent1"/>
+            </a:lnRef>
+            <a:fillRef idx="0">
+              <a:schemeClr val="accent1"/>
+            </a:fillRef>
+            <a:effectRef idx="1">
+              <a:schemeClr val="accent1"/>
+            </a:effectRef>
+            <a:fontRef idx="minor">
+              <a:schemeClr val="tx1"/>
+            </a:fontRef>
+          </p:style>
+        </p:cxnSp>
+        <p:cxnSp>
+          <p:nvCxnSpPr>
+            <p:cNvPr id="24" name="Straight Arrow Connector 23">
+              <a:extLst>
+                <a:ext uri="{FF2B5EF4-FFF2-40B4-BE49-F238E27FC236}">
+                  <a16:creationId xmlns:a16="http://schemas.microsoft.com/office/drawing/2014/main" id="{24D284FB-54E2-14C9-FB64-736292079EEC}"/>
+                </a:ext>
+              </a:extLst>
+            </p:cNvPr>
+            <p:cNvCxnSpPr>
+              <a:cxnSpLocks/>
+              <a:stCxn id="67" idx="3"/>
+              <a:endCxn id="9" idx="1"/>
+            </p:cNvCxnSpPr>
+            <p:nvPr/>
+          </p:nvCxnSpPr>
+          <p:spPr>
+            <a:xfrm>
+              <a:off x="5560546" y="3347577"/>
+              <a:ext cx="1132898" cy="0"/>
+            </a:xfrm>
+            <a:prstGeom prst="straightConnector1">
+              <a:avLst/>
+            </a:prstGeom>
+            <a:ln w="9525">
+              <a:tailEnd type="triangle"/>
+            </a:ln>
+          </p:spPr>
+          <p:style>
+            <a:lnRef idx="2">
+              <a:schemeClr val="accent1"/>
+            </a:lnRef>
+            <a:fillRef idx="0">
+              <a:schemeClr val="accent1"/>
+            </a:fillRef>
+            <a:effectRef idx="1">
+              <a:schemeClr val="accent1"/>
+            </a:effectRef>
+            <a:fontRef idx="minor">
+              <a:schemeClr val="tx1"/>
+            </a:fontRef>
+          </p:style>
+        </p:cxnSp>
+        <p:cxnSp>
+          <p:nvCxnSpPr>
+            <p:cNvPr id="25" name="Straight Arrow Connector 24">
+              <a:extLst>
+                <a:ext uri="{FF2B5EF4-FFF2-40B4-BE49-F238E27FC236}">
+                  <a16:creationId xmlns:a16="http://schemas.microsoft.com/office/drawing/2014/main" id="{7FE71C38-42E8-0B1B-6FE4-7AA1C836E67E}"/>
+                </a:ext>
+              </a:extLst>
+            </p:cNvPr>
+            <p:cNvCxnSpPr/>
+            <p:nvPr/>
+          </p:nvCxnSpPr>
+          <p:spPr>
+            <a:xfrm>
+              <a:off x="8326791" y="3348408"/>
+              <a:ext cx="449552" cy="6962"/>
+            </a:xfrm>
+            <a:prstGeom prst="straightConnector1">
+              <a:avLst/>
+            </a:prstGeom>
+            <a:ln w="9525">
+              <a:tailEnd type="triangle"/>
+            </a:ln>
+          </p:spPr>
+          <p:style>
+            <a:lnRef idx="2">
+              <a:schemeClr val="accent1"/>
+            </a:lnRef>
+            <a:fillRef idx="0">
+              <a:schemeClr val="accent1"/>
+            </a:fillRef>
+            <a:effectRef idx="1">
+              <a:schemeClr val="accent1"/>
+            </a:effectRef>
+            <a:fontRef idx="minor">
+              <a:schemeClr val="tx1"/>
+            </a:fontRef>
+          </p:style>
+        </p:cxnSp>
+        <p:sp>
+          <p:nvSpPr>
+            <p:cNvPr id="26" name="Rectangle 25">
+              <a:extLst>
+                <a:ext uri="{FF2B5EF4-FFF2-40B4-BE49-F238E27FC236}">
+                  <a16:creationId xmlns:a16="http://schemas.microsoft.com/office/drawing/2014/main" id="{C5F40104-C892-5C2E-6FF2-0E7ECC9C8966}"/>
+                </a:ext>
+              </a:extLst>
+            </p:cNvPr>
+            <p:cNvSpPr/>
+            <p:nvPr/>
+          </p:nvSpPr>
+          <p:spPr>
+            <a:xfrm>
+              <a:off x="6208708" y="2402977"/>
+              <a:ext cx="927340" cy="2212676"/>
+            </a:xfrm>
+            <a:prstGeom prst="rect">
+              <a:avLst/>
+            </a:prstGeom>
+            <a:solidFill>
+              <a:schemeClr val="accent1">
+                <a:alpha val="13000"/>
+              </a:schemeClr>
+            </a:solidFill>
+            <a:ln w="9525"/>
+          </p:spPr>
+          <p:style>
+            <a:lnRef idx="2">
+              <a:schemeClr val="accent1">
+                <a:shade val="15000"/>
+              </a:schemeClr>
+            </a:lnRef>
+            <a:fillRef idx="1">
+              <a:schemeClr val="accent1"/>
+            </a:fillRef>
+            <a:effectRef idx="0">
+              <a:schemeClr val="accent1"/>
+            </a:effectRef>
+            <a:fontRef idx="minor">
+              <a:schemeClr val="lt1"/>
+            </a:fontRef>
+          </p:style>
+          <p:txBody>
+            <a:bodyPr rtlCol="0" anchor="ctr"/>
+            <a:lstStyle/>
+            <a:p>
+              <a:pPr algn="ctr"/>
+              <a:endParaRPr lang="en-US"/>
+            </a:p>
+          </p:txBody>
+        </p:sp>
+        <p:sp>
+          <p:nvSpPr>
+            <p:cNvPr id="27" name="Rectangle 26">
+              <a:extLst>
+                <a:ext uri="{FF2B5EF4-FFF2-40B4-BE49-F238E27FC236}">
+                  <a16:creationId xmlns:a16="http://schemas.microsoft.com/office/drawing/2014/main" id="{A6774416-CD18-3AAA-F10C-0B1208CB5B32}"/>
+                </a:ext>
+              </a:extLst>
+            </p:cNvPr>
+            <p:cNvSpPr/>
+            <p:nvPr/>
+          </p:nvSpPr>
+          <p:spPr>
+            <a:xfrm>
+              <a:off x="7643267" y="2415223"/>
+              <a:ext cx="927340" cy="2212676"/>
+            </a:xfrm>
+            <a:prstGeom prst="rect">
+              <a:avLst/>
+            </a:prstGeom>
+            <a:solidFill>
+              <a:schemeClr val="accent1">
+                <a:alpha val="13000"/>
+              </a:schemeClr>
+            </a:solidFill>
+            <a:ln w="9525"/>
+          </p:spPr>
+          <p:style>
+            <a:lnRef idx="2">
+              <a:schemeClr val="accent1">
+                <a:shade val="15000"/>
+              </a:schemeClr>
+            </a:lnRef>
+            <a:fillRef idx="1">
+              <a:schemeClr val="accent1"/>
+            </a:fillRef>
+            <a:effectRef idx="0">
+              <a:schemeClr val="accent1"/>
+            </a:effectRef>
+            <a:fontRef idx="minor">
+              <a:schemeClr val="lt1"/>
+            </a:fontRef>
+          </p:style>
+          <p:txBody>
+            <a:bodyPr rtlCol="0" anchor="ctr"/>
+            <a:lstStyle/>
+            <a:p>
+              <a:pPr algn="ctr"/>
+              <a:endParaRPr lang="en-US"/>
+            </a:p>
+          </p:txBody>
+        </p:sp>
+        <mc:AlternateContent xmlns:mc="http://schemas.openxmlformats.org/markup-compatibility/2006">
+          <mc:Choice xmlns:a14="http://schemas.microsoft.com/office/drawing/2010/main" Requires="a14">
+            <p:sp>
+              <p:nvSpPr>
+                <p:cNvPr id="28" name="TextBox 27">
+                  <a:extLst>
+                    <a:ext uri="{FF2B5EF4-FFF2-40B4-BE49-F238E27FC236}">
+                      <a16:creationId xmlns:a16="http://schemas.microsoft.com/office/drawing/2014/main" id="{FDEC7C6E-268B-B17D-9BFC-CA4704787967}"/>
+                    </a:ext>
+                  </a:extLst>
+                </p:cNvPr>
+                <p:cNvSpPr txBox="1"/>
+                <p:nvPr/>
+              </p:nvSpPr>
+              <p:spPr>
+                <a:xfrm>
+                  <a:off x="6538757" y="4615011"/>
+                  <a:ext cx="256417" cy="230832"/>
+                </a:xfrm>
+                <a:prstGeom prst="rect">
+                  <a:avLst/>
+                </a:prstGeom>
+                <a:noFill/>
+              </p:spPr>
+              <p:txBody>
+                <a:bodyPr wrap="none" rtlCol="0">
+                  <a:spAutoFit/>
+                </a:bodyPr>
+                <a:lstStyle/>
+                <a:p>
+                  <a14:m>
+                    <m:oMathPara xmlns:m="http://schemas.openxmlformats.org/officeDocument/2006/math">
+                      <m:oMathParaPr>
+                        <m:jc m:val="centerGroup"/>
+                      </m:oMathParaPr>
+                      <m:oMath xmlns:m="http://schemas.openxmlformats.org/officeDocument/2006/math">
+                        <m:r>
+                          <a:rPr lang="en-US" sz="900" i="1" dirty="0" smtClean="0">
+                            <a:latin typeface="Cambria Math" panose="02040503050406030204" pitchFamily="18" charset="0"/>
+                          </a:rPr>
+                          <m:t>𝑡</m:t>
+                        </m:r>
+                      </m:oMath>
+                    </m:oMathPara>
+                  </a14:m>
+                  <a:endParaRPr lang="en-US" sz="900" dirty="0"/>
+                </a:p>
+              </p:txBody>
+            </p:sp>
+          </mc:Choice>
+          <mc:Fallback>
+            <p:sp>
+              <p:nvSpPr>
+                <p:cNvPr id="28" name="TextBox 27">
+                  <a:extLst>
+                    <a:ext uri="{FF2B5EF4-FFF2-40B4-BE49-F238E27FC236}">
+                      <a16:creationId xmlns:a16="http://schemas.microsoft.com/office/drawing/2014/main" id="{FDEC7C6E-268B-B17D-9BFC-CA4704787967}"/>
+                    </a:ext>
+                  </a:extLst>
+                </p:cNvPr>
+                <p:cNvSpPr txBox="1">
+                  <a:spLocks noRot="1" noChangeAspect="1" noMove="1" noResize="1" noEditPoints="1" noAdjustHandles="1" noChangeArrowheads="1" noChangeShapeType="1" noTextEdit="1"/>
+                </p:cNvSpPr>
+                <p:nvPr/>
+              </p:nvSpPr>
+              <p:spPr>
+                <a:xfrm>
+                  <a:off x="6538757" y="4615011"/>
+                  <a:ext cx="256417" cy="230832"/>
+                </a:xfrm>
+                <a:prstGeom prst="rect">
+                  <a:avLst/>
+                </a:prstGeom>
+                <a:blipFill>
+                  <a:blip r:embed="rId2"/>
+                  <a:stretch>
+                    <a:fillRect/>
+                  </a:stretch>
+                </a:blipFill>
+              </p:spPr>
+              <p:txBody>
+                <a:bodyPr/>
+                <a:lstStyle/>
+                <a:p>
+                  <a:r>
+                    <a:rPr lang="en-US">
+                      <a:noFill/>
+                    </a:rPr>
+                    <a:t> </a:t>
+                  </a:r>
+                </a:p>
+              </p:txBody>
+            </p:sp>
+          </mc:Fallback>
+        </mc:AlternateContent>
+        <mc:AlternateContent xmlns:mc="http://schemas.openxmlformats.org/markup-compatibility/2006">
+          <mc:Choice xmlns:a14="http://schemas.microsoft.com/office/drawing/2010/main" Requires="a14">
+            <p:sp>
+              <p:nvSpPr>
+                <p:cNvPr id="29" name="TextBox 28">
+                  <a:extLst>
+                    <a:ext uri="{FF2B5EF4-FFF2-40B4-BE49-F238E27FC236}">
+                      <a16:creationId xmlns:a16="http://schemas.microsoft.com/office/drawing/2014/main" id="{0DA95FD5-F0E8-309E-BD1F-7BB03BF7D9DD}"/>
+                    </a:ext>
+                  </a:extLst>
+                </p:cNvPr>
+                <p:cNvSpPr txBox="1"/>
+                <p:nvPr/>
+              </p:nvSpPr>
+              <p:spPr>
+                <a:xfrm>
+                  <a:off x="7904925" y="4615011"/>
+                  <a:ext cx="458395" cy="230832"/>
+                </a:xfrm>
+                <a:prstGeom prst="rect">
+                  <a:avLst/>
+                </a:prstGeom>
+                <a:noFill/>
+              </p:spPr>
+              <p:txBody>
+                <a:bodyPr wrap="none" rtlCol="0">
+                  <a:spAutoFit/>
+                </a:bodyPr>
+                <a:lstStyle/>
+                <a:p>
+                  <a14:m>
+                    <m:oMathPara xmlns:m="http://schemas.openxmlformats.org/officeDocument/2006/math">
+                      <m:oMathParaPr>
+                        <m:jc m:val="centerGroup"/>
+                      </m:oMathParaPr>
+                      <m:oMath xmlns:m="http://schemas.openxmlformats.org/officeDocument/2006/math">
+                        <m:r>
+                          <a:rPr lang="en-US" sz="900" i="1" dirty="0" smtClean="0">
+                            <a:latin typeface="Cambria Math" panose="02040503050406030204" pitchFamily="18" charset="0"/>
+                          </a:rPr>
+                          <m:t>𝑡</m:t>
+                        </m:r>
+                        <m:r>
+                          <a:rPr lang="en-US" sz="900" b="0" i="1" dirty="0" smtClean="0">
+                            <a:latin typeface="Cambria Math" panose="02040503050406030204" pitchFamily="18" charset="0"/>
+                          </a:rPr>
+                          <m:t>+1</m:t>
+                        </m:r>
+                      </m:oMath>
+                    </m:oMathPara>
+                  </a14:m>
+                  <a:endParaRPr lang="en-US" sz="900" dirty="0"/>
+                </a:p>
+              </p:txBody>
+            </p:sp>
+          </mc:Choice>
+          <mc:Fallback>
+            <p:sp>
+              <p:nvSpPr>
+                <p:cNvPr id="29" name="TextBox 28">
+                  <a:extLst>
+                    <a:ext uri="{FF2B5EF4-FFF2-40B4-BE49-F238E27FC236}">
+                      <a16:creationId xmlns:a16="http://schemas.microsoft.com/office/drawing/2014/main" id="{0DA95FD5-F0E8-309E-BD1F-7BB03BF7D9DD}"/>
+                    </a:ext>
+                  </a:extLst>
+                </p:cNvPr>
+                <p:cNvSpPr txBox="1">
+                  <a:spLocks noRot="1" noChangeAspect="1" noMove="1" noResize="1" noEditPoints="1" noAdjustHandles="1" noChangeArrowheads="1" noChangeShapeType="1" noTextEdit="1"/>
+                </p:cNvSpPr>
+                <p:nvPr/>
+              </p:nvSpPr>
+              <p:spPr>
+                <a:xfrm>
+                  <a:off x="7904925" y="4615011"/>
+                  <a:ext cx="458395" cy="230832"/>
+                </a:xfrm>
+                <a:prstGeom prst="rect">
+                  <a:avLst/>
+                </a:prstGeom>
+                <a:blipFill>
+                  <a:blip r:embed="rId3"/>
+                  <a:stretch>
+                    <a:fillRect/>
+                  </a:stretch>
+                </a:blipFill>
+              </p:spPr>
+              <p:txBody>
+                <a:bodyPr/>
+                <a:lstStyle/>
+                <a:p>
+                  <a:r>
+                    <a:rPr lang="en-US">
+                      <a:noFill/>
+                    </a:rPr>
+                    <a:t> </a:t>
+                  </a:r>
+                </a:p>
+              </p:txBody>
+            </p:sp>
+          </mc:Fallback>
+        </mc:AlternateContent>
+        <p:sp>
+          <p:nvSpPr>
+            <p:cNvPr id="30" name="Rectangle 29">
+              <a:extLst>
+                <a:ext uri="{FF2B5EF4-FFF2-40B4-BE49-F238E27FC236}">
+                  <a16:creationId xmlns:a16="http://schemas.microsoft.com/office/drawing/2014/main" id="{987884ED-DACD-1A19-A254-4B74FA3A1971}"/>
+                </a:ext>
+              </a:extLst>
+            </p:cNvPr>
+            <p:cNvSpPr/>
+            <p:nvPr/>
+          </p:nvSpPr>
+          <p:spPr>
+            <a:xfrm>
+              <a:off x="3092278" y="2593314"/>
+              <a:ext cx="242828" cy="239034"/>
+            </a:xfrm>
+            <a:prstGeom prst="rect">
+              <a:avLst/>
+            </a:prstGeom>
+            <a:solidFill>
+              <a:schemeClr val="accent1">
+                <a:alpha val="76000"/>
+              </a:schemeClr>
+            </a:solidFill>
+          </p:spPr>
+          <p:style>
+            <a:lnRef idx="2">
+              <a:schemeClr val="accent1">
+                <a:shade val="15000"/>
+              </a:schemeClr>
+            </a:lnRef>
+            <a:fillRef idx="1">
+              <a:schemeClr val="accent1"/>
+            </a:fillRef>
+            <a:effectRef idx="0">
+              <a:schemeClr val="accent1"/>
+            </a:effectRef>
+            <a:fontRef idx="minor">
+              <a:schemeClr val="lt1"/>
+            </a:fontRef>
+          </p:style>
+          <p:txBody>
+            <a:bodyPr rtlCol="0" anchor="ctr"/>
+            <a:lstStyle/>
+            <a:p>
+              <a:pPr algn="ctr"/>
+              <a:endParaRPr lang="en-US"/>
+            </a:p>
+          </p:txBody>
+        </p:sp>
+        <p:sp>
+          <p:nvSpPr>
+            <p:cNvPr id="31" name="Rectangle 30">
+              <a:extLst>
+                <a:ext uri="{FF2B5EF4-FFF2-40B4-BE49-F238E27FC236}">
+                  <a16:creationId xmlns:a16="http://schemas.microsoft.com/office/drawing/2014/main" id="{F8AC8D46-E7C9-F0D2-3CBD-8CC047E0D706}"/>
+                </a:ext>
+              </a:extLst>
+            </p:cNvPr>
+            <p:cNvSpPr/>
+            <p:nvPr/>
+          </p:nvSpPr>
+          <p:spPr>
+            <a:xfrm>
+              <a:off x="3092278" y="3088473"/>
+              <a:ext cx="242828" cy="239034"/>
+            </a:xfrm>
+            <a:prstGeom prst="rect">
+              <a:avLst/>
+            </a:prstGeom>
+            <a:solidFill>
+              <a:schemeClr val="accent1">
+                <a:alpha val="30400"/>
+              </a:schemeClr>
+            </a:solidFill>
+          </p:spPr>
+          <p:style>
+            <a:lnRef idx="2">
+              <a:schemeClr val="accent1">
+                <a:shade val="15000"/>
+              </a:schemeClr>
+            </a:lnRef>
+            <a:fillRef idx="1">
+              <a:schemeClr val="accent1"/>
+            </a:fillRef>
+            <a:effectRef idx="0">
+              <a:schemeClr val="accent1"/>
+            </a:effectRef>
+            <a:fontRef idx="minor">
+              <a:schemeClr val="lt1"/>
+            </a:fontRef>
+          </p:style>
+          <p:txBody>
+            <a:bodyPr rtlCol="0" anchor="ctr"/>
+            <a:lstStyle/>
+            <a:p>
+              <a:pPr algn="ctr"/>
+              <a:endParaRPr lang="en-US"/>
+            </a:p>
+          </p:txBody>
+        </p:sp>
+        <p:sp>
+          <p:nvSpPr>
+            <p:cNvPr id="32" name="Rectangle 31">
+              <a:extLst>
+                <a:ext uri="{FF2B5EF4-FFF2-40B4-BE49-F238E27FC236}">
+                  <a16:creationId xmlns:a16="http://schemas.microsoft.com/office/drawing/2014/main" id="{0718FD0F-EB3F-5C31-6999-C363023F673A}"/>
+                </a:ext>
+              </a:extLst>
+            </p:cNvPr>
+            <p:cNvSpPr/>
+            <p:nvPr/>
+          </p:nvSpPr>
+          <p:spPr>
+            <a:xfrm>
+              <a:off x="3092278" y="3613528"/>
+              <a:ext cx="242828" cy="239034"/>
+            </a:xfrm>
+            <a:prstGeom prst="rect">
+              <a:avLst/>
+            </a:prstGeom>
+            <a:pattFill prst="wdDnDiag">
+              <a:fgClr>
+                <a:schemeClr val="accent1"/>
+              </a:fgClr>
+              <a:bgClr>
+                <a:schemeClr val="bg1"/>
+              </a:bgClr>
+            </a:pattFill>
+          </p:spPr>
+          <p:style>
+            <a:lnRef idx="2">
+              <a:schemeClr val="accent1">
+                <a:shade val="15000"/>
+              </a:schemeClr>
+            </a:lnRef>
+            <a:fillRef idx="1">
+              <a:schemeClr val="accent1"/>
+            </a:fillRef>
+            <a:effectRef idx="0">
+              <a:schemeClr val="accent1"/>
+            </a:effectRef>
+            <a:fontRef idx="minor">
+              <a:schemeClr val="lt1"/>
+            </a:fontRef>
+          </p:style>
+          <p:txBody>
+            <a:bodyPr rtlCol="0" anchor="ctr"/>
+            <a:lstStyle/>
+            <a:p>
+              <a:pPr algn="ctr"/>
+              <a:endParaRPr lang="en-US"/>
+            </a:p>
+          </p:txBody>
+        </p:sp>
+        <p:sp>
+          <p:nvSpPr>
+            <p:cNvPr id="34" name="TextBox 33">
+              <a:extLst>
+                <a:ext uri="{FF2B5EF4-FFF2-40B4-BE49-F238E27FC236}">
+                  <a16:creationId xmlns:a16="http://schemas.microsoft.com/office/drawing/2014/main" id="{C47FB4BA-6CD9-E021-788F-179ECD129DC6}"/>
+                </a:ext>
+              </a:extLst>
+            </p:cNvPr>
+            <p:cNvSpPr txBox="1"/>
+            <p:nvPr/>
+          </p:nvSpPr>
+          <p:spPr>
+            <a:xfrm>
+              <a:off x="3387747" y="2528165"/>
+              <a:ext cx="894797" cy="369332"/>
+            </a:xfrm>
+            <a:prstGeom prst="rect">
+              <a:avLst/>
+            </a:prstGeom>
+            <a:noFill/>
+          </p:spPr>
+          <p:txBody>
+            <a:bodyPr wrap="none" rtlCol="0">
+              <a:spAutoFit/>
+            </a:bodyPr>
+            <a:lstStyle/>
+            <a:p>
+              <a:r>
+                <a:rPr lang="en-US" sz="900" dirty="0"/>
+                <a:t>output neuron</a:t>
+              </a:r>
+            </a:p>
+            <a:p>
+              <a:r>
+                <a:rPr lang="en-US" sz="900" dirty="0"/>
+                <a:t>group</a:t>
+              </a:r>
+            </a:p>
+          </p:txBody>
+        </p:sp>
+        <p:sp>
+          <p:nvSpPr>
+            <p:cNvPr id="35" name="TextBox 34">
+              <a:extLst>
+                <a:ext uri="{FF2B5EF4-FFF2-40B4-BE49-F238E27FC236}">
+                  <a16:creationId xmlns:a16="http://schemas.microsoft.com/office/drawing/2014/main" id="{D88D1A75-4DB7-A49A-15CF-E086A420314E}"/>
+                </a:ext>
+              </a:extLst>
+            </p:cNvPr>
+            <p:cNvSpPr txBox="1"/>
+            <p:nvPr/>
+          </p:nvSpPr>
+          <p:spPr>
+            <a:xfrm>
+              <a:off x="3391371" y="3023324"/>
+              <a:ext cx="851515" cy="369332"/>
+            </a:xfrm>
+            <a:prstGeom prst="rect">
+              <a:avLst/>
+            </a:prstGeom>
+            <a:noFill/>
+          </p:spPr>
+          <p:txBody>
+            <a:bodyPr wrap="none" rtlCol="0">
+              <a:spAutoFit/>
+            </a:bodyPr>
+            <a:lstStyle/>
+            <a:p>
+              <a:r>
+                <a:rPr lang="en-US" sz="900" dirty="0"/>
+                <a:t>hidden state </a:t>
+              </a:r>
+            </a:p>
+            <a:p>
+              <a:r>
+                <a:rPr lang="en-US" sz="900" dirty="0"/>
+                <a:t>neuron group</a:t>
+              </a:r>
+            </a:p>
+          </p:txBody>
+        </p:sp>
+        <p:cxnSp>
+          <p:nvCxnSpPr>
+            <p:cNvPr id="36" name="Straight Arrow Connector 35">
+              <a:extLst>
+                <a:ext uri="{FF2B5EF4-FFF2-40B4-BE49-F238E27FC236}">
+                  <a16:creationId xmlns:a16="http://schemas.microsoft.com/office/drawing/2014/main" id="{4FB8DB6B-ECC6-9521-F53E-01EAD1328259}"/>
+                </a:ext>
+              </a:extLst>
+            </p:cNvPr>
+            <p:cNvCxnSpPr>
+              <a:cxnSpLocks/>
+            </p:cNvCxnSpPr>
+            <p:nvPr/>
+          </p:nvCxnSpPr>
+          <p:spPr>
+            <a:xfrm flipV="1">
+              <a:off x="3200197" y="4078067"/>
+              <a:ext cx="0" cy="303090"/>
+            </a:xfrm>
+            <a:prstGeom prst="straightConnector1">
+              <a:avLst/>
+            </a:prstGeom>
+            <a:ln w="9525">
+              <a:tailEnd type="triangle"/>
+            </a:ln>
+          </p:spPr>
+          <p:style>
+            <a:lnRef idx="2">
+              <a:schemeClr val="accent1"/>
+            </a:lnRef>
+            <a:fillRef idx="0">
+              <a:schemeClr val="accent1"/>
+            </a:fillRef>
+            <a:effectRef idx="1">
+              <a:schemeClr val="accent1"/>
+            </a:effectRef>
+            <a:fontRef idx="minor">
+              <a:schemeClr val="tx1"/>
+            </a:fontRef>
+          </p:style>
+        </p:cxnSp>
+        <p:sp>
+          <p:nvSpPr>
+            <p:cNvPr id="37" name="TextBox 36">
+              <a:extLst>
+                <a:ext uri="{FF2B5EF4-FFF2-40B4-BE49-F238E27FC236}">
+                  <a16:creationId xmlns:a16="http://schemas.microsoft.com/office/drawing/2014/main" id="{3FF9A28B-DF6D-84B0-191A-624899C2258D}"/>
+                </a:ext>
+              </a:extLst>
+            </p:cNvPr>
+            <p:cNvSpPr txBox="1"/>
+            <p:nvPr/>
+          </p:nvSpPr>
+          <p:spPr>
+            <a:xfrm>
+              <a:off x="3405827" y="3611864"/>
+              <a:ext cx="497252" cy="230832"/>
+            </a:xfrm>
+            <a:prstGeom prst="rect">
+              <a:avLst/>
+            </a:prstGeom>
+            <a:noFill/>
+          </p:spPr>
+          <p:txBody>
+            <a:bodyPr wrap="none" rtlCol="0">
+              <a:spAutoFit/>
+            </a:bodyPr>
+            <a:lstStyle/>
+            <a:p>
+              <a:r>
+                <a:rPr lang="en-US" sz="900" dirty="0"/>
+                <a:t>inputs</a:t>
+              </a:r>
+            </a:p>
+          </p:txBody>
+        </p:sp>
+        <p:sp>
+          <p:nvSpPr>
+            <p:cNvPr id="39" name="TextBox 38">
+              <a:extLst>
+                <a:ext uri="{FF2B5EF4-FFF2-40B4-BE49-F238E27FC236}">
+                  <a16:creationId xmlns:a16="http://schemas.microsoft.com/office/drawing/2014/main" id="{71DC6C3F-89BC-C65F-707E-09CA0E5629AE}"/>
+                </a:ext>
+              </a:extLst>
+            </p:cNvPr>
+            <p:cNvSpPr txBox="1"/>
+            <p:nvPr/>
+          </p:nvSpPr>
+          <p:spPr>
+            <a:xfrm>
+              <a:off x="3392333" y="4024974"/>
+              <a:ext cx="1237839" cy="369332"/>
+            </a:xfrm>
+            <a:prstGeom prst="rect">
+              <a:avLst/>
+            </a:prstGeom>
+            <a:noFill/>
+          </p:spPr>
+          <p:txBody>
+            <a:bodyPr wrap="none" rtlCol="0">
+              <a:spAutoFit/>
+            </a:bodyPr>
+            <a:lstStyle/>
+            <a:p>
+              <a:r>
+                <a:rPr lang="en-US" sz="900" dirty="0"/>
+                <a:t>group of weights</a:t>
+              </a:r>
+            </a:p>
+            <a:p>
+              <a:r>
+                <a:rPr lang="en-US" sz="900" dirty="0"/>
+                <a:t>with information flow</a:t>
+              </a:r>
+            </a:p>
+          </p:txBody>
+        </p:sp>
+        <p:sp>
+          <p:nvSpPr>
+            <p:cNvPr id="53" name="Rectangle 52">
+              <a:extLst>
+                <a:ext uri="{FF2B5EF4-FFF2-40B4-BE49-F238E27FC236}">
+                  <a16:creationId xmlns:a16="http://schemas.microsoft.com/office/drawing/2014/main" id="{06AA8339-6E17-A684-E65D-767D9CFA2417}"/>
+                </a:ext>
+              </a:extLst>
+            </p:cNvPr>
+            <p:cNvSpPr/>
+            <p:nvPr/>
+          </p:nvSpPr>
+          <p:spPr>
+            <a:xfrm>
+              <a:off x="6448518" y="3521561"/>
+              <a:ext cx="242828" cy="239034"/>
+            </a:xfrm>
+            <a:prstGeom prst="rect">
+              <a:avLst/>
+            </a:prstGeom>
+            <a:solidFill>
+              <a:schemeClr val="accent1">
+                <a:alpha val="30400"/>
+              </a:schemeClr>
+            </a:solidFill>
+          </p:spPr>
+          <p:style>
+            <a:lnRef idx="2">
+              <a:schemeClr val="accent1">
+                <a:shade val="15000"/>
+              </a:schemeClr>
+            </a:lnRef>
+            <a:fillRef idx="1">
+              <a:schemeClr val="accent1"/>
+            </a:fillRef>
+            <a:effectRef idx="0">
+              <a:schemeClr val="accent1"/>
+            </a:effectRef>
+            <a:fontRef idx="minor">
+              <a:schemeClr val="lt1"/>
+            </a:fontRef>
+          </p:style>
+          <p:txBody>
+            <a:bodyPr rtlCol="0" anchor="ctr"/>
+            <a:lstStyle/>
+            <a:p>
+              <a:pPr algn="ctr"/>
+              <a:endParaRPr lang="en-US"/>
+            </a:p>
+          </p:txBody>
+        </p:sp>
+        <p:sp>
+          <p:nvSpPr>
+            <p:cNvPr id="54" name="Rectangle 53">
+              <a:extLst>
+                <a:ext uri="{FF2B5EF4-FFF2-40B4-BE49-F238E27FC236}">
+                  <a16:creationId xmlns:a16="http://schemas.microsoft.com/office/drawing/2014/main" id="{FE9B07C4-4894-CD92-234A-4BF0D6E59DD9}"/>
+                </a:ext>
+              </a:extLst>
+            </p:cNvPr>
+            <p:cNvSpPr/>
+            <p:nvPr/>
+          </p:nvSpPr>
+          <p:spPr>
+            <a:xfrm>
+              <a:off x="7864109" y="3521561"/>
+              <a:ext cx="242828" cy="239034"/>
+            </a:xfrm>
+            <a:prstGeom prst="rect">
+              <a:avLst/>
+            </a:prstGeom>
+            <a:solidFill>
+              <a:schemeClr val="accent1">
+                <a:alpha val="30400"/>
+              </a:schemeClr>
+            </a:solidFill>
+          </p:spPr>
+          <p:style>
+            <a:lnRef idx="2">
+              <a:schemeClr val="accent1">
+                <a:shade val="15000"/>
+              </a:schemeClr>
+            </a:lnRef>
+            <a:fillRef idx="1">
+              <a:schemeClr val="accent1"/>
+            </a:fillRef>
+            <a:effectRef idx="0">
+              <a:schemeClr val="accent1"/>
+            </a:effectRef>
+            <a:fontRef idx="minor">
+              <a:schemeClr val="lt1"/>
+            </a:fontRef>
+          </p:style>
+          <p:txBody>
+            <a:bodyPr rtlCol="0" anchor="ctr"/>
+            <a:lstStyle/>
+            <a:p>
+              <a:pPr algn="ctr"/>
+              <a:endParaRPr lang="en-US"/>
+            </a:p>
+          </p:txBody>
+        </p:sp>
+        <p:cxnSp>
+          <p:nvCxnSpPr>
+            <p:cNvPr id="55" name="Straight Arrow Connector 54">
+              <a:extLst>
+                <a:ext uri="{FF2B5EF4-FFF2-40B4-BE49-F238E27FC236}">
+                  <a16:creationId xmlns:a16="http://schemas.microsoft.com/office/drawing/2014/main" id="{4C5D4B7C-A9D7-FBE2-2CE4-F9DBF4B7A2F8}"/>
+                </a:ext>
+              </a:extLst>
+            </p:cNvPr>
+            <p:cNvCxnSpPr>
+              <a:cxnSpLocks/>
+              <a:stCxn id="53" idx="0"/>
+              <a:endCxn id="10" idx="2"/>
+            </p:cNvCxnSpPr>
+            <p:nvPr/>
+          </p:nvCxnSpPr>
+          <p:spPr>
+            <a:xfrm flipV="1">
+              <a:off x="6569932" y="2777980"/>
+              <a:ext cx="97034" cy="743581"/>
+            </a:xfrm>
+            <a:prstGeom prst="straightConnector1">
+              <a:avLst/>
+            </a:prstGeom>
+            <a:ln w="9525">
+              <a:tailEnd type="triangle"/>
+            </a:ln>
+          </p:spPr>
+          <p:style>
+            <a:lnRef idx="2">
+              <a:schemeClr val="accent1"/>
+            </a:lnRef>
+            <a:fillRef idx="0">
+              <a:schemeClr val="accent1"/>
+            </a:fillRef>
+            <a:effectRef idx="1">
+              <a:schemeClr val="accent1"/>
+            </a:effectRef>
+            <a:fontRef idx="minor">
+              <a:schemeClr val="tx1"/>
+            </a:fontRef>
+          </p:style>
+        </p:cxnSp>
+        <p:cxnSp>
+          <p:nvCxnSpPr>
+            <p:cNvPr id="58" name="Straight Arrow Connector 57">
+              <a:extLst>
+                <a:ext uri="{FF2B5EF4-FFF2-40B4-BE49-F238E27FC236}">
+                  <a16:creationId xmlns:a16="http://schemas.microsoft.com/office/drawing/2014/main" id="{F9CF4133-C531-C4C4-E241-2FC6CEC36E40}"/>
+                </a:ext>
+              </a:extLst>
+            </p:cNvPr>
+            <p:cNvCxnSpPr>
+              <a:cxnSpLocks/>
+              <a:stCxn id="11" idx="0"/>
+              <a:endCxn id="53" idx="2"/>
+            </p:cNvCxnSpPr>
+            <p:nvPr/>
+          </p:nvCxnSpPr>
+          <p:spPr>
+            <a:xfrm flipH="1" flipV="1">
+              <a:off x="6569932" y="3760595"/>
+              <a:ext cx="97034" cy="394677"/>
+            </a:xfrm>
+            <a:prstGeom prst="straightConnector1">
+              <a:avLst/>
+            </a:prstGeom>
+            <a:ln w="9525">
+              <a:tailEnd type="triangle"/>
+            </a:ln>
+          </p:spPr>
+          <p:style>
+            <a:lnRef idx="2">
+              <a:schemeClr val="accent1"/>
+            </a:lnRef>
+            <a:fillRef idx="0">
+              <a:schemeClr val="accent1"/>
+            </a:fillRef>
+            <a:effectRef idx="1">
+              <a:schemeClr val="accent1"/>
+            </a:effectRef>
+            <a:fontRef idx="minor">
+              <a:schemeClr val="tx1"/>
+            </a:fontRef>
+          </p:style>
+        </p:cxnSp>
+        <p:cxnSp>
+          <p:nvCxnSpPr>
+            <p:cNvPr id="61" name="Straight Arrow Connector 60">
+              <a:extLst>
+                <a:ext uri="{FF2B5EF4-FFF2-40B4-BE49-F238E27FC236}">
+                  <a16:creationId xmlns:a16="http://schemas.microsoft.com/office/drawing/2014/main" id="{9B26246C-E1FA-4E2C-6FC2-1E5FDD51C933}"/>
+                </a:ext>
+              </a:extLst>
+            </p:cNvPr>
+            <p:cNvCxnSpPr>
+              <a:cxnSpLocks/>
+              <a:stCxn id="54" idx="0"/>
+            </p:cNvCxnSpPr>
+            <p:nvPr/>
+          </p:nvCxnSpPr>
+          <p:spPr>
+            <a:xfrm flipV="1">
+              <a:off x="7985523" y="2777980"/>
+              <a:ext cx="131708" cy="743581"/>
+            </a:xfrm>
+            <a:prstGeom prst="straightConnector1">
+              <a:avLst/>
+            </a:prstGeom>
+            <a:ln w="9525">
+              <a:tailEnd type="triangle"/>
+            </a:ln>
+          </p:spPr>
+          <p:style>
+            <a:lnRef idx="2">
+              <a:schemeClr val="accent1"/>
+            </a:lnRef>
+            <a:fillRef idx="0">
+              <a:schemeClr val="accent1"/>
+            </a:fillRef>
+            <a:effectRef idx="1">
+              <a:schemeClr val="accent1"/>
+            </a:effectRef>
+            <a:fontRef idx="minor">
+              <a:schemeClr val="tx1"/>
+            </a:fontRef>
+          </p:style>
+        </p:cxnSp>
+        <p:cxnSp>
+          <p:nvCxnSpPr>
+            <p:cNvPr id="63" name="Straight Arrow Connector 62">
+              <a:extLst>
+                <a:ext uri="{FF2B5EF4-FFF2-40B4-BE49-F238E27FC236}">
+                  <a16:creationId xmlns:a16="http://schemas.microsoft.com/office/drawing/2014/main" id="{9F06155F-DF2C-0E4F-1E7C-ABA55EBEE24D}"/>
+                </a:ext>
+              </a:extLst>
+            </p:cNvPr>
+            <p:cNvCxnSpPr>
+              <a:cxnSpLocks/>
+              <a:endCxn id="54" idx="2"/>
+            </p:cNvCxnSpPr>
+            <p:nvPr/>
+          </p:nvCxnSpPr>
+          <p:spPr>
+            <a:xfrm flipH="1" flipV="1">
+              <a:off x="7985523" y="3760595"/>
+              <a:ext cx="131708" cy="394711"/>
+            </a:xfrm>
+            <a:prstGeom prst="straightConnector1">
+              <a:avLst/>
+            </a:prstGeom>
+            <a:ln w="9525">
+              <a:tailEnd type="triangle"/>
+            </a:ln>
+          </p:spPr>
+          <p:style>
+            <a:lnRef idx="2">
+              <a:schemeClr val="accent1"/>
+            </a:lnRef>
+            <a:fillRef idx="0">
+              <a:schemeClr val="accent1"/>
+            </a:fillRef>
+            <a:effectRef idx="1">
+              <a:schemeClr val="accent1"/>
+            </a:effectRef>
+            <a:fontRef idx="minor">
+              <a:schemeClr val="tx1"/>
+            </a:fontRef>
+          </p:style>
+        </p:cxnSp>
+        <p:cxnSp>
+          <p:nvCxnSpPr>
+            <p:cNvPr id="65" name="Straight Arrow Connector 64">
+              <a:extLst>
+                <a:ext uri="{FF2B5EF4-FFF2-40B4-BE49-F238E27FC236}">
+                  <a16:creationId xmlns:a16="http://schemas.microsoft.com/office/drawing/2014/main" id="{81D0C5B1-EC40-C1EF-062A-E1D0900A5534}"/>
+                </a:ext>
+              </a:extLst>
+            </p:cNvPr>
+            <p:cNvCxnSpPr>
+              <a:cxnSpLocks/>
+              <a:stCxn id="53" idx="3"/>
+              <a:endCxn id="54" idx="1"/>
+            </p:cNvCxnSpPr>
+            <p:nvPr/>
+          </p:nvCxnSpPr>
+          <p:spPr>
+            <a:xfrm>
+              <a:off x="6691346" y="3641078"/>
+              <a:ext cx="1172763" cy="0"/>
+            </a:xfrm>
+            <a:prstGeom prst="straightConnector1">
+              <a:avLst/>
+            </a:prstGeom>
+            <a:ln w="9525">
+              <a:headEnd type="triangle"/>
+              <a:tailEnd type="none"/>
+            </a:ln>
+          </p:spPr>
+          <p:style>
+            <a:lnRef idx="2">
+              <a:schemeClr val="accent1"/>
+            </a:lnRef>
+            <a:fillRef idx="0">
+              <a:schemeClr val="accent1"/>
+            </a:fillRef>
+            <a:effectRef idx="1">
+              <a:schemeClr val="accent1"/>
+            </a:effectRef>
+            <a:fontRef idx="minor">
+              <a:schemeClr val="tx1"/>
+            </a:fontRef>
+          </p:style>
+        </p:cxnSp>
+        <p:sp>
+          <p:nvSpPr>
+            <p:cNvPr id="67" name="Rectangle 66">
+              <a:extLst>
+                <a:ext uri="{FF2B5EF4-FFF2-40B4-BE49-F238E27FC236}">
+                  <a16:creationId xmlns:a16="http://schemas.microsoft.com/office/drawing/2014/main" id="{4FD03656-9251-AD3D-9DD0-E0748EB1F013}"/>
+                </a:ext>
+              </a:extLst>
+            </p:cNvPr>
+            <p:cNvSpPr/>
+            <p:nvPr/>
+          </p:nvSpPr>
+          <p:spPr>
+            <a:xfrm>
+              <a:off x="5317718" y="3228060"/>
+              <a:ext cx="242828" cy="239034"/>
+            </a:xfrm>
+            <a:prstGeom prst="rect">
+              <a:avLst/>
+            </a:prstGeom>
+            <a:solidFill>
+              <a:schemeClr val="accent1">
+                <a:alpha val="30400"/>
+              </a:schemeClr>
+            </a:solidFill>
+          </p:spPr>
+          <p:style>
+            <a:lnRef idx="2">
+              <a:schemeClr val="accent1">
+                <a:shade val="15000"/>
+              </a:schemeClr>
+            </a:lnRef>
+            <a:fillRef idx="1">
+              <a:schemeClr val="accent1"/>
+            </a:fillRef>
+            <a:effectRef idx="0">
+              <a:schemeClr val="accent1"/>
+            </a:effectRef>
+            <a:fontRef idx="minor">
+              <a:schemeClr val="lt1"/>
+            </a:fontRef>
+          </p:style>
+          <p:txBody>
+            <a:bodyPr rtlCol="0" anchor="ctr"/>
+            <a:lstStyle/>
+            <a:p>
+              <a:pPr algn="ctr"/>
+              <a:endParaRPr lang="en-US"/>
+            </a:p>
+          </p:txBody>
+        </p:sp>
+        <p:sp>
+          <p:nvSpPr>
+            <p:cNvPr id="68" name="Rectangle 67">
+              <a:extLst>
+                <a:ext uri="{FF2B5EF4-FFF2-40B4-BE49-F238E27FC236}">
+                  <a16:creationId xmlns:a16="http://schemas.microsoft.com/office/drawing/2014/main" id="{C11B86EB-6389-CFD6-03AB-59A7BB38F455}"/>
+                </a:ext>
+              </a:extLst>
+            </p:cNvPr>
+            <p:cNvSpPr/>
+            <p:nvPr/>
+          </p:nvSpPr>
+          <p:spPr>
+            <a:xfrm>
+              <a:off x="5169826" y="2538946"/>
+              <a:ext cx="242828" cy="239034"/>
+            </a:xfrm>
+            <a:prstGeom prst="rect">
+              <a:avLst/>
+            </a:prstGeom>
+            <a:solidFill>
+              <a:schemeClr val="accent1">
+                <a:alpha val="76000"/>
+              </a:schemeClr>
+            </a:solidFill>
+          </p:spPr>
+          <p:style>
+            <a:lnRef idx="2">
+              <a:schemeClr val="accent1">
+                <a:shade val="15000"/>
+              </a:schemeClr>
+            </a:lnRef>
+            <a:fillRef idx="1">
+              <a:schemeClr val="accent1"/>
+            </a:fillRef>
+            <a:effectRef idx="0">
+              <a:schemeClr val="accent1"/>
+            </a:effectRef>
+            <a:fontRef idx="minor">
+              <a:schemeClr val="lt1"/>
+            </a:fontRef>
+          </p:style>
+          <p:txBody>
+            <a:bodyPr rtlCol="0" anchor="ctr"/>
+            <a:lstStyle/>
+            <a:p>
+              <a:pPr algn="ctr"/>
+              <a:endParaRPr lang="en-US"/>
+            </a:p>
+          </p:txBody>
+        </p:sp>
+        <p:sp>
+          <p:nvSpPr>
+            <p:cNvPr id="69" name="Rectangle 68">
+              <a:extLst>
+                <a:ext uri="{FF2B5EF4-FFF2-40B4-BE49-F238E27FC236}">
+                  <a16:creationId xmlns:a16="http://schemas.microsoft.com/office/drawing/2014/main" id="{6A8FC469-56DC-AEC6-7D88-773F8EAE7528}"/>
+                </a:ext>
+              </a:extLst>
+            </p:cNvPr>
+            <p:cNvSpPr/>
+            <p:nvPr/>
+          </p:nvSpPr>
+          <p:spPr>
+            <a:xfrm>
+              <a:off x="5169826" y="4155272"/>
+              <a:ext cx="242828" cy="239034"/>
+            </a:xfrm>
+            <a:prstGeom prst="rect">
+              <a:avLst/>
+            </a:prstGeom>
+            <a:pattFill prst="wdDnDiag">
+              <a:fgClr>
+                <a:schemeClr val="accent1"/>
+              </a:fgClr>
+              <a:bgClr>
+                <a:schemeClr val="bg1"/>
+              </a:bgClr>
+            </a:pattFill>
+          </p:spPr>
+          <p:style>
+            <a:lnRef idx="2">
+              <a:schemeClr val="accent1">
+                <a:shade val="15000"/>
+              </a:schemeClr>
+            </a:lnRef>
+            <a:fillRef idx="1">
+              <a:schemeClr val="accent1"/>
+            </a:fillRef>
+            <a:effectRef idx="0">
+              <a:schemeClr val="accent1"/>
+            </a:effectRef>
+            <a:fontRef idx="minor">
+              <a:schemeClr val="lt1"/>
+            </a:fontRef>
+          </p:style>
+          <p:txBody>
+            <a:bodyPr rtlCol="0" anchor="ctr"/>
+            <a:lstStyle/>
+            <a:p>
+              <a:pPr algn="ctr"/>
+              <a:endParaRPr lang="en-US"/>
+            </a:p>
+          </p:txBody>
+        </p:sp>
+        <p:cxnSp>
+          <p:nvCxnSpPr>
+            <p:cNvPr id="70" name="Straight Arrow Connector 69">
+              <a:extLst>
+                <a:ext uri="{FF2B5EF4-FFF2-40B4-BE49-F238E27FC236}">
+                  <a16:creationId xmlns:a16="http://schemas.microsoft.com/office/drawing/2014/main" id="{5F2CDEB0-0F49-959E-9D84-FE7A31614589}"/>
+                </a:ext>
+              </a:extLst>
+            </p:cNvPr>
+            <p:cNvCxnSpPr>
+              <a:cxnSpLocks/>
+              <a:stCxn id="67" idx="0"/>
+              <a:endCxn id="68" idx="2"/>
+            </p:cNvCxnSpPr>
+            <p:nvPr/>
+          </p:nvCxnSpPr>
+          <p:spPr>
+            <a:xfrm flipH="1" flipV="1">
+              <a:off x="5291240" y="2777980"/>
+              <a:ext cx="147892" cy="450080"/>
+            </a:xfrm>
+            <a:prstGeom prst="straightConnector1">
+              <a:avLst/>
+            </a:prstGeom>
+            <a:ln w="9525">
+              <a:tailEnd type="triangle"/>
+            </a:ln>
+          </p:spPr>
+          <p:style>
+            <a:lnRef idx="2">
+              <a:schemeClr val="accent1"/>
+            </a:lnRef>
+            <a:fillRef idx="0">
+              <a:schemeClr val="accent1"/>
+            </a:fillRef>
+            <a:effectRef idx="1">
+              <a:schemeClr val="accent1"/>
+            </a:effectRef>
+            <a:fontRef idx="minor">
+              <a:schemeClr val="tx1"/>
+            </a:fontRef>
+          </p:style>
+        </p:cxnSp>
+        <p:cxnSp>
+          <p:nvCxnSpPr>
+            <p:cNvPr id="71" name="Straight Arrow Connector 70">
+              <a:extLst>
+                <a:ext uri="{FF2B5EF4-FFF2-40B4-BE49-F238E27FC236}">
+                  <a16:creationId xmlns:a16="http://schemas.microsoft.com/office/drawing/2014/main" id="{2CE6F39A-8C0A-7B0E-C7AA-C376454564AF}"/>
+                </a:ext>
+              </a:extLst>
+            </p:cNvPr>
+            <p:cNvCxnSpPr>
+              <a:cxnSpLocks/>
+              <a:stCxn id="69" idx="0"/>
+              <a:endCxn id="67" idx="2"/>
+            </p:cNvCxnSpPr>
+            <p:nvPr/>
+          </p:nvCxnSpPr>
+          <p:spPr>
+            <a:xfrm flipV="1">
+              <a:off x="5291240" y="3467094"/>
+              <a:ext cx="147892" cy="688178"/>
+            </a:xfrm>
+            <a:prstGeom prst="straightConnector1">
+              <a:avLst/>
+            </a:prstGeom>
+            <a:ln w="9525">
+              <a:tailEnd type="triangle"/>
+            </a:ln>
+          </p:spPr>
+          <p:style>
+            <a:lnRef idx="2">
+              <a:schemeClr val="accent1"/>
+            </a:lnRef>
+            <a:fillRef idx="0">
+              <a:schemeClr val="accent1"/>
+            </a:fillRef>
+            <a:effectRef idx="1">
+              <a:schemeClr val="accent1"/>
+            </a:effectRef>
+            <a:fontRef idx="minor">
+              <a:schemeClr val="tx1"/>
+            </a:fontRef>
+          </p:style>
+        </p:cxnSp>
+        <p:cxnSp>
+          <p:nvCxnSpPr>
+            <p:cNvPr id="72" name="Straight Arrow Connector 71">
+              <a:extLst>
+                <a:ext uri="{FF2B5EF4-FFF2-40B4-BE49-F238E27FC236}">
+                  <a16:creationId xmlns:a16="http://schemas.microsoft.com/office/drawing/2014/main" id="{F03B565D-D1D5-48A4-9DD3-9870729C5C06}"/>
+                </a:ext>
+              </a:extLst>
+            </p:cNvPr>
+            <p:cNvCxnSpPr>
+              <a:cxnSpLocks/>
+              <a:endCxn id="67" idx="1"/>
+            </p:cNvCxnSpPr>
+            <p:nvPr/>
+          </p:nvCxnSpPr>
+          <p:spPr>
+            <a:xfrm>
+              <a:off x="4474276" y="3344096"/>
+              <a:ext cx="843442" cy="3481"/>
+            </a:xfrm>
+            <a:prstGeom prst="straightConnector1">
+              <a:avLst/>
+            </a:prstGeom>
+            <a:ln w="9525">
+              <a:tailEnd type="triangle"/>
+            </a:ln>
+          </p:spPr>
+          <p:style>
+            <a:lnRef idx="2">
+              <a:schemeClr val="accent1"/>
+            </a:lnRef>
+            <a:fillRef idx="0">
+              <a:schemeClr val="accent1"/>
+            </a:fillRef>
+            <a:effectRef idx="1">
+              <a:schemeClr val="accent1"/>
+            </a:effectRef>
+            <a:fontRef idx="minor">
+              <a:schemeClr val="tx1"/>
+            </a:fontRef>
+          </p:style>
+        </p:cxnSp>
+        <p:sp>
+          <p:nvSpPr>
+            <p:cNvPr id="73" name="Rectangle 72">
+              <a:extLst>
+                <a:ext uri="{FF2B5EF4-FFF2-40B4-BE49-F238E27FC236}">
+                  <a16:creationId xmlns:a16="http://schemas.microsoft.com/office/drawing/2014/main" id="{A02164D1-18E7-3027-A6AE-7BF2BC582AF7}"/>
+                </a:ext>
+              </a:extLst>
+            </p:cNvPr>
+            <p:cNvSpPr/>
+            <p:nvPr/>
+          </p:nvSpPr>
+          <p:spPr>
+            <a:xfrm>
+              <a:off x="5072792" y="3521561"/>
+              <a:ext cx="242828" cy="239034"/>
+            </a:xfrm>
+            <a:prstGeom prst="rect">
+              <a:avLst/>
+            </a:prstGeom>
+            <a:solidFill>
+              <a:schemeClr val="accent1">
+                <a:alpha val="30400"/>
+              </a:schemeClr>
+            </a:solidFill>
+          </p:spPr>
+          <p:style>
+            <a:lnRef idx="2">
+              <a:schemeClr val="accent1">
+                <a:shade val="15000"/>
+              </a:schemeClr>
+            </a:lnRef>
+            <a:fillRef idx="1">
+              <a:schemeClr val="accent1"/>
+            </a:fillRef>
+            <a:effectRef idx="0">
+              <a:schemeClr val="accent1"/>
+            </a:effectRef>
+            <a:fontRef idx="minor">
+              <a:schemeClr val="lt1"/>
+            </a:fontRef>
+          </p:style>
+          <p:txBody>
+            <a:bodyPr rtlCol="0" anchor="ctr"/>
+            <a:lstStyle/>
+            <a:p>
+              <a:pPr algn="ctr"/>
+              <a:endParaRPr lang="en-US"/>
+            </a:p>
+          </p:txBody>
+        </p:sp>
+        <p:cxnSp>
+          <p:nvCxnSpPr>
+            <p:cNvPr id="74" name="Straight Arrow Connector 73">
+              <a:extLst>
+                <a:ext uri="{FF2B5EF4-FFF2-40B4-BE49-F238E27FC236}">
+                  <a16:creationId xmlns:a16="http://schemas.microsoft.com/office/drawing/2014/main" id="{EC104C3F-1EA4-28B6-41E6-7CA46B5371D2}"/>
+                </a:ext>
+              </a:extLst>
+            </p:cNvPr>
+            <p:cNvCxnSpPr>
+              <a:cxnSpLocks/>
+              <a:stCxn id="73" idx="0"/>
+              <a:endCxn id="68" idx="2"/>
+            </p:cNvCxnSpPr>
+            <p:nvPr/>
+          </p:nvCxnSpPr>
+          <p:spPr>
+            <a:xfrm flipV="1">
+              <a:off x="5194206" y="2777980"/>
+              <a:ext cx="97034" cy="743581"/>
+            </a:xfrm>
+            <a:prstGeom prst="straightConnector1">
+              <a:avLst/>
+            </a:prstGeom>
+            <a:ln w="9525">
+              <a:tailEnd type="triangle"/>
+            </a:ln>
+          </p:spPr>
+          <p:style>
+            <a:lnRef idx="2">
+              <a:schemeClr val="accent1"/>
+            </a:lnRef>
+            <a:fillRef idx="0">
+              <a:schemeClr val="accent1"/>
+            </a:fillRef>
+            <a:effectRef idx="1">
+              <a:schemeClr val="accent1"/>
+            </a:effectRef>
+            <a:fontRef idx="minor">
+              <a:schemeClr val="tx1"/>
+            </a:fontRef>
+          </p:style>
+        </p:cxnSp>
+        <p:cxnSp>
+          <p:nvCxnSpPr>
+            <p:cNvPr id="75" name="Straight Arrow Connector 74">
+              <a:extLst>
+                <a:ext uri="{FF2B5EF4-FFF2-40B4-BE49-F238E27FC236}">
+                  <a16:creationId xmlns:a16="http://schemas.microsoft.com/office/drawing/2014/main" id="{721BBA58-7562-EC2E-B728-DFC49A4F1E6F}"/>
+                </a:ext>
+              </a:extLst>
+            </p:cNvPr>
+            <p:cNvCxnSpPr>
+              <a:cxnSpLocks/>
+              <a:stCxn id="69" idx="0"/>
+              <a:endCxn id="73" idx="2"/>
+            </p:cNvCxnSpPr>
+            <p:nvPr/>
+          </p:nvCxnSpPr>
+          <p:spPr>
+            <a:xfrm flipH="1" flipV="1">
+              <a:off x="5194206" y="3760595"/>
+              <a:ext cx="97034" cy="394677"/>
+            </a:xfrm>
+            <a:prstGeom prst="straightConnector1">
+              <a:avLst/>
+            </a:prstGeom>
+            <a:ln w="9525">
+              <a:tailEnd type="triangle"/>
+            </a:ln>
+          </p:spPr>
+          <p:style>
+            <a:lnRef idx="2">
+              <a:schemeClr val="accent1"/>
+            </a:lnRef>
+            <a:fillRef idx="0">
+              <a:schemeClr val="accent1"/>
+            </a:fillRef>
+            <a:effectRef idx="1">
+              <a:schemeClr val="accent1"/>
+            </a:effectRef>
+            <a:fontRef idx="minor">
+              <a:schemeClr val="tx1"/>
+            </a:fontRef>
+          </p:style>
+        </p:cxnSp>
+        <p:cxnSp>
+          <p:nvCxnSpPr>
+            <p:cNvPr id="79" name="Straight Arrow Connector 78">
+              <a:extLst>
+                <a:ext uri="{FF2B5EF4-FFF2-40B4-BE49-F238E27FC236}">
+                  <a16:creationId xmlns:a16="http://schemas.microsoft.com/office/drawing/2014/main" id="{F02FEDE5-E8C0-B557-675F-64EB41622C2B}"/>
+                </a:ext>
+              </a:extLst>
+            </p:cNvPr>
+            <p:cNvCxnSpPr>
+              <a:cxnSpLocks/>
+              <a:endCxn id="53" idx="1"/>
+            </p:cNvCxnSpPr>
+            <p:nvPr/>
+          </p:nvCxnSpPr>
+          <p:spPr>
+            <a:xfrm>
+              <a:off x="5311485" y="3638407"/>
+              <a:ext cx="1137033" cy="2671"/>
+            </a:xfrm>
+            <a:prstGeom prst="straightConnector1">
+              <a:avLst/>
+            </a:prstGeom>
+            <a:ln w="9525">
+              <a:headEnd type="triangle"/>
+              <a:tailEnd type="none"/>
+            </a:ln>
+          </p:spPr>
+          <p:style>
+            <a:lnRef idx="2">
+              <a:schemeClr val="accent1"/>
+            </a:lnRef>
+            <a:fillRef idx="0">
+              <a:schemeClr val="accent1"/>
+            </a:fillRef>
+            <a:effectRef idx="1">
+              <a:schemeClr val="accent1"/>
+            </a:effectRef>
+            <a:fontRef idx="minor">
+              <a:schemeClr val="tx1"/>
+            </a:fontRef>
+          </p:style>
+        </p:cxnSp>
+        <mc:AlternateContent xmlns:mc="http://schemas.openxmlformats.org/markup-compatibility/2006">
+          <mc:Choice xmlns:a14="http://schemas.microsoft.com/office/drawing/2010/main" Requires="a14">
+            <p:sp>
+              <p:nvSpPr>
+                <p:cNvPr id="85" name="TextBox 84">
+                  <a:extLst>
+                    <a:ext uri="{FF2B5EF4-FFF2-40B4-BE49-F238E27FC236}">
+                      <a16:creationId xmlns:a16="http://schemas.microsoft.com/office/drawing/2014/main" id="{22675BA3-1B17-4F17-4861-D33BBE2A0CA3}"/>
+                    </a:ext>
+                  </a:extLst>
+                </p:cNvPr>
+                <p:cNvSpPr txBox="1"/>
+                <p:nvPr/>
+              </p:nvSpPr>
+              <p:spPr>
+                <a:xfrm>
+                  <a:off x="5082287" y="4605327"/>
+                  <a:ext cx="458395" cy="230832"/>
+                </a:xfrm>
+                <a:prstGeom prst="rect">
+                  <a:avLst/>
+                </a:prstGeom>
+                <a:noFill/>
+              </p:spPr>
+              <p:txBody>
+                <a:bodyPr wrap="none" rtlCol="0">
+                  <a:spAutoFit/>
+                </a:bodyPr>
+                <a:lstStyle/>
+                <a:p>
+                  <a14:m>
+                    <m:oMathPara xmlns:m="http://schemas.openxmlformats.org/officeDocument/2006/math">
+                      <m:oMathParaPr>
+                        <m:jc m:val="centerGroup"/>
+                      </m:oMathParaPr>
+                      <m:oMath xmlns:m="http://schemas.openxmlformats.org/officeDocument/2006/math">
+                        <m:r>
+                          <a:rPr lang="en-US" sz="900" i="1" dirty="0" smtClean="0">
+                            <a:latin typeface="Cambria Math" panose="02040503050406030204" pitchFamily="18" charset="0"/>
+                          </a:rPr>
+                          <m:t>𝑡</m:t>
+                        </m:r>
+                        <m:r>
+                          <a:rPr lang="en-US" sz="900" i="1" dirty="0" smtClean="0">
+                            <a:latin typeface="Cambria Math" panose="02040503050406030204" pitchFamily="18" charset="0"/>
+                          </a:rPr>
+                          <m:t>−1</m:t>
+                        </m:r>
+                      </m:oMath>
+                    </m:oMathPara>
+                  </a14:m>
+                  <a:endParaRPr lang="en-US" sz="900" dirty="0"/>
+                </a:p>
+              </p:txBody>
+            </p:sp>
+          </mc:Choice>
+          <mc:Fallback>
+            <p:sp>
+              <p:nvSpPr>
+                <p:cNvPr id="85" name="TextBox 84">
+                  <a:extLst>
+                    <a:ext uri="{FF2B5EF4-FFF2-40B4-BE49-F238E27FC236}">
+                      <a16:creationId xmlns:a16="http://schemas.microsoft.com/office/drawing/2014/main" id="{22675BA3-1B17-4F17-4861-D33BBE2A0CA3}"/>
+                    </a:ext>
+                  </a:extLst>
+                </p:cNvPr>
+                <p:cNvSpPr txBox="1">
+                  <a:spLocks noRot="1" noChangeAspect="1" noMove="1" noResize="1" noEditPoints="1" noAdjustHandles="1" noChangeArrowheads="1" noChangeShapeType="1" noTextEdit="1"/>
+                </p:cNvSpPr>
+                <p:nvPr/>
+              </p:nvSpPr>
+              <p:spPr>
+                <a:xfrm>
+                  <a:off x="5082287" y="4605327"/>
+                  <a:ext cx="458395" cy="230832"/>
+                </a:xfrm>
+                <a:prstGeom prst="rect">
+                  <a:avLst/>
+                </a:prstGeom>
+                <a:blipFill>
+                  <a:blip r:embed="rId4"/>
+                  <a:stretch>
+                    <a:fillRect/>
+                  </a:stretch>
+                </a:blipFill>
+              </p:spPr>
+              <p:txBody>
+                <a:bodyPr/>
+                <a:lstStyle/>
+                <a:p>
+                  <a:r>
+                    <a:rPr lang="en-US">
+                      <a:noFill/>
+                    </a:rPr>
+                    <a:t> </a:t>
+                  </a:r>
+                </a:p>
+              </p:txBody>
+            </p:sp>
+          </mc:Fallback>
+        </mc:AlternateContent>
+        <p:sp>
+          <p:nvSpPr>
+            <p:cNvPr id="86" name="Rectangle 85">
+              <a:extLst>
+                <a:ext uri="{FF2B5EF4-FFF2-40B4-BE49-F238E27FC236}">
+                  <a16:creationId xmlns:a16="http://schemas.microsoft.com/office/drawing/2014/main" id="{301C7F06-1753-4A9A-BD94-26E3B88588A6}"/>
+                </a:ext>
+              </a:extLst>
+            </p:cNvPr>
+            <p:cNvSpPr/>
+            <p:nvPr/>
+          </p:nvSpPr>
+          <p:spPr>
+            <a:xfrm>
+              <a:off x="4828729" y="2402335"/>
+              <a:ext cx="927340" cy="2212676"/>
+            </a:xfrm>
+            <a:prstGeom prst="rect">
+              <a:avLst/>
+            </a:prstGeom>
+            <a:solidFill>
+              <a:schemeClr val="accent1">
+                <a:alpha val="13000"/>
+              </a:schemeClr>
+            </a:solidFill>
+            <a:ln w="9525"/>
+          </p:spPr>
+          <p:style>
+            <a:lnRef idx="2">
+              <a:schemeClr val="accent1">
+                <a:shade val="15000"/>
+              </a:schemeClr>
+            </a:lnRef>
+            <a:fillRef idx="1">
+              <a:schemeClr val="accent1"/>
+            </a:fillRef>
+            <a:effectRef idx="0">
+              <a:schemeClr val="accent1"/>
+            </a:effectRef>
+            <a:fontRef idx="minor">
+              <a:schemeClr val="lt1"/>
+            </a:fontRef>
+          </p:style>
+          <p:txBody>
+            <a:bodyPr rtlCol="0" anchor="ctr"/>
+            <a:lstStyle/>
+            <a:p>
+              <a:pPr algn="ctr"/>
+              <a:endParaRPr lang="en-US"/>
+            </a:p>
+          </p:txBody>
+        </p:sp>
+        <p:cxnSp>
+          <p:nvCxnSpPr>
+            <p:cNvPr id="87" name="Straight Arrow Connector 86">
+              <a:extLst>
+                <a:ext uri="{FF2B5EF4-FFF2-40B4-BE49-F238E27FC236}">
+                  <a16:creationId xmlns:a16="http://schemas.microsoft.com/office/drawing/2014/main" id="{65247B74-F773-5475-8C4F-E6952206C560}"/>
+                </a:ext>
+              </a:extLst>
+            </p:cNvPr>
+            <p:cNvCxnSpPr>
+              <a:cxnSpLocks/>
+            </p:cNvCxnSpPr>
+            <p:nvPr/>
+          </p:nvCxnSpPr>
+          <p:spPr>
+            <a:xfrm>
+              <a:off x="8117231" y="3637737"/>
+              <a:ext cx="659112" cy="13043"/>
+            </a:xfrm>
+            <a:prstGeom prst="straightConnector1">
+              <a:avLst/>
+            </a:prstGeom>
+            <a:ln w="9525">
+              <a:headEnd type="triangle"/>
+              <a:tailEnd type="none"/>
+            </a:ln>
+          </p:spPr>
+          <p:style>
+            <a:lnRef idx="2">
+              <a:schemeClr val="accent1"/>
+            </a:lnRef>
+            <a:fillRef idx="0">
+              <a:schemeClr val="accent1"/>
+            </a:fillRef>
+            <a:effectRef idx="1">
+              <a:schemeClr val="accent1"/>
+            </a:effectRef>
+            <a:fontRef idx="minor">
+              <a:schemeClr val="tx1"/>
+            </a:fontRef>
+          </p:style>
+        </p:cxnSp>
+        <p:cxnSp>
+          <p:nvCxnSpPr>
+            <p:cNvPr id="92" name="Straight Arrow Connector 91">
+              <a:extLst>
+                <a:ext uri="{FF2B5EF4-FFF2-40B4-BE49-F238E27FC236}">
+                  <a16:creationId xmlns:a16="http://schemas.microsoft.com/office/drawing/2014/main" id="{495666F5-23E2-222A-9A74-B9ED31AA7981}"/>
+                </a:ext>
+              </a:extLst>
+            </p:cNvPr>
+            <p:cNvCxnSpPr>
+              <a:cxnSpLocks/>
+            </p:cNvCxnSpPr>
+            <p:nvPr/>
+          </p:nvCxnSpPr>
+          <p:spPr>
+            <a:xfrm>
+              <a:off x="4404216" y="3650780"/>
+              <a:ext cx="663083" cy="0"/>
+            </a:xfrm>
+            <a:prstGeom prst="straightConnector1">
+              <a:avLst/>
+            </a:prstGeom>
+            <a:ln w="9525">
+              <a:headEnd type="triangle"/>
+              <a:tailEnd type="none"/>
+            </a:ln>
+          </p:spPr>
+          <p:style>
+            <a:lnRef idx="2">
+              <a:schemeClr val="accent1"/>
+            </a:lnRef>
+            <a:fillRef idx="0">
+              <a:schemeClr val="accent1"/>
+            </a:fillRef>
+            <a:effectRef idx="1">
+              <a:schemeClr val="accent1"/>
+            </a:effectRef>
+            <a:fontRef idx="minor">
+              <a:schemeClr val="tx1"/>
+            </a:fontRef>
+          </p:style>
+        </p:cxnSp>
+        <p:sp>
+          <p:nvSpPr>
+            <p:cNvPr id="95" name="TextBox 94">
+              <a:extLst>
+                <a:ext uri="{FF2B5EF4-FFF2-40B4-BE49-F238E27FC236}">
+                  <a16:creationId xmlns:a16="http://schemas.microsoft.com/office/drawing/2014/main" id="{ECB90468-EA3A-1D40-C16A-0D2263D9906C}"/>
+                </a:ext>
+              </a:extLst>
+            </p:cNvPr>
+            <p:cNvSpPr txBox="1"/>
+            <p:nvPr/>
+          </p:nvSpPr>
+          <p:spPr>
+            <a:xfrm>
+              <a:off x="4341036" y="2982557"/>
+              <a:ext cx="593432" cy="369332"/>
+            </a:xfrm>
+            <a:prstGeom prst="rect">
+              <a:avLst/>
+            </a:prstGeom>
+            <a:noFill/>
+          </p:spPr>
+          <p:txBody>
+            <a:bodyPr wrap="none" rtlCol="0">
+              <a:spAutoFit/>
+            </a:bodyPr>
+            <a:lstStyle/>
+            <a:p>
+              <a:r>
+                <a:rPr lang="en-US" sz="900" dirty="0"/>
+                <a:t>forward </a:t>
+              </a:r>
+            </a:p>
+            <a:p>
+              <a:r>
+                <a:rPr lang="en-US" sz="900" dirty="0"/>
+                <a:t>states</a:t>
+              </a:r>
+            </a:p>
+          </p:txBody>
+        </p:sp>
+        <p:sp>
+          <p:nvSpPr>
+            <p:cNvPr id="96" name="TextBox 95">
+              <a:extLst>
+                <a:ext uri="{FF2B5EF4-FFF2-40B4-BE49-F238E27FC236}">
+                  <a16:creationId xmlns:a16="http://schemas.microsoft.com/office/drawing/2014/main" id="{E08F72E3-9C1A-E4EE-7F31-162B5F88DACD}"/>
+                </a:ext>
+              </a:extLst>
+            </p:cNvPr>
+            <p:cNvSpPr txBox="1"/>
+            <p:nvPr/>
+          </p:nvSpPr>
+          <p:spPr>
+            <a:xfrm>
+              <a:off x="4216759" y="3657041"/>
+              <a:ext cx="697627" cy="369332"/>
+            </a:xfrm>
+            <a:prstGeom prst="rect">
+              <a:avLst/>
+            </a:prstGeom>
+            <a:noFill/>
+          </p:spPr>
+          <p:txBody>
+            <a:bodyPr wrap="none" rtlCol="0">
+              <a:spAutoFit/>
+            </a:bodyPr>
+            <a:lstStyle/>
+            <a:p>
+              <a:r>
+                <a:rPr lang="en-US" sz="900" dirty="0"/>
+                <a:t>backward </a:t>
+              </a:r>
+            </a:p>
+            <a:p>
+              <a:r>
+                <a:rPr lang="en-US" sz="900" dirty="0"/>
+                <a:t>states</a:t>
+              </a:r>
+            </a:p>
+          </p:txBody>
+        </p:sp>
+      </p:grpSp>
+    </p:spTree>
+    <p:extLst>
+      <p:ext uri="{BB962C8B-B14F-4D97-AF65-F5344CB8AC3E}">
+        <p14:creationId xmlns:p14="http://schemas.microsoft.com/office/powerpoint/2010/main" val="1992945468"/>
+      </p:ext>
+    </p:extLst>
+  </p:cSld>
+  <p:clrMapOvr>
+    <a:masterClrMapping/>
+  </p:clrMapOvr>
+</p:sld>
+</file>
+
 <file path=ppt/theme/theme1.xml><?xml version="1.0" encoding="utf-8"?>
 <a:theme xmlns:a="http://schemas.openxmlformats.org/drawingml/2006/main" name="Office Theme">
   <a:themeElements>

--- a/docs/Attention_Figures.pptx
+++ b/docs/Attention_Figures.pptx
@@ -7,6 +7,7 @@
   <p:sldIdLst>
     <p:sldId id="256" r:id="rId2"/>
     <p:sldId id="257" r:id="rId3"/>
+    <p:sldId id="258" r:id="rId4"/>
   </p:sldIdLst>
   <p:sldSz cx="12192000" cy="6858000"/>
   <p:notesSz cx="6858000" cy="9144000"/>
@@ -105,7 +106,152 @@
       </a:defRPr>
     </a:lvl9pPr>
   </p:defaultTextStyle>
+  <p:extLst>
+    <p:ext uri="{EFAFB233-063F-42B5-8137-9DF3F51BA10A}">
+      <p15:sldGuideLst xmlns:p15="http://schemas.microsoft.com/office/powerpoint/2012/main"/>
+    </p:ext>
+  </p:extLst>
 </p:presentation>
+</file>
+
+<file path=ppt/ink/ink1.xml><?xml version="1.0" encoding="utf-8"?>
+<inkml:ink xmlns:inkml="http://www.w3.org/2003/InkML">
+  <inkml:definitions>
+    <inkml:context xml:id="ctx0">
+      <inkml:inkSource xml:id="inkSrc0">
+        <inkml:traceFormat>
+          <inkml:channel name="X" type="integer" min="-2.14748E9" max="2.14748E9" units="cm"/>
+          <inkml:channel name="Y" type="integer" min="-2.14748E9" max="2.14748E9" units="cm"/>
+          <inkml:channel name="F" type="integer" max="32767" units="dev"/>
+        </inkml:traceFormat>
+        <inkml:channelProperties>
+          <inkml:channelProperty channel="X" name="resolution" value="1000" units="1/cm"/>
+          <inkml:channelProperty channel="Y" name="resolution" value="1000" units="1/cm"/>
+          <inkml:channelProperty channel="F" name="resolution" value="0" units="1/dev"/>
+        </inkml:channelProperties>
+      </inkml:inkSource>
+      <inkml:timestamp xml:id="ts0" timeString="2025-08-16T17:56:39.118"/>
+    </inkml:context>
+    <inkml:brush xml:id="br0">
+      <inkml:brushProperty name="width" value="0.05" units="cm"/>
+      <inkml:brushProperty name="height" value="0.05" units="cm"/>
+      <inkml:brushProperty name="color" value="#FFC114"/>
+    </inkml:brush>
+  </inkml:definitions>
+  <inkml:trace contextRef="#ctx0" brushRef="#br0">60 128 24575,'14'0'0,"2"0"0,0 0 0,-1 0 0,-2 0 0,-3 0 0,0 1 0,0 0 0,1 1 0,1 0 0,0 1 0,-2 0 0,-2-2 0,-1 0 0,-3 0 0,0 0 0,-1-1 0,1 0 0,0 0 0,1 0 0,-1 0 0,0 0 0,-1 0 0,1 0 0,-1 0 0,1 0 0,-1 0 0,0 0 0,-1 0 0,1 0 0,0 0 0,-1 0 0,1 0 0,0 0 0,-1 0 0,-6-2 0,0 1 0,-6-2 0,-2-1 0,-3 0 0,-2-2 0,1-1 0,2 1 0,2 0 0,2-1 0,1 1 0,3 1 0,0 1 0,1 0 0,0 1 0,0 0 0,0 0 0,-1 1 0,-1 0 0,1-1 0,1 2 0,1 0 0,1 1 0,-1-1 0,1 1 0,-1 0 0,1 0 0,-1 0 0,0 0 0,-2 0 0,0 0 0,-2 0 0,1-2 0,0-1 0,1 0 0,0-1 0,0 0 0,-1 0 0,1-1 0,0 1 0,1 1 0,1 0 0,1 1 0,2-1 0,0 2 0,1 5 0,0-2 0,0 5 0,1-4 0,-1 0 0,2 0 0,1 2 0,0 1 0,1 2 0,-1-1 0,0 0 0,-2-3 0,0 0 0,0 1 0,-1-1 0,1 2 0,0 1 0,-1-2 0,1-1 0,-1-1 0,1-2 0,0-5 0,0 0 0,1-5 0,0-1 0,-1-1 0,0-1 0,-1 2 0,0 3 0,0 2 0,0 0 0,2 0 0,-1-1 0,1-2 0,0 1 0,-1 1 0,0 2 0,-1 1 0,-1 2 0,-2 2 0,0 0 0,-2 0 0,1-1 0,1 1 0,1 1 0,3 2 0,1 1 0,1 0 0,2 1 0,0-3 0,0 1 0,1-3 0,0 0 0,1-1 0,1 0 0,1 2 0,1 1 0,1 1 0,-1 1 0,1 0 0,-2 0 0,-1 0 0,-3-1 0,-1-2 0,1 1 0,1 0 0,1 0 0,2 3 0,0-1 0,-1 0 0,0-1 0,-3-2 0,-2-1 0,1 0 0,0 0 0,0 0 0,0 0 0,-1-1 0,0 1 0,0 0 0,2 2 0,1 0 0,2 1 0,-1-1 0,-1-1 0,-1-1 0,-2 0 0,1-1 0,-1 0 0,1 2 0,0-1 0,0 1 0,0-1 0,-1 0 0,0-1 0,0 1 0,1 0 0,2 0 0,1 1 0,1 0 0,1 0 0,0 0 0,-1 0 0,-1 0 0,-2-1 0,-3 0 0,0-1 0</inkml:trace>
+</inkml:ink>
+</file>
+
+<file path=ppt/ink/ink2.xml><?xml version="1.0" encoding="utf-8"?>
+<inkml:ink xmlns:inkml="http://www.w3.org/2003/InkML">
+  <inkml:definitions>
+    <inkml:context xml:id="ctx0">
+      <inkml:inkSource xml:id="inkSrc0">
+        <inkml:traceFormat>
+          <inkml:channel name="X" type="integer" min="-2.14748E9" max="2.14748E9" units="cm"/>
+          <inkml:channel name="Y" type="integer" min="-2.14748E9" max="2.14748E9" units="cm"/>
+          <inkml:channel name="F" type="integer" max="32767" units="dev"/>
+        </inkml:traceFormat>
+        <inkml:channelProperties>
+          <inkml:channelProperty channel="X" name="resolution" value="1000" units="1/cm"/>
+          <inkml:channelProperty channel="Y" name="resolution" value="1000" units="1/cm"/>
+          <inkml:channelProperty channel="F" name="resolution" value="0" units="1/dev"/>
+        </inkml:channelProperties>
+      </inkml:inkSource>
+      <inkml:timestamp xml:id="ts0" timeString="2025-08-16T17:56:54.902"/>
+    </inkml:context>
+    <inkml:brush xml:id="br0">
+      <inkml:brushProperty name="width" value="0.05" units="cm"/>
+      <inkml:brushProperty name="height" value="0.05" units="cm"/>
+      <inkml:brushProperty name="color" value="#AB008B"/>
+    </inkml:brush>
+  </inkml:definitions>
+  <inkml:trace contextRef="#ctx0" brushRef="#br0">533 0 24575,'-2'15'0,"-2"2"0,-4 6 0,-3 2 0,-1 0 0,1-2 0,3-7 0,1-3 0,4-3 0,1-3 0,1 0 0,-1-2 0,1 0 0,0-1 0,-1-1 0,1 0 0,0-1 0,-2 0 0,-2 2 0,-2 1 0,0 2 0,0 1 0,1 0 0,2-3 0,1-2 0,2 0 0,-1-1 0,0-1 0,0 1 0,-1 0 0,0-1 0,1 1 0,1 0 0,-1 1 0,-2 3 0,-4 5 0,-5 5 0,-2 4 0,-2 1 0,4-4 0,3-4 0,5-5 0,3-4 0,0 0 0,-1-2 0,-1 3 0,-5 1 0,-3 4 0,-2 1 0,-1 0 0,3-1 0,4-4 0,2-3 0,3-2 0,0 0 0,-1-1 0,-2 0 0,-3 0 0,-1 0 0,-2 0 0,-1 0 0,0 2 0,1 2 0,1 2 0,1 1 0,1-1 0,2-1 0,2-2 0,2-2 0,0 0 0,1 0 0,-2 2 0,-5 0 0,-4 2 0,-3 1 0,0 1 0,3-2 0,4 0 0,4-3 0,3-2 0,1-1 0,0-8 0,1 6 0,0-5 0</inkml:trace>
+</inkml:ink>
+</file>
+
+<file path=ppt/ink/ink3.xml><?xml version="1.0" encoding="utf-8"?>
+<inkml:ink xmlns:inkml="http://www.w3.org/2003/InkML">
+  <inkml:definitions>
+    <inkml:context xml:id="ctx0">
+      <inkml:inkSource xml:id="inkSrc0">
+        <inkml:traceFormat>
+          <inkml:channel name="X" type="integer" min="-2.14748E9" max="2.14748E9" units="cm"/>
+          <inkml:channel name="Y" type="integer" min="-2.14748E9" max="2.14748E9" units="cm"/>
+          <inkml:channel name="F" type="integer" max="32767" units="dev"/>
+        </inkml:traceFormat>
+        <inkml:channelProperties>
+          <inkml:channelProperty channel="X" name="resolution" value="1000" units="1/cm"/>
+          <inkml:channelProperty channel="Y" name="resolution" value="1000" units="1/cm"/>
+          <inkml:channelProperty channel="F" name="resolution" value="0" units="1/dev"/>
+        </inkml:channelProperties>
+      </inkml:inkSource>
+      <inkml:timestamp xml:id="ts0" timeString="2025-08-16T17:57:15.975"/>
+    </inkml:context>
+    <inkml:brush xml:id="br0">
+      <inkml:brushProperty name="width" value="0.05" units="cm"/>
+      <inkml:brushProperty name="height" value="0.05" units="cm"/>
+      <inkml:brushProperty name="color" value="#AB008B"/>
+    </inkml:brush>
+  </inkml:definitions>
+  <inkml:trace contextRef="#ctx0" brushRef="#br0">725 71 24575,'0'5'0,"-1"0"0,-1-3 0,-1 1 0,-1 0 0,1 1 0,-1-1 0,2 0 0,-1 0 0,0 0 0,0 1 0,0 0 0,1 0 0,0 0 0,0-1 0,0 0 0,1 0 0,-1 0 0,0 0 0,0 0 0,1-1 0,0 0 0,-1 2 0,-1 2 0,0 1 0,-2 2 0,0 0 0,0 0 0,-1 0 0,3-2 0,0-2 0,1 0 0,1-1 0,-1 0 0,0-1 0,-1 0 0,1 0 0,0-1 0,0 1 0,2 0 0,-1 0 0,1 0 0,0-1 0,0 0 0,-2 0 0,0 1 0,-1 1 0,-1 1 0,2-1 0,0-1 0,1-1 0,0-1 0,0 2 0,-1-1 0,0 2 0,0-1 0,0 0 0,0-1 0,0 0 0,0 1 0,-1 0 0,-1 1 0,0-1 0,-2 1 0,-1 0 0,0 0 0,1 0 0,0 0 0,1-1 0,-1 1 0,2 0 0,1-1 0,0-1 0,0 1 0,1-1 0,0 0 0,0 0 0,1-1 0,0 0 0,-1 1 0,-2 3 0,-3 3 0,0 0 0,-3 3 0,-2 1 0,-2 1 0,-2 2 0,2-3 0,3-2 0,2-3 0,3-1 0,3-2 0,1-1 0,0-1 0,0 1 0,-1 0 0,-1 0 0,1 0 0,0 0 0,0-1 0,-2 1 0,-1 0 0,-1 1 0,0-1 0,2-1 0,2-1 0,0-1 0,1 0 0,-2 0 0,-2 1 0,-1 0 0,-1 0 0,0 0 0,3 0 0,1-1 0,1 0 0,0 0 0,0 0 0,-2 0 0,-2 0 0,1 0 0,0 0 0,2 0 0,0 1 0,-1 0 0,-4 2 0,-3 3 0,-2 1 0,2 0 0,3-2 0,4-2 0,2-2 0,1-1 0,-1 0 0,-1 0 0,-3 0 0,-1 0 0,0 0 0,3 1 0,1-1 0,2 2 0,1 0 0,0-1 0,0 0 0,-3 0 0,-1 0 0,-1 0 0,0 0 0,1 1 0,3 0 0,-1 0 0,1 0 0,-1 0 0,0 0 0,-1 0 0,2 0 0,0-2 0,0 1 0,1 0 0,-2-1 0,1 0 0,-2 0 0,0 0 0,-1 0 0,1 0 0,1-1 0,1 1 0,-1-1 0,0 1 0,-1-1 0,1 1 0,0 0 0,-1 0 0,1 0 0,-1 0 0,0 0 0,-1 0 0,1 0 0,2 0 0,-1 0 0,1 0 0,0 0 0,-1 0 0,-1-1 0,0 0 0,1-1 0,1 1 0,1 0 0,0 0 0,0 0 0,1-1 0,3 1 0,0 1 0,2 0 0,1 0 0,1-1 0,1 0 0,1 0 0,-2-1 0,0 0 0,-2 1 0,-1-1 0,-1 1 0,1 1 0,0-1 0,0 1 0,1-1 0,-1 0 0,1 1 0,-1-1 0,1 0 0,1 0 0,2 1 0,-1-1 0,-2 0 0,-1 1 0,-1-1 0,1 0 0,2-2 0,4 0 0,0 0 0,-2-1 0,-1 2 0,-3-1 0,0 2 0,-1-1 0,3-1 0,1 0 0,2-1 0,-2 1 0,-1-1 0,-1 1 0,-1 0 0,0 1 0,2-2 0,0 0 0,2 0 0,-1-1 0,0 0 0,1 1 0,-2 0 0,2 1 0,0-1 0,0 0 0,0 0 0,-3 2 0,0-1 0,-2 2 0,-1-1 0,2 1 0,0-1 0,1-1 0,0 0 0,1 0 0,-1-1 0,0 2 0,-2 1 0,0 1 0,0 0 0,-1 0 0,0-1 0,1 1 0,0-1 0,1 0 0,-1-1 0,1 1 0,-1-1 0,-1 0 0,1-1 0,1-1 0,0 0 0,2-2 0,-1 1 0,1 0 0,-2 0 0,0 2 0,-2 1 0,1-1 0,0 0 0,0-1 0,2 0 0,-1 0 0,0 1 0,0-1 0,1 0 0,1-1 0,0 1 0,0-1 0,-1 1 0,-1 2 0,-1 0 0,-2 1 0,1 0 0,0-1 0,1-1 0,0-2 0,1 1 0,-2 1 0,0 1 0,0 0 0,-1 1 0,2-2 0,1 0 0,-1 0 0,0-1 0,0 1 0,1 0 0,-1-1 0,-1 1 0,0 1 0,0 1 0,1-2 0,-1 0 0,1-1 0,-1 1 0,0 1 0,0 0 0,0 0 0,0-1 0,-1 0 0,1 1 0,-1 0 0,0 1 0,0 0 0,0-2 0,2 0 0,-1-1 0,1 1 0,-1 1 0,-1 0 0,1-1 0,-1 1 0,1-2 0,1 1 0,-1 0 0,-1 1 0,0 0 0,1 1 0,-1-1 0,0-1 0,1 0 0,0 0 0,-1 1 0,0 1 0,1-2 0,3-7 0,4-4 0,1-2 0,0 1 0,-3 5 0,-2 4 0,-1 0 0,-1 4 0,-2 0 0,0 1 0,1-2 0,1-3 0,1 0 0,1-2 0,-2 2 0,0 2 0,-2 2 0,1-1 0,0 0 0,0 0 0,0-2 0,0 2 0,0 1 0,0 0 0,0 0 0,1-2 0,0-1 0,1-1 0,-1 2 0,-1 1 0,-1 0 0,2 1 0,0-1 0,0-1 0,1 0 0,-2 2 0,-2 1 0,0 5 0,0-1 0,1 3 0,1-2 0,0 1 0,1-1 0,-1 0 0,-1 0 0,1-1 0,0 2 0,1 1 0,1 2 0,-1-1 0,0 0 0,-2-2 0,0 2 0,2 1 0,0 1 0,1-1 0,0-1 0,0-2 0,0 0 0,-2-1 0,0-2 0,-1 0 0,0 0 0,3 1 0,0 2 0,1 0 0,1 1 0,-1-1 0,-1 1 0,1 0 0,0 0 0,-1-1 0,0-1 0,-1-3 0,-2-3 0,-1-5 0,-1-1 0,-2-2 0,-1 0 0,1 2 0,0 0 0,1 4 0,0 2 0,0-1 0,0 1 0,-1-2 0,1 1 0,1 1 0,0 0 0,0-1 0,0 1 0,0-2 0,-1 0 0,0 0 0,1 0 0,-1 1 0,0 0 0,0 1 0,0 0 0,-1 0 0,0-1 0,1 1 0,-1-2 0,1 0 0,-1 0 0,1-1 0,-1 1 0,1 2 0,0 2 0,4 3 0,-1 1 0,4 1 0,0 0 0,2 0 0,-1 1 0,0 0 0,0 0 0,1 2 0,-1 0 0,0-2 0,-2 0 0,-1-2 0,0 0 0,0 2 0,0-1 0,1 0 0,-1 0 0,-1-2 0,0 1 0,0-2 0,0 0 0,2 3 0,2 2 0,1 2 0,2 2 0,-1-1 0,-2-2 0,-1-1 0,0-1 0,-2-1 0,0-1 0,-2-2 0,1 0 0,-1-2 0,1 2 0,1 0 0,0 1 0,1 0 0,-2 0 0,1-1 0,-2 0 0,1-1 0,0 1 0,1 0 0,0 1 0,1 1 0,-1-1 0,-1 0 0,0-2 0,-1 1 0,1-2 0,1 1 0,0 0 0,2 0 0,-1 0 0,1 0 0,-1 0 0,-1-1 0,-2 1 0,-5-1 0,1 0 0,-4-1 0,3-1 0,-2 0 0,-1-1 0,1 0 0,1 0 0,0 1 0,2 0 0,1 1 0,-1-2 0,1 1 0,0-1 0,-2 0 0,0 0 0,0-2 0,0 1 0,2 1 0,-1 0 0,1-1 0,-2 0 0,1-1 0,-1 0 0,2 1 0,0 0 0,0 0 0,0 0 0,1-2 0,-1 1 0,1 1 0,0 1 0,1 1 0,1 1 0,1 0 0,0 1 0,0 1 0,1 1 0,2 2 0,1 0 0,-1 1 0,0-1 0,-1-1 0,-1-1 0,-1 1 0,-1-1 0,0 1 0,0-1 0,2 2 0,0-1 0,0 1 0,-1-2 0,0 1 0,0 0 0,0-1 0,0 1 0,1 0 0,-1 0 0,1 0 0,-1-1 0,0-1 0,0 2 0,2 1 0,0 1 0,1 1 0,-1-1 0,0-2 0,-2-1 0,0 0 0,0-1 0,1 2 0,0 0 0,1 1 0,0 0 0,1 1 0,0-1 0,-1 1 0,0-2 0,-1-1 0,-1 0 0,0 0 0,1 1 0,0-1 0,0 1 0,1 1 0,-1 0 0,2 0 0,-2-1 0,-1-2 0,-1-1 0</inkml:trace>
+</inkml:ink>
+</file>
+
+<file path=ppt/ink/ink4.xml><?xml version="1.0" encoding="utf-8"?>
+<inkml:ink xmlns:inkml="http://www.w3.org/2003/InkML">
+  <inkml:definitions>
+    <inkml:context xml:id="ctx0">
+      <inkml:inkSource xml:id="inkSrc0">
+        <inkml:traceFormat>
+          <inkml:channel name="X" type="integer" min="-2.14748E9" max="2.14748E9" units="cm"/>
+          <inkml:channel name="Y" type="integer" min="-2.14748E9" max="2.14748E9" units="cm"/>
+          <inkml:channel name="F" type="integer" max="32767" units="dev"/>
+        </inkml:traceFormat>
+        <inkml:channelProperties>
+          <inkml:channelProperty channel="X" name="resolution" value="1000" units="1/cm"/>
+          <inkml:channelProperty channel="Y" name="resolution" value="1000" units="1/cm"/>
+          <inkml:channelProperty channel="F" name="resolution" value="0" units="1/dev"/>
+        </inkml:channelProperties>
+      </inkml:inkSource>
+      <inkml:timestamp xml:id="ts0" timeString="2025-08-16T17:57:43.445"/>
+    </inkml:context>
+    <inkml:brush xml:id="br0">
+      <inkml:brushProperty name="width" value="0.05" units="cm"/>
+      <inkml:brushProperty name="height" value="0.05" units="cm"/>
+      <inkml:brushProperty name="color" value="#AB008B"/>
+    </inkml:brush>
+  </inkml:definitions>
+  <inkml:trace contextRef="#ctx0" brushRef="#br0">724 198 24575,'3'5'0,"0"-1"0,-2-3 0,2 0 0,1-1 0,0 0 0,1 0 0,0 0 0,0 1 0,1 0 0,-1 1 0,0-1 0,-1 1 0,1 0 0,-1-1 0,0 0 0,-1 0 0,-2 0 0,0 1 0,-1 1 0,0 0 0,0 2 0,0 0 0,0 0 0,0 1 0,0-1 0,0-1 0,0 0 0,0 0 0,0 0 0,0-1 0,0 0 0,0-1 0,-2 1 0,1 1 0,0-2 0,0 0 0,1 0 0,-1 1 0,0 0 0,1 1 0,0-1 0,0 2 0,0 0 0,0 2 0,1-1 0,0-1 0,1-1 0,-1-1 0,0-1 0,0 1 0,-1 0 0,-1 0 0,0-1 0,-3-1 0,0-1 0,1 0 0,0 0 0,0 0 0,-2 0 0,-2 0 0,0 0 0,1 0 0,1 0 0,3 0 0,-1 0 0,0 0 0,-2 0 0,-2 0 0,-4 0 0,-1 0 0,2 0 0,3 0 0,2 1 0,0 0 0,0-1 0,0 0 0,0 0 0,1 0 0,0 0 0,0 0 0,-1 0 0,0 0 0,0 0 0,1 0 0,2 0 0,0 0 0,-1 0 0,0 0 0,-1 0 0,0 0 0,-1 0 0,2-1 0,1-1 0,0 0 0,-4 1 0,-3 1 0,-2 0 0,-4 0 0,-2 1 0,0 1 0,-3 0 0,5 1 0,2-2 0,1 1 0,2 0 0,3-1 0,1 1 0,2-1 0,-1 0 0,0-1 0,0 0 0,0 0 0,2 0 0,0 0 0,0 0 0,-1 0 0,-4 0 0,-2 0 0,-3 0 0,0 0 0,1 0 0,2 0 0,2 0 0,0 0 0,0 0 0,1 0 0,2 0 0,2 0 0,-1-1 0,-1 1 0,-5-1 0,-2 0 0,-4 0 0,-2-2 0,2 1 0,0 1 0,5 0 0,4 0 0,3 1 0,1-1 0,0 1 0,0 0 0,-1 0 0,-1 0 0,-1 0 0,1 0 0,0 1 0,2-1 0,-1 1 0,0 0 0,-2 0 0,-2 1 0,0-1 0,1 1 0,2-1 0,1 0 0,1 0 0,-2-1 0,-1 0 0,-2 0 0,0 1 0,1 0 0,2-1 0,1 1 0,2-1 0,-1 1 0,0-1 0,-2 0 0,-3 0 0,0 0 0,0 0 0,1 0 0,2 0 0,3 0 0,6-4 0,0 1 0,4-3 0,-3 2 0,1 1 0,1-1 0,2 0 0,5-2 0,4-1 0,2 0 0,-1 0 0,-3 2 0,-5 2 0,-4 2 0,-3 0 0,-1 0 0,1 0 0,2-2 0,0 0 0,0 1 0,-1 0 0,0 0 0,0 0 0,1-2 0,1 0 0,2-1 0,0 0 0,-1 0 0,0 0 0,-1 1 0,0 0 0,0 1 0,-2 0 0,-1 0 0,1 0 0,0 0 0,1-3 0,1 0 0,-1-1 0,0 0 0,0 0 0,0 0 0,1-2 0,1-1 0,0-1 0,0 2 0,-3 2 0,-2 3 0,-1 1 0,0 1 0,-2 0 0,1 1 0,0-1 0,-1-2 0,1-1 0,1-2 0,1-3 0,0 1 0,0 1 0,-1 2 0,0 1 0,0 2 0,-1 0 0,-1 0 0,0-1 0,1 0 0,0-1 0,0 1 0,1 0 0,0 0 0,-2 2 0,1 1 0,0-3 0,1 0 0,-1-3 0,1 1 0,-1 2 0,-1 1 0,-3 10 0,-1-1 0,-4 9 0,0-1 0,-1 2 0,0 0 0,2-5 0,2-3 0,1-1 0,-1 0 0,0 1 0,-1 1 0,0 0 0,0 1 0,0 1 0,-1-1 0,1 2 0,0-3 0,2-1 0,0-2 0,3-1 0,-1-2 0,1 0 0,-1-1 0,-2 4 0,0 0 0,-1 2 0,0-1 0,1-1 0,1-2 0,1 0 0,0 1 0,-1-1 0,2-1 0,0-2 0,4-4 0,6-2 0,3-1 0,1 1 0,-3 2 0,-4 2 0,-2 1 0,0 0 0,-1 1 0,-1 0 0,-1 2 0,0-1 0,-1 0 0,0 1 0,0 0 0,-1 0 0,-2 1 0,-3 0 0,-5-1 0,-2 1 0,-1-1 0,3 1 0,2-1 0,4 0 0,1 0 0,1-1 0,2-1 0,0 0 0,0 1 0,0-1 0,-1 2 0,0-1 0,-1 0 0,1 0 0,1 0 0,6-3 0,0-1 0,7 0 0,-3 0 0,-2 0 0,3-1 0,0 0 0,4 0 0,6-1 0,0 2 0,-1 0 0,-6 0 0,-5 2 0,-4-1 0,0 1 0,-1 0 0,1 0 0,1 0 0,1 0 0,2 0 0,2 0 0,2 0 0,3 0 0,2 1 0,-1 0 0,-1 2 0,-4-1 0,-4-2 0,-3 1 0,0 0 0,2-1 0,2 1 0,2 1 0,3 0 0,-2 0 0,-2-1 0,-1 0 0,-3 0 0,1 0 0,0 0 0,1 1 0,0 0 0,1 0 0,-1 1 0,-1-2 0,-1 0 0,-2-1 0,-1 1 0,1-1 0,-1 1 0,2-1 0,1 0 0,-1 0 0,1 0 0,-1 0 0,0 0 0,0 0 0,0 0 0,1 0 0,0 0 0,-1 0 0,1 0 0,0 0 0,-1 0 0,-1 0 0,1 0 0,0 0 0,-1 0 0,0 0 0,0 0 0,0 0 0,-1-1 0,1 0 0,-1 0 0,1 1 0,0-1 0,0 1 0,-1-2 0,-1 0 0,-2-4 0,0 1 0,0-1 0,-2 0 0,1 2 0,-1-2 0,0 2 0,1-1 0,-1 1 0,2 1 0,-1 1 0,2 0 0,-1 0 0,0-1 0,0 1 0,-1-1 0,1 1 0,0 0 0,-1 0 0,1 0 0,-1-2 0,0 1 0,-1-2 0,0 0 0,2 2 0,2 0 0,1 4 0,1 1 0,1 1 0,0 0 0,0 0 0,0 0 0,-4-3 0,-5-3 0,-1 0 0,-3-2 0,0 1 0,0-1 0,0 0 0,3 3 0,2 0 0,1 1 0,1 1 0,-1-1 0,0 0 0,-2-1 0,1 0 0,-1-1 0,1 0 0,-2 0 0,1 0 0,1 0 0,0 1 0,1 0 0,0-1 0,-2-1 0,-2-2 0,-4-4 0,0 0 0,0 0 0,0 0 0,2 3 0,1 1 0,2 2 0,2 0 0,1 2 0,1 0 0,0 1 0,0-1 0,-1 0 0,-2-2 0,-1-1 0,-2-1 0,0 0 0,-1-1 0,1 1 0,1 1 0,2 2 0,1 1 0,1 1 0,1-1 0,-2 1 0,1-1 0,0 1 0,-1 0 0,1-1 0,-1 0 0,1 1 0,0 0 0,1 2 0,-1 3 0,0 5 0,0 4 0,-1 3 0,-1 1 0,2 0 0,-2 0 0,1 1 0,-1-1 0,0-3 0,0-3 0,2-3 0,0-2 0,1-1 0,-1 1 0,0 1 0,-1 2 0,-1 0 0,-1 1 0,1 0 0,0-2 0,1-1 0,2-2 0,-1-1 0,0-1 0,0 1 0,0 0 0,2-3 0,0-3 0,4-10 0,11-15 0,7-9 0,6-3 0,-3 5 0,-9 14 0,-5 8 0,-5 6 0,-2 3 0,-1 2 0,-1 2 0,-1 3 0,0 2 0,0 3 0,0 4 0,-2 4 0,-1 4 0,-2 0 0,0 1 0,-2-3 0,1-1 0,1-4 0,1-3 0,1-2 0,1-3 0,1-1 0,1-1 0,-1-2 0,1-1 0,-1-4 0,5-9 0,2-2 0,5-7 0,5-1 0,-2 3 0,1 2 0,-7 9 0,-3 4 0,-2 3 0,-1 0 0,0-2 0,2 1 0,2-3 0,1-1 0,0-1 0,-1 2 0,-2 1 0,0 1 0,-1 0 0,0-1 0,1 0 0,-1 0 0,-1 1 0,0 2 0,-2 4 0,-1 0 0,-1 2 0,0-4 0,-1-1 0,-1-1 0,0-1 0,1-2 0,1 1 0,0 1 0,1 0 0,-1 0 0,0 1 0,0 1 0,0 0 0,0 0 0,-1 0 0,-1 0 0,1 0 0,-1 0 0,4 2 0,4 3 0,0 1 0,3 2 0,0-1 0,-2 0 0,0-1 0,-2-2 0,0 0 0,1 1 0,2 2 0,1 1 0,2 1 0,-1-1 0,-2-2 0,-2-2 0,-1-1 0,0 0 0,1 1 0,2 1 0,0 1 0,1 0 0,-1-1 0,-2 0 0,-1-3 0,-1 1 0,1-1 0,0 1 0,1 0 0,0 0 0,1 0 0,0 1 0,2 1 0,0 1 0,0-1 0,1 1 0,-2-1 0,-1-1 0,-1 0 0,-1-2 0,-1-2 0,0-1 0,1-1 0,-2-1 0,0 0 0,-1 0 0,-1-1 0,-3-1 0,0 0 0,-2 0 0,2 2 0,-1 1 0,-1 0 0,-1-1 0,-1-1 0,0 0 0,2 1 0,1 0 0,3 1 0,0 0 0,1 1 0,0-1 0,0 1 0,-2-2 0,-1 0 0,-3-2 0,-1-1 0,0 2 0,0 1 0,1 2 0,1 0 0,0 1 0,-2 0 0,-2 0 0,-1 0 0,-2 0 0,2 0 0,1 0 0,3 0 0,3 0 0,0 0 0,-1 0 0,0 0 0,-1 0 0,2 0 0,1 1 0,2 0 0,0 0 0,2 1 0,0-1 0,1 0 0,2 0 0,3 1 0,5 2 0,3 1 0,3 0 0,-2 1 0,-6-2 0,-3-2 0,-3 0 0,-1-2 0,1 0 0,0 0 0,0 0 0,1 0 0,0 0 0,1-1 0,1-1 0,2-2 0,-1-2 0,-1 0 0,-1 2 0,-1 2 0,-2 1 0,0 0 0,0 1 0,2 0 0,-1-1 0,-1 0 0,1-1 0,-1 1 0,1 1 0,1 0 0,-2 0 0,0 0 0,0 0 0,1 0 0,1 0 0,0 0 0,0 0 0,0 0 0,-1 0 0,-1 0 0,0 0 0,-1 0 0,1 0 0,0 0 0,-1 0 0,1 0 0,0 0 0,0 0 0,0 0 0,0 0 0,-2 0 0,-7 0 0,-1 0 0,-11 0 0,5 0 0,-1 0 0,5 0 0,4-1 0,2 0 0,0-1 0,0-2 0,0 1 0,0-1 0,1 1 0,0-1 0,-1 0 0,1 0 0,0 0 0,0-1 0,0 0 0,0 0 0,1 2 0,0 0 0,0 0 0,0-1 0,0-1 0,0 0 0,0 0 0,1 1 0,0 1 0,-1 0 0,1 1 0,-1-1 0,0 1 0,1 1 0,-1-1 0,0 1 0,0-2 0,-1 1 0,-1 0 0,-2-2 0,0 1 0,-1-2 0,-1 1 0,0-1 0,0 1 0,-2 0 0,0-2 0,-1 1 0,-1 0 0,1-2 0,-1 1 0,2-1 0,0 1 0,1 0 0,1 1 0,2 1 0,0 2 0,2 0 0,1 0 0,0 1 0,1-1 0,0-1 0,-1-2 0,-1-3 0,0-2 0,-1 1 0,0 2 0,1 2 0,1 2 0,0 2 0,0 0 0,0 1 0,0 0 0,-1 0 0,-1 0 0,-1 0 0,0 0 0,1 0 0,1 0 0,1 0 0,-1 0 0,2 0 0,-1 0 0</inkml:trace>
+</inkml:ink>
+</file>
+
+<file path=ppt/ink/ink5.xml><?xml version="1.0" encoding="utf-8"?>
+<inkml:ink xmlns:inkml="http://www.w3.org/2003/InkML">
+  <inkml:definitions>
+    <inkml:context xml:id="ctx0">
+      <inkml:inkSource xml:id="inkSrc0">
+        <inkml:traceFormat>
+          <inkml:channel name="X" type="integer" min="-2.14748E9" max="2.14748E9" units="cm"/>
+          <inkml:channel name="Y" type="integer" min="-2.14748E9" max="2.14748E9" units="cm"/>
+          <inkml:channel name="F" type="integer" max="32767" units="dev"/>
+        </inkml:traceFormat>
+        <inkml:channelProperties>
+          <inkml:channelProperty channel="X" name="resolution" value="1000" units="1/cm"/>
+          <inkml:channelProperty channel="Y" name="resolution" value="1000" units="1/cm"/>
+          <inkml:channelProperty channel="F" name="resolution" value="0" units="1/dev"/>
+        </inkml:channelProperties>
+      </inkml:inkSource>
+      <inkml:timestamp xml:id="ts0" timeString="2025-08-16T17:58:14.436"/>
+    </inkml:context>
+    <inkml:brush xml:id="br0">
+      <inkml:brushProperty name="width" value="0.05" units="cm"/>
+      <inkml:brushProperty name="height" value="0.05" units="cm"/>
+      <inkml:brushProperty name="color" value="#AB008B"/>
+    </inkml:brush>
+  </inkml:definitions>
+  <inkml:trace contextRef="#ctx0" brushRef="#br0">330 10 24575,'-1'18'0,"0"2"0,0-1 0,0-4 0,0-3 0,0-4 0,1-1 0,0 0 0,0-4 0,0 0 0,-1-1 0,1-1 0,-1 2 0,1 0 0,-1 1 0,0 0 0,1 1 0,0 1 0,0 3 0,0 0 0,0 0 0,0-2 0,0-2 0,0-1 0,0-1 0,0-1 0,0 1 0,0-1 0,0 1 0,0 1 0,0 0 0,0 2 0,0 1 0,0 0 0,0-3 0,0 1 0,0 1 0,0 1 0,0 0 0,0 0 0,0 0 0,0-1 0,0 3 0,0-1 0,0 1 0,0-1 0,0-2 0,0-1 0,0-2 0,0 0 0,0 0 0,0 0 0,0 2 0,0-1 0,0 0 0,0-1 0,0 0 0,0 0 0,0 0 0,0-1 0,0 0 0,0 0 0,-1 1 0,1 1 0,-1 0 0,0 0 0,1 0 0,0-2 0,0 1 0,0 0 0,-1-1 0,0 1 0,1 0 0,0 1 0,0-1 0,0 1 0,0 0 0,0-1 0,0 1 0,0-1 0,0 0 0,0-1 0,0 1 0,0 0 0,0 0 0,0 1 0,0-2 0,0 1 0,0 0 0,0 0 0,0-1 0,-1 1 0,0 2 0,0 2 0,-1 1 0,2 1 0,0-2 0,0-2 0,0-1 0,0-1 0,0 0 0,0 0 0,0 0 0,0-1 0,0 2 0,0-1 0,0 1 0,0 3 0,0-1 0,1 1 0,-1-1 0,1-1 0,0 0 0,-1-1 0,0 0 0,0 0 0,0 1 0,0-2 0,1 2 0,1-1 0,-1 1 0,1-1 0,-1-1 0,0-1 0,-2-1 0,-1-2 0,-1 0 0,-3-3 0,-1-1 0,-2-1 0,-1-2 0,2 2 0,2 1 0,2 2 0,1 1 0,2 1 0,0-1 0,0 0 0,1 1 0,0 0 0,-1 0 0,-1-1 0,-3-1 0,-1-1 0,-2-1 0,-1-1 0,2 1 0,0 1 0,3 1 0,2 1 0,0 1 0,0-1 0,0-1 0,-3-1 0,1 0 0,-2 0 0,0 0 0,1 0 0,0 0 0,2 1 0,2 1 0,1 0 0,-2-1 0,-1-2 0,0 1 0,0-1 0,1 0 0,1 2 0,-1-1 0,2 1 0,-1 2 0,-1-1 0,-1 1 0,-1-1 0,0-1 0,0 0 0,1-1 0,1 1 0,0-1 0,1-1 0,0 1 0,-1-2 0,-1 1 0,1 1 0,0-1 0,-1 1 0,1 2 0,0 0 0,0 1 0,1 0 0,-1 0 0,-1 1 0,0-2 0,0 1 0,0-1 0,0 1 0,0-1 0,0 0 0,-1 0 0,-1 0 0,0-1 0,1 1 0,1 0 0,1 0 0,1 0 0,1 0 0,-1 1 0,-1-1 0,1 0 0,-1-2 0,1 0 0,-1 0 0,0 1 0,0 1 0,1 1 0,0-1 0,1 0 0,0 0 0,-1 0 0,0 0 0,0 1 0,0-1 0,-1 1 0,1-1 0,-1-1 0,1 1 0,-1 0 0,1 0 0,-1 0 0,1 1 0,0-1 0,-1-1 0,1 0 0,-1 1 0,1-1 0,0 1 0,1 0 0,0 0 0,-1 0 0,0 1 0,0-1 0,0 1 0,0-1 0,1 0 0,-1 1 0,-1-2 0,2 1 0,-1-1 0,1 1 0,-1-1 0,0 1 0,-2 0 0,1 1 0,0 0 0,1-1 0,1 0 0,1-1 0,0 0 0,1-3 0,3-1 0,0-2 0,1-1 0,-1 3 0,-1 2 0,-2 2 0,0 1 0,-2 1 0,1 0 0,0-1 0,1 0 0,1-2 0,1 0 0,-1 0 0,-1 2 0,0 0 0,-1 1 0,0-1 0,2 0 0,0-2 0,1 0 0,0 0 0,-1 0 0,-1 2 0,1-1 0,1-1 0,2-2 0,2-2 0,-2 2 0,-1 1 0,-1 1 0,-2 3 0,2-1 0,-1-1 0,1 0 0,2-2 0,-1 1 0,0 0 0,-2 1 0,-1 1 0,0 0 0,0 0 0,2-1 0,1-1 0,0-1 0,0 1 0,-2 1 0,0 2 0,-1 1 0,0-2 0,1 1 0,1-1 0,0 0 0,0 1 0,0-1 0,0 0 0,-1 0 0,0 1 0,-1 0 0,0-1 0,1 1 0,-1 0 0,1-1 0,0 1 0,-1 1 0,1-1 0,1 0 0,-1 0 0,1-1 0,-1 0 0,0 1 0,-1 0 0,0 0 0,0-1 0,2 1 0,0-2 0,0 1 0,-1 1 0,-1 1 0,1-1 0,-1 1 0,-1-1 0,1 0 0,0-1 0,0 1 0,0-1 0,1-1 0,-1 1 0,1 0 0,0 0 0,-1 1 0,0-1 0,-1 1 0,1 0 0,0 0 0,0-1 0,0 2 0,0-1 0,-1-1 0,1 2 0,0-1 0,1 0 0,-1 0 0,1-1 0,-1 1 0,1 0 0,0 0 0,0 0 0,0 0 0,-1-1 0,-4 6 0,1 0 0,-4 4 0,0 1 0,2-2 0,-1 1 0,1-3 0,1-2 0,1-1 0,0 0 0,0 1 0,0 2 0,-1 2 0,-1 1 0,0-1 0,1-1 0,0-2 0,2-2 0,-1 0 0,0 0 0,1-1 0,-1 1 0,1 0 0,0 3 0,0 2 0,0 3 0,0 4 0,0-1 0,0 0 0,0-2 0,0-4 0,0-1 0,0-2 0,0 0 0,0 0 0,0 2 0,0 2 0,0 2 0,0-1 0,0 0 0,0 0 0,0 0 0,0 1 0,0 0 0,0-1 0,0-1 0,0 0 0,0-1 0,0 1 0,0-1 0,0 1 0,0-2 0,0 0 0,0-1 0,0-2 0,0-1 0,0 2 0,0 0 0,0 0 0,0 0 0,0 0 0,0-1 0,0-1 0,0 1 0,0 2 0,0 2 0,1 1 0,-1 0 0,1-2 0,0 0 0,-1-3 0,0 1 0,0-1 0,0 1 0,0 1 0,0-1 0,0 0 0,0 1 0,0 0 0,0 2 0,0 0 0,0 0 0,0 0 0,0-3 0,0 0 0,0-1 0,0 0 0,0 0 0,0 0 0,0 0 0,0-1 0,0 1 0,0-1 0,0 1 0,0-2 0,-3-5 0,1 0 0,-4-6 0,0 1 0,-1-1 0,-2-2 0,1 1 0,0 0 0,0 1 0,1 0 0,1 2 0,2 2 0,0 3 0,2 1 0,0-1 0,0 1 0,0-2 0,-1 1 0,1 0 0,0 0 0,-1 0 0,0 0 0,0 0 0,0 1 0,-1 0 0,-1-1 0,0-1 0,1 0 0,1 1 0,0 0 0,1 2 0,1-1 0,-2 0 0,1-1 0,-2-1 0,0-1 0,0 0 0,-1 1 0,1 0 0,0 0 0,0 0 0,-1 1 0,0-1 0,1 1 0,1 1 0,0 0 0,2 0 0,-2 0 0,1-1 0,-1-1 0,0 0 0,1 0 0,0 2 0,1 0 0,1 0 0,0 0 0,-1 0 0,0 1 0,-1 0 0,0 0 0,-1-1 0,0 1 0,2 0 0,-1 1 0,0-1 0,0 0 0,-1-1 0,0 1 0,1-2 0,0 1 0,0 1 0,0 1 0,1 3 0,0 2 0,1 3 0,2 3 0,1 1 0,1 0 0,2-2 0,-1-2 0,-1-2 0,1 0 0,-2-2 0,0 0 0,-1-2 0,0 0 0,0 0 0,0 0 0,0 0 0,0 0 0,0 0 0,0 0 0,0-1 0,0 0 0,0 1 0,0 0 0,0 0 0,0 0 0,1 0 0,1 1 0,0 1 0,1 0 0,-1 1 0,1-1 0,-1 0 0,0-1 0,-1 0 0,0-1 0,0 2 0,2 0 0,1 1 0,0 1 0,0-1 0,-1 0 0,-2-2 0,-1-2 0,0 1 0,1 0 0,1 2 0,2 0 0,1 2 0,0-1 0,-1 1 0,-2-3 0,-1 0 0,0-1 0,0 0 0,-1 0 0,0-1 0,-1-3 0,0-3 0,-1-1 0,0-2 0,0-3 0,0-4 0,0-3 0,0 1 0,0 3 0,0 2 0,0 4 0,0 0 0,0 0 0,0 0 0,0 0 0,0 0 0,0 3 0,-1 0 0,1-1 0,-1-1 0,1-2 0,0 0 0,0 1 0,0 2 0,0-1 0,0-1 0,0-2 0,0-2 0,0 1 0,1 1 0,-1 4 0,1 2 0,-1 1 0,0-1 0,0-3 0,0-2 0,0-1 0,0 0 0,0 1 0,0 3 0,0 1 0,0 2 0,0 1 0,0 0 0,0-2 0,1-1 0,0-1 0,0 1 0,0 1 0,-1 4 0,-2 3 0,0 1 0,-1 5 0,0-3 0,1 2 0,-1-1 0,0 0 0,-1 2 0,-1 2 0,-1 1 0,0 1 0,1-1 0,0-2 0,2-2 0,0-2 0,-1 1 0,0 2 0,-1 0 0,0 2 0,1 0 0,1-2 0,1-3 0,0-2 0,1-1 0,1 0 0,-1 0 0,0 2 0,0-2 0,0 0 0,1-1 0,-1 0 0,0 1 0,1 0 0,-1 1 0,0-1 0,1-1 0,0-2 0,3-1 0,0 0 0,2 0 0,-1 1 0,0 0 0,1 2 0,1 0 0,4 1 0,-1 0 0,-1 1 0,-1-1 0,-3 0 0,0-1 0,1 1 0,1 0 0,-1 0 0,0-1 0,-1-1 0,-1 0 0,0 0 0,0-1 0,-1 1 0,-1 0 0,-2-7 0,-3-1 0,-3-5 0,-1 0 0,-1 2 0,1 0 0,0 1 0,1 0 0,0 0 0,0 1 0,1 0 0,0 0 0,1 0 0,-1 1 0,1 0 0,0 1 0,1 1 0,0 1 0,1 1 0,0-1 0,1 1 0,0 0 0,0 1 0,1 0 0,-1 0 0,-1 0 0,0 0 0,-1 1 0,0 1 0,0 0 0,1 0 0,0 0 0,0 1 0,-1 1 0,-1 1 0,-1 0 0,2 0 0,1-2 0,3 1 0,5-1 0,-1 1 0,5 2 0,-4 0 0,1 1 0,1 1 0,-1 1 0,-1-1 0,1 0 0,-2-1 0,0-2 0,-1-1 0,-1-1 0,0 0 0,0 1 0,0-1 0,0 0 0,0-1 0,1 0 0,0-2 0,0-2 0,0-3 0,0-2 0,-2-3 0,1-1 0,0-2 0,-1 2 0,1 2 0,0 1 0,0 3 0,-1 1 0,0 1 0,0 1 0,1 1 0,-1 0 0,1 0 0,0-2 0,1 1 0,-1 0 0,0 1 0,-1 1 0,-1 1 0,1-1 0,-1-1 0,0 0 0,-1 1 0,-1 1 0,0 1 0,0 1 0,-1 1 0,0 1 0,-1 1 0,0 0 0,0 0 0,0 0 0,1-1 0,0 1 0,1-1 0,-2 0 0,0 1 0,-2 1 0,0 0 0,0-1 0,2 0 0,2-1 0,0-1 0,1 0 0,0 0 0,-1 2 0,-1-1 0,1-1 0,0 1 0,1-1 0,0-1 0,2-5 0,1 0 0,-1-1 0,0 2 0</inkml:trace>
+</inkml:ink>
 </file>
 
 <file path=ppt/slideLayouts/slideLayout1.xml><?xml version="1.0" encoding="utf-8"?>
@@ -255,7 +401,7 @@
           <a:p>
             <a:fld id="{4C75F1E8-7600-1B44-AEE2-8E0C7D37728C}" type="datetimeFigureOut">
               <a:rPr lang="en-US" smtClean="0"/>
-              <a:t>5/22/25</a:t>
+              <a:t>8/16/25</a:t>
             </a:fld>
             <a:endParaRPr lang="en-US"/>
           </a:p>
@@ -453,7 +599,7 @@
           <a:p>
             <a:fld id="{4C75F1E8-7600-1B44-AEE2-8E0C7D37728C}" type="datetimeFigureOut">
               <a:rPr lang="en-US" smtClean="0"/>
-              <a:t>5/22/25</a:t>
+              <a:t>8/16/25</a:t>
             </a:fld>
             <a:endParaRPr lang="en-US"/>
           </a:p>
@@ -661,7 +807,7 @@
           <a:p>
             <a:fld id="{4C75F1E8-7600-1B44-AEE2-8E0C7D37728C}" type="datetimeFigureOut">
               <a:rPr lang="en-US" smtClean="0"/>
-              <a:t>5/22/25</a:t>
+              <a:t>8/16/25</a:t>
             </a:fld>
             <a:endParaRPr lang="en-US"/>
           </a:p>
@@ -859,7 +1005,7 @@
           <a:p>
             <a:fld id="{4C75F1E8-7600-1B44-AEE2-8E0C7D37728C}" type="datetimeFigureOut">
               <a:rPr lang="en-US" smtClean="0"/>
-              <a:t>5/22/25</a:t>
+              <a:t>8/16/25</a:t>
             </a:fld>
             <a:endParaRPr lang="en-US"/>
           </a:p>
@@ -1134,7 +1280,7 @@
           <a:p>
             <a:fld id="{4C75F1E8-7600-1B44-AEE2-8E0C7D37728C}" type="datetimeFigureOut">
               <a:rPr lang="en-US" smtClean="0"/>
-              <a:t>5/22/25</a:t>
+              <a:t>8/16/25</a:t>
             </a:fld>
             <a:endParaRPr lang="en-US"/>
           </a:p>
@@ -1399,7 +1545,7 @@
           <a:p>
             <a:fld id="{4C75F1E8-7600-1B44-AEE2-8E0C7D37728C}" type="datetimeFigureOut">
               <a:rPr lang="en-US" smtClean="0"/>
-              <a:t>5/22/25</a:t>
+              <a:t>8/16/25</a:t>
             </a:fld>
             <a:endParaRPr lang="en-US"/>
           </a:p>
@@ -1811,7 +1957,7 @@
           <a:p>
             <a:fld id="{4C75F1E8-7600-1B44-AEE2-8E0C7D37728C}" type="datetimeFigureOut">
               <a:rPr lang="en-US" smtClean="0"/>
-              <a:t>5/22/25</a:t>
+              <a:t>8/16/25</a:t>
             </a:fld>
             <a:endParaRPr lang="en-US"/>
           </a:p>
@@ -1952,7 +2098,7 @@
           <a:p>
             <a:fld id="{4C75F1E8-7600-1B44-AEE2-8E0C7D37728C}" type="datetimeFigureOut">
               <a:rPr lang="en-US" smtClean="0"/>
-              <a:t>5/22/25</a:t>
+              <a:t>8/16/25</a:t>
             </a:fld>
             <a:endParaRPr lang="en-US"/>
           </a:p>
@@ -2065,7 +2211,7 @@
           <a:p>
             <a:fld id="{4C75F1E8-7600-1B44-AEE2-8E0C7D37728C}" type="datetimeFigureOut">
               <a:rPr lang="en-US" smtClean="0"/>
-              <a:t>5/22/25</a:t>
+              <a:t>8/16/25</a:t>
             </a:fld>
             <a:endParaRPr lang="en-US"/>
           </a:p>
@@ -2376,7 +2522,7 @@
           <a:p>
             <a:fld id="{4C75F1E8-7600-1B44-AEE2-8E0C7D37728C}" type="datetimeFigureOut">
               <a:rPr lang="en-US" smtClean="0"/>
-              <a:t>5/22/25</a:t>
+              <a:t>8/16/25</a:t>
             </a:fld>
             <a:endParaRPr lang="en-US"/>
           </a:p>
@@ -2664,7 +2810,7 @@
           <a:p>
             <a:fld id="{4C75F1E8-7600-1B44-AEE2-8E0C7D37728C}" type="datetimeFigureOut">
               <a:rPr lang="en-US" smtClean="0"/>
-              <a:t>5/22/25</a:t>
+              <a:t>8/16/25</a:t>
             </a:fld>
             <a:endParaRPr lang="en-US"/>
           </a:p>
@@ -2905,7 +3051,7 @@
           <a:p>
             <a:fld id="{4C75F1E8-7600-1B44-AEE2-8E0C7D37728C}" type="datetimeFigureOut">
               <a:rPr lang="en-US" smtClean="0"/>
-              <a:t>5/22/25</a:t>
+              <a:t>8/16/25</a:t>
             </a:fld>
             <a:endParaRPr lang="en-US"/>
           </a:p>
@@ -3413,8 +3559,8 @@
               <a:chExt cx="384271" cy="230832"/>
             </a:xfrm>
           </p:grpSpPr>
-          <mc:AlternateContent xmlns:mc="http://schemas.openxmlformats.org/markup-compatibility/2006">
-            <mc:Choice xmlns:a14="http://schemas.microsoft.com/office/drawing/2010/main" Requires="a14">
+          <mc:AlternateContent xmlns:mc="http://schemas.openxmlformats.org/markup-compatibility/2006" xmlns:a14="http://schemas.microsoft.com/office/drawing/2010/main">
+            <mc:Choice Requires="a14">
               <p:sp>
                 <p:nvSpPr>
                   <p:cNvPr id="5" name="TextBox 4">
@@ -3443,6 +3589,7 @@
                   </a:bodyPr>
                   <a:lstStyle/>
                   <a:p>
+                    <a:pPr/>
                     <a14:m>
                       <m:oMathPara xmlns:m="http://schemas.openxmlformats.org/officeDocument/2006/math">
                         <m:oMathParaPr>
@@ -3482,7 +3629,7 @@
                 </p:txBody>
               </p:sp>
             </mc:Choice>
-            <mc:Fallback>
+            <mc:Fallback xmlns="">
               <p:sp>
                 <p:nvSpPr>
                   <p:cNvPr id="5" name="TextBox 4">
@@ -4842,8 +4989,8 @@
             </a:p>
           </p:txBody>
         </p:sp>
-        <mc:AlternateContent xmlns:mc="http://schemas.openxmlformats.org/markup-compatibility/2006">
-          <mc:Choice xmlns:a14="http://schemas.microsoft.com/office/drawing/2010/main" Requires="a14">
+        <mc:AlternateContent xmlns:mc="http://schemas.openxmlformats.org/markup-compatibility/2006" xmlns:a14="http://schemas.microsoft.com/office/drawing/2010/main">
+          <mc:Choice Requires="a14">
             <p:sp>
               <p:nvSpPr>
                 <p:cNvPr id="34" name="TextBox 33">
@@ -4872,6 +5019,7 @@
                 </a:bodyPr>
                 <a:lstStyle/>
                 <a:p>
+                  <a:pPr/>
                   <a14:m>
                     <m:oMathPara xmlns:m="http://schemas.openxmlformats.org/officeDocument/2006/math">
                       <m:oMathParaPr>
@@ -4898,7 +5046,7 @@
               </p:txBody>
             </p:sp>
           </mc:Choice>
-          <mc:Fallback>
+          <mc:Fallback xmlns="">
             <p:sp>
               <p:nvSpPr>
                 <p:cNvPr id="34" name="TextBox 33">
@@ -4943,8 +5091,8 @@
             </p:sp>
           </mc:Fallback>
         </mc:AlternateContent>
-        <mc:AlternateContent xmlns:mc="http://schemas.openxmlformats.org/markup-compatibility/2006">
-          <mc:Choice xmlns:a14="http://schemas.microsoft.com/office/drawing/2010/main" Requires="a14">
+        <mc:AlternateContent xmlns:mc="http://schemas.openxmlformats.org/markup-compatibility/2006" xmlns:a14="http://schemas.microsoft.com/office/drawing/2010/main">
+          <mc:Choice Requires="a14">
             <p:sp>
               <p:nvSpPr>
                 <p:cNvPr id="35" name="TextBox 34">
@@ -4973,6 +5121,7 @@
                 </a:bodyPr>
                 <a:lstStyle/>
                 <a:p>
+                  <a:pPr/>
                   <a14:m>
                     <m:oMathPara xmlns:m="http://schemas.openxmlformats.org/officeDocument/2006/math">
                       <m:oMathParaPr>
@@ -4993,7 +5142,7 @@
               </p:txBody>
             </p:sp>
           </mc:Choice>
-          <mc:Fallback>
+          <mc:Fallback xmlns="">
             <p:sp>
               <p:nvSpPr>
                 <p:cNvPr id="35" name="TextBox 34">
@@ -5214,8 +5363,8 @@
               <a:chExt cx="384271" cy="230832"/>
             </a:xfrm>
           </p:grpSpPr>
-          <mc:AlternateContent xmlns:mc="http://schemas.openxmlformats.org/markup-compatibility/2006">
-            <mc:Choice xmlns:a14="http://schemas.microsoft.com/office/drawing/2010/main" Requires="a14">
+          <mc:AlternateContent xmlns:mc="http://schemas.openxmlformats.org/markup-compatibility/2006" xmlns:a14="http://schemas.microsoft.com/office/drawing/2010/main">
+            <mc:Choice Requires="a14">
               <p:sp>
                 <p:nvSpPr>
                   <p:cNvPr id="41" name="TextBox 40">
@@ -5244,6 +5393,7 @@
                   </a:bodyPr>
                   <a:lstStyle/>
                   <a:p>
+                    <a:pPr/>
                     <a14:m>
                       <m:oMathPara xmlns:m="http://schemas.openxmlformats.org/officeDocument/2006/math">
                         <m:oMathParaPr>
@@ -5283,7 +5433,7 @@
                 </p:txBody>
               </p:sp>
             </mc:Choice>
-            <mc:Fallback>
+            <mc:Fallback xmlns="">
               <p:sp>
                 <p:nvSpPr>
                   <p:cNvPr id="41" name="TextBox 40">
@@ -6375,8 +6525,8 @@
             </a:p>
           </p:txBody>
         </p:sp>
-        <mc:AlternateContent xmlns:mc="http://schemas.openxmlformats.org/markup-compatibility/2006">
-          <mc:Choice xmlns:a14="http://schemas.microsoft.com/office/drawing/2010/main" Requires="a14">
+        <mc:AlternateContent xmlns:mc="http://schemas.openxmlformats.org/markup-compatibility/2006" xmlns:a14="http://schemas.microsoft.com/office/drawing/2010/main">
+          <mc:Choice Requires="a14">
             <p:sp>
               <p:nvSpPr>
                 <p:cNvPr id="28" name="TextBox 27">
@@ -6405,6 +6555,7 @@
                 </a:bodyPr>
                 <a:lstStyle/>
                 <a:p>
+                  <a:pPr/>
                   <a14:m>
                     <m:oMathPara xmlns:m="http://schemas.openxmlformats.org/officeDocument/2006/math">
                       <m:oMathParaPr>
@@ -6425,7 +6576,7 @@
               </p:txBody>
             </p:sp>
           </mc:Choice>
-          <mc:Fallback>
+          <mc:Fallback xmlns="">
             <p:sp>
               <p:nvSpPr>
                 <p:cNvPr id="28" name="TextBox 27">
@@ -6470,8 +6621,8 @@
             </p:sp>
           </mc:Fallback>
         </mc:AlternateContent>
-        <mc:AlternateContent xmlns:mc="http://schemas.openxmlformats.org/markup-compatibility/2006">
-          <mc:Choice xmlns:a14="http://schemas.microsoft.com/office/drawing/2010/main" Requires="a14">
+        <mc:AlternateContent xmlns:mc="http://schemas.openxmlformats.org/markup-compatibility/2006" xmlns:a14="http://schemas.microsoft.com/office/drawing/2010/main">
+          <mc:Choice Requires="a14">
             <p:sp>
               <p:nvSpPr>
                 <p:cNvPr id="29" name="TextBox 28">
@@ -6500,6 +6651,7 @@
                 </a:bodyPr>
                 <a:lstStyle/>
                 <a:p>
+                  <a:pPr/>
                   <a14:m>
                     <m:oMathPara xmlns:m="http://schemas.openxmlformats.org/officeDocument/2006/math">
                       <m:oMathParaPr>
@@ -6526,7 +6678,7 @@
               </p:txBody>
             </p:sp>
           </mc:Choice>
-          <mc:Fallback>
+          <mc:Fallback xmlns="">
             <p:sp>
               <p:nvSpPr>
                 <p:cNvPr id="29" name="TextBox 28">
@@ -7706,8 +7858,8 @@
             </a:fontRef>
           </p:style>
         </p:cxnSp>
-        <mc:AlternateContent xmlns:mc="http://schemas.openxmlformats.org/markup-compatibility/2006">
-          <mc:Choice xmlns:a14="http://schemas.microsoft.com/office/drawing/2010/main" Requires="a14">
+        <mc:AlternateContent xmlns:mc="http://schemas.openxmlformats.org/markup-compatibility/2006" xmlns:a14="http://schemas.microsoft.com/office/drawing/2010/main">
+          <mc:Choice Requires="a14">
             <p:sp>
               <p:nvSpPr>
                 <p:cNvPr id="85" name="TextBox 84">
@@ -7736,6 +7888,7 @@
                 </a:bodyPr>
                 <a:lstStyle/>
                 <a:p>
+                  <a:pPr/>
                   <a14:m>
                     <m:oMathPara xmlns:m="http://schemas.openxmlformats.org/officeDocument/2006/math">
                       <m:oMathParaPr>
@@ -7762,7 +7915,7 @@
               </p:txBody>
             </p:sp>
           </mc:Choice>
-          <mc:Fallback>
+          <mc:Fallback xmlns="">
             <p:sp>
               <p:nvSpPr>
                 <p:cNvPr id="85" name="TextBox 84">
@@ -8030,6 +8183,1106 @@
     <p:extLst>
       <p:ext uri="{BB962C8B-B14F-4D97-AF65-F5344CB8AC3E}">
         <p14:creationId xmlns:p14="http://schemas.microsoft.com/office/powerpoint/2010/main" val="1992945468"/>
+      </p:ext>
+    </p:extLst>
+  </p:cSld>
+  <p:clrMapOvr>
+    <a:masterClrMapping/>
+  </p:clrMapOvr>
+</p:sld>
+</file>
+
+<file path=ppt/slides/slide3.xml><?xml version="1.0" encoding="utf-8"?>
+<p:sld xmlns:a="http://schemas.openxmlformats.org/drawingml/2006/main" xmlns:r="http://schemas.openxmlformats.org/officeDocument/2006/relationships" xmlns:p="http://schemas.openxmlformats.org/presentationml/2006/main">
+  <p:cSld>
+    <p:spTree>
+      <p:nvGrpSpPr>
+        <p:cNvPr id="1" name=""/>
+        <p:cNvGrpSpPr/>
+        <p:nvPr/>
+      </p:nvGrpSpPr>
+      <p:grpSpPr>
+        <a:xfrm>
+          <a:off x="0" y="0"/>
+          <a:ext cx="0" cy="0"/>
+          <a:chOff x="0" y="0"/>
+          <a:chExt cx="0" cy="0"/>
+        </a:xfrm>
+      </p:grpSpPr>
+      <p:cxnSp>
+        <p:nvCxnSpPr>
+          <p:cNvPr id="5" name="Straight Connector 4">
+            <a:extLst>
+              <a:ext uri="{FF2B5EF4-FFF2-40B4-BE49-F238E27FC236}">
+                <a16:creationId xmlns:a16="http://schemas.microsoft.com/office/drawing/2014/main" id="{D8E765FA-AB64-8D67-EFE3-E75C3C26DCCF}"/>
+              </a:ext>
+            </a:extLst>
+          </p:cNvPr>
+          <p:cNvCxnSpPr/>
+          <p:nvPr/>
+        </p:nvCxnSpPr>
+        <p:spPr>
+          <a:xfrm>
+            <a:off x="4594302" y="2449551"/>
+            <a:ext cx="0" cy="1728439"/>
+          </a:xfrm>
+          <a:prstGeom prst="line">
+            <a:avLst/>
+          </a:prstGeom>
+          <a:ln>
+            <a:headEnd type="triangle"/>
+            <a:tailEnd type="none"/>
+          </a:ln>
+        </p:spPr>
+        <p:style>
+          <a:lnRef idx="2">
+            <a:schemeClr val="accent1"/>
+          </a:lnRef>
+          <a:fillRef idx="0">
+            <a:schemeClr val="accent1"/>
+          </a:fillRef>
+          <a:effectRef idx="1">
+            <a:schemeClr val="accent1"/>
+          </a:effectRef>
+          <a:fontRef idx="minor">
+            <a:schemeClr val="tx1"/>
+          </a:fontRef>
+        </p:style>
+      </p:cxnSp>
+      <p:cxnSp>
+        <p:nvCxnSpPr>
+          <p:cNvPr id="6" name="Straight Connector 5">
+            <a:extLst>
+              <a:ext uri="{FF2B5EF4-FFF2-40B4-BE49-F238E27FC236}">
+                <a16:creationId xmlns:a16="http://schemas.microsoft.com/office/drawing/2014/main" id="{45DE9FD6-EB7D-1F4E-6470-53968C5C4B2C}"/>
+              </a:ext>
+            </a:extLst>
+          </p:cNvPr>
+          <p:cNvCxnSpPr>
+            <a:cxnSpLocks/>
+          </p:cNvCxnSpPr>
+          <p:nvPr/>
+        </p:nvCxnSpPr>
+        <p:spPr>
+          <a:xfrm flipH="1">
+            <a:off x="4594302" y="4177990"/>
+            <a:ext cx="2352908" cy="0"/>
+          </a:xfrm>
+          <a:prstGeom prst="line">
+            <a:avLst/>
+          </a:prstGeom>
+          <a:ln>
+            <a:headEnd type="triangle"/>
+            <a:tailEnd type="none"/>
+          </a:ln>
+        </p:spPr>
+        <p:style>
+          <a:lnRef idx="2">
+            <a:schemeClr val="accent1"/>
+          </a:lnRef>
+          <a:fillRef idx="0">
+            <a:schemeClr val="accent1"/>
+          </a:fillRef>
+          <a:effectRef idx="1">
+            <a:schemeClr val="accent1"/>
+          </a:effectRef>
+          <a:fontRef idx="minor">
+            <a:schemeClr val="tx1"/>
+          </a:fontRef>
+        </p:style>
+      </p:cxnSp>
+      <p:cxnSp>
+        <p:nvCxnSpPr>
+          <p:cNvPr id="10" name="Straight Connector 9">
+            <a:extLst>
+              <a:ext uri="{FF2B5EF4-FFF2-40B4-BE49-F238E27FC236}">
+                <a16:creationId xmlns:a16="http://schemas.microsoft.com/office/drawing/2014/main" id="{042CC93E-DB1E-045D-E010-D36E20277009}"/>
+              </a:ext>
+            </a:extLst>
+          </p:cNvPr>
+          <p:cNvCxnSpPr>
+            <a:cxnSpLocks/>
+          </p:cNvCxnSpPr>
+          <p:nvPr/>
+        </p:nvCxnSpPr>
+        <p:spPr>
+          <a:xfrm flipV="1">
+            <a:off x="5754411" y="3124200"/>
+            <a:ext cx="8108" cy="1053790"/>
+          </a:xfrm>
+          <a:prstGeom prst="line">
+            <a:avLst/>
+          </a:prstGeom>
+          <a:ln w="9525">
+            <a:prstDash val="dash"/>
+          </a:ln>
+        </p:spPr>
+        <p:style>
+          <a:lnRef idx="2">
+            <a:schemeClr val="accent1"/>
+          </a:lnRef>
+          <a:fillRef idx="0">
+            <a:schemeClr val="accent1"/>
+          </a:fillRef>
+          <a:effectRef idx="1">
+            <a:schemeClr val="accent1"/>
+          </a:effectRef>
+          <a:fontRef idx="minor">
+            <a:schemeClr val="tx1"/>
+          </a:fontRef>
+        </p:style>
+      </p:cxnSp>
+      <p:sp>
+        <p:nvSpPr>
+          <p:cNvPr id="11" name="Freeform 10">
+            <a:extLst>
+              <a:ext uri="{FF2B5EF4-FFF2-40B4-BE49-F238E27FC236}">
+                <a16:creationId xmlns:a16="http://schemas.microsoft.com/office/drawing/2014/main" id="{ED4069DB-9E04-3BDA-2519-4FD81760ACFF}"/>
+              </a:ext>
+            </a:extLst>
+          </p:cNvPr>
+          <p:cNvSpPr/>
+          <p:nvPr/>
+        </p:nvSpPr>
+        <p:spPr>
+          <a:xfrm>
+            <a:off x="4728117" y="3266170"/>
+            <a:ext cx="1219200" cy="911820"/>
+          </a:xfrm>
+          <a:custGeom>
+            <a:avLst/>
+            <a:gdLst>
+              <a:gd name="connsiteX0" fmla="*/ 0 w 1219200"/>
+              <a:gd name="connsiteY0" fmla="*/ 911820 h 911820"/>
+              <a:gd name="connsiteX1" fmla="*/ 133815 w 1219200"/>
+              <a:gd name="connsiteY1" fmla="*/ 889518 h 911820"/>
+              <a:gd name="connsiteX2" fmla="*/ 260195 w 1219200"/>
+              <a:gd name="connsiteY2" fmla="*/ 841196 h 911820"/>
+              <a:gd name="connsiteX3" fmla="*/ 327103 w 1219200"/>
+              <a:gd name="connsiteY3" fmla="*/ 796591 h 911820"/>
+              <a:gd name="connsiteX4" fmla="*/ 379142 w 1219200"/>
+              <a:gd name="connsiteY4" fmla="*/ 744552 h 911820"/>
+              <a:gd name="connsiteX5" fmla="*/ 434898 w 1219200"/>
+              <a:gd name="connsiteY5" fmla="*/ 666493 h 911820"/>
+              <a:gd name="connsiteX6" fmla="*/ 475785 w 1219200"/>
+              <a:gd name="connsiteY6" fmla="*/ 588435 h 911820"/>
+              <a:gd name="connsiteX7" fmla="*/ 486937 w 1219200"/>
+              <a:gd name="connsiteY7" fmla="*/ 536396 h 911820"/>
+              <a:gd name="connsiteX8" fmla="*/ 524107 w 1219200"/>
+              <a:gd name="connsiteY8" fmla="*/ 369128 h 911820"/>
+              <a:gd name="connsiteX9" fmla="*/ 550127 w 1219200"/>
+              <a:gd name="connsiteY9" fmla="*/ 253898 h 911820"/>
+              <a:gd name="connsiteX10" fmla="*/ 579863 w 1219200"/>
+              <a:gd name="connsiteY10" fmla="*/ 112650 h 911820"/>
+              <a:gd name="connsiteX11" fmla="*/ 598449 w 1219200"/>
+              <a:gd name="connsiteY11" fmla="*/ 53176 h 911820"/>
+              <a:gd name="connsiteX12" fmla="*/ 617034 w 1219200"/>
+              <a:gd name="connsiteY12" fmla="*/ 16006 h 911820"/>
+              <a:gd name="connsiteX13" fmla="*/ 635620 w 1219200"/>
+              <a:gd name="connsiteY13" fmla="*/ 8571 h 911820"/>
+              <a:gd name="connsiteX14" fmla="*/ 676507 w 1219200"/>
+              <a:gd name="connsiteY14" fmla="*/ 1137 h 911820"/>
+              <a:gd name="connsiteX15" fmla="*/ 728546 w 1219200"/>
+              <a:gd name="connsiteY15" fmla="*/ 34591 h 911820"/>
+              <a:gd name="connsiteX16" fmla="*/ 747132 w 1219200"/>
+              <a:gd name="connsiteY16" fmla="*/ 134952 h 911820"/>
+              <a:gd name="connsiteX17" fmla="*/ 765717 w 1219200"/>
+              <a:gd name="connsiteY17" fmla="*/ 227879 h 911820"/>
+              <a:gd name="connsiteX18" fmla="*/ 780585 w 1219200"/>
+              <a:gd name="connsiteY18" fmla="*/ 357976 h 911820"/>
+              <a:gd name="connsiteX19" fmla="*/ 802888 w 1219200"/>
+              <a:gd name="connsiteY19" fmla="*/ 473206 h 911820"/>
+              <a:gd name="connsiteX20" fmla="*/ 821473 w 1219200"/>
+              <a:gd name="connsiteY20" fmla="*/ 584718 h 911820"/>
+              <a:gd name="connsiteX21" fmla="*/ 866078 w 1219200"/>
+              <a:gd name="connsiteY21" fmla="*/ 662776 h 911820"/>
+              <a:gd name="connsiteX22" fmla="*/ 910683 w 1219200"/>
+              <a:gd name="connsiteY22" fmla="*/ 733401 h 911820"/>
+              <a:gd name="connsiteX23" fmla="*/ 973873 w 1219200"/>
+              <a:gd name="connsiteY23" fmla="*/ 785440 h 911820"/>
+              <a:gd name="connsiteX24" fmla="*/ 1011044 w 1219200"/>
+              <a:gd name="connsiteY24" fmla="*/ 822610 h 911820"/>
+              <a:gd name="connsiteX25" fmla="*/ 1111405 w 1219200"/>
+              <a:gd name="connsiteY25" fmla="*/ 870932 h 911820"/>
+              <a:gd name="connsiteX26" fmla="*/ 1167161 w 1219200"/>
+              <a:gd name="connsiteY26" fmla="*/ 889518 h 911820"/>
+              <a:gd name="connsiteX27" fmla="*/ 1219200 w 1219200"/>
+              <a:gd name="connsiteY27" fmla="*/ 900669 h 911820"/>
+            </a:gdLst>
+            <a:ahLst/>
+            <a:cxnLst>
+              <a:cxn ang="0">
+                <a:pos x="connsiteX0" y="connsiteY0"/>
+              </a:cxn>
+              <a:cxn ang="0">
+                <a:pos x="connsiteX1" y="connsiteY1"/>
+              </a:cxn>
+              <a:cxn ang="0">
+                <a:pos x="connsiteX2" y="connsiteY2"/>
+              </a:cxn>
+              <a:cxn ang="0">
+                <a:pos x="connsiteX3" y="connsiteY3"/>
+              </a:cxn>
+              <a:cxn ang="0">
+                <a:pos x="connsiteX4" y="connsiteY4"/>
+              </a:cxn>
+              <a:cxn ang="0">
+                <a:pos x="connsiteX5" y="connsiteY5"/>
+              </a:cxn>
+              <a:cxn ang="0">
+                <a:pos x="connsiteX6" y="connsiteY6"/>
+              </a:cxn>
+              <a:cxn ang="0">
+                <a:pos x="connsiteX7" y="connsiteY7"/>
+              </a:cxn>
+              <a:cxn ang="0">
+                <a:pos x="connsiteX8" y="connsiteY8"/>
+              </a:cxn>
+              <a:cxn ang="0">
+                <a:pos x="connsiteX9" y="connsiteY9"/>
+              </a:cxn>
+              <a:cxn ang="0">
+                <a:pos x="connsiteX10" y="connsiteY10"/>
+              </a:cxn>
+              <a:cxn ang="0">
+                <a:pos x="connsiteX11" y="connsiteY11"/>
+              </a:cxn>
+              <a:cxn ang="0">
+                <a:pos x="connsiteX12" y="connsiteY12"/>
+              </a:cxn>
+              <a:cxn ang="0">
+                <a:pos x="connsiteX13" y="connsiteY13"/>
+              </a:cxn>
+              <a:cxn ang="0">
+                <a:pos x="connsiteX14" y="connsiteY14"/>
+              </a:cxn>
+              <a:cxn ang="0">
+                <a:pos x="connsiteX15" y="connsiteY15"/>
+              </a:cxn>
+              <a:cxn ang="0">
+                <a:pos x="connsiteX16" y="connsiteY16"/>
+              </a:cxn>
+              <a:cxn ang="0">
+                <a:pos x="connsiteX17" y="connsiteY17"/>
+              </a:cxn>
+              <a:cxn ang="0">
+                <a:pos x="connsiteX18" y="connsiteY18"/>
+              </a:cxn>
+              <a:cxn ang="0">
+                <a:pos x="connsiteX19" y="connsiteY19"/>
+              </a:cxn>
+              <a:cxn ang="0">
+                <a:pos x="connsiteX20" y="connsiteY20"/>
+              </a:cxn>
+              <a:cxn ang="0">
+                <a:pos x="connsiteX21" y="connsiteY21"/>
+              </a:cxn>
+              <a:cxn ang="0">
+                <a:pos x="connsiteX22" y="connsiteY22"/>
+              </a:cxn>
+              <a:cxn ang="0">
+                <a:pos x="connsiteX23" y="connsiteY23"/>
+              </a:cxn>
+              <a:cxn ang="0">
+                <a:pos x="connsiteX24" y="connsiteY24"/>
+              </a:cxn>
+              <a:cxn ang="0">
+                <a:pos x="connsiteX25" y="connsiteY25"/>
+              </a:cxn>
+              <a:cxn ang="0">
+                <a:pos x="connsiteX26" y="connsiteY26"/>
+              </a:cxn>
+              <a:cxn ang="0">
+                <a:pos x="connsiteX27" y="connsiteY27"/>
+              </a:cxn>
+            </a:cxnLst>
+            <a:rect l="l" t="t" r="r" b="b"/>
+            <a:pathLst>
+              <a:path w="1219200" h="911820">
+                <a:moveTo>
+                  <a:pt x="0" y="911820"/>
+                </a:moveTo>
+                <a:cubicBezTo>
+                  <a:pt x="45224" y="906554"/>
+                  <a:pt x="90449" y="901289"/>
+                  <a:pt x="133815" y="889518"/>
+                </a:cubicBezTo>
+                <a:cubicBezTo>
+                  <a:pt x="177181" y="877747"/>
+                  <a:pt x="227980" y="856684"/>
+                  <a:pt x="260195" y="841196"/>
+                </a:cubicBezTo>
+                <a:cubicBezTo>
+                  <a:pt x="292410" y="825708"/>
+                  <a:pt x="307279" y="812698"/>
+                  <a:pt x="327103" y="796591"/>
+                </a:cubicBezTo>
+                <a:cubicBezTo>
+                  <a:pt x="346927" y="780484"/>
+                  <a:pt x="361176" y="766235"/>
+                  <a:pt x="379142" y="744552"/>
+                </a:cubicBezTo>
+                <a:cubicBezTo>
+                  <a:pt x="397108" y="722869"/>
+                  <a:pt x="418791" y="692512"/>
+                  <a:pt x="434898" y="666493"/>
+                </a:cubicBezTo>
+                <a:cubicBezTo>
+                  <a:pt x="451005" y="640474"/>
+                  <a:pt x="467112" y="610118"/>
+                  <a:pt x="475785" y="588435"/>
+                </a:cubicBezTo>
+                <a:cubicBezTo>
+                  <a:pt x="484458" y="566752"/>
+                  <a:pt x="478883" y="572947"/>
+                  <a:pt x="486937" y="536396"/>
+                </a:cubicBezTo>
+                <a:cubicBezTo>
+                  <a:pt x="494991" y="499845"/>
+                  <a:pt x="513575" y="416211"/>
+                  <a:pt x="524107" y="369128"/>
+                </a:cubicBezTo>
+                <a:cubicBezTo>
+                  <a:pt x="534639" y="322045"/>
+                  <a:pt x="540834" y="296644"/>
+                  <a:pt x="550127" y="253898"/>
+                </a:cubicBezTo>
+                <a:cubicBezTo>
+                  <a:pt x="559420" y="211152"/>
+                  <a:pt x="571809" y="146104"/>
+                  <a:pt x="579863" y="112650"/>
+                </a:cubicBezTo>
+                <a:cubicBezTo>
+                  <a:pt x="587917" y="79196"/>
+                  <a:pt x="592254" y="69283"/>
+                  <a:pt x="598449" y="53176"/>
+                </a:cubicBezTo>
+                <a:cubicBezTo>
+                  <a:pt x="604644" y="37069"/>
+                  <a:pt x="617034" y="16006"/>
+                  <a:pt x="617034" y="16006"/>
+                </a:cubicBezTo>
+                <a:cubicBezTo>
+                  <a:pt x="623229" y="8572"/>
+                  <a:pt x="625708" y="11049"/>
+                  <a:pt x="635620" y="8571"/>
+                </a:cubicBezTo>
+                <a:cubicBezTo>
+                  <a:pt x="645532" y="6093"/>
+                  <a:pt x="661019" y="-3200"/>
+                  <a:pt x="676507" y="1137"/>
+                </a:cubicBezTo>
+                <a:cubicBezTo>
+                  <a:pt x="691995" y="5474"/>
+                  <a:pt x="716775" y="12289"/>
+                  <a:pt x="728546" y="34591"/>
+                </a:cubicBezTo>
+                <a:cubicBezTo>
+                  <a:pt x="740317" y="56893"/>
+                  <a:pt x="740937" y="102737"/>
+                  <a:pt x="747132" y="134952"/>
+                </a:cubicBezTo>
+                <a:cubicBezTo>
+                  <a:pt x="753327" y="167167"/>
+                  <a:pt x="760142" y="190708"/>
+                  <a:pt x="765717" y="227879"/>
+                </a:cubicBezTo>
+                <a:cubicBezTo>
+                  <a:pt x="771292" y="265050"/>
+                  <a:pt x="774390" y="317088"/>
+                  <a:pt x="780585" y="357976"/>
+                </a:cubicBezTo>
+                <a:cubicBezTo>
+                  <a:pt x="786780" y="398864"/>
+                  <a:pt x="796073" y="435416"/>
+                  <a:pt x="802888" y="473206"/>
+                </a:cubicBezTo>
+                <a:cubicBezTo>
+                  <a:pt x="809703" y="510996"/>
+                  <a:pt x="810941" y="553123"/>
+                  <a:pt x="821473" y="584718"/>
+                </a:cubicBezTo>
+                <a:cubicBezTo>
+                  <a:pt x="832005" y="616313"/>
+                  <a:pt x="851210" y="637996"/>
+                  <a:pt x="866078" y="662776"/>
+                </a:cubicBezTo>
+                <a:cubicBezTo>
+                  <a:pt x="880946" y="687556"/>
+                  <a:pt x="892717" y="712957"/>
+                  <a:pt x="910683" y="733401"/>
+                </a:cubicBezTo>
+                <a:cubicBezTo>
+                  <a:pt x="928649" y="753845"/>
+                  <a:pt x="957146" y="770572"/>
+                  <a:pt x="973873" y="785440"/>
+                </a:cubicBezTo>
+                <a:cubicBezTo>
+                  <a:pt x="990600" y="800308"/>
+                  <a:pt x="988122" y="808361"/>
+                  <a:pt x="1011044" y="822610"/>
+                </a:cubicBezTo>
+                <a:cubicBezTo>
+                  <a:pt x="1033966" y="836859"/>
+                  <a:pt x="1085386" y="859781"/>
+                  <a:pt x="1111405" y="870932"/>
+                </a:cubicBezTo>
+                <a:cubicBezTo>
+                  <a:pt x="1137424" y="882083"/>
+                  <a:pt x="1149195" y="884562"/>
+                  <a:pt x="1167161" y="889518"/>
+                </a:cubicBezTo>
+                <a:cubicBezTo>
+                  <a:pt x="1185127" y="894474"/>
+                  <a:pt x="1202163" y="897571"/>
+                  <a:pt x="1219200" y="900669"/>
+                </a:cubicBezTo>
+              </a:path>
+            </a:pathLst>
+          </a:custGeom>
+          <a:noFill/>
+          <a:ln w="12700">
+            <a:solidFill>
+              <a:schemeClr val="accent2"/>
+            </a:solidFill>
+          </a:ln>
+        </p:spPr>
+        <p:style>
+          <a:lnRef idx="2">
+            <a:schemeClr val="accent1">
+              <a:shade val="15000"/>
+            </a:schemeClr>
+          </a:lnRef>
+          <a:fillRef idx="1">
+            <a:schemeClr val="accent1"/>
+          </a:fillRef>
+          <a:effectRef idx="0">
+            <a:schemeClr val="accent1"/>
+          </a:effectRef>
+          <a:fontRef idx="minor">
+            <a:schemeClr val="lt1"/>
+          </a:fontRef>
+        </p:style>
+        <p:txBody>
+          <a:bodyPr rtlCol="0" anchor="ctr"/>
+          <a:lstStyle/>
+          <a:p>
+            <a:pPr algn="ctr"/>
+            <a:endParaRPr lang="en-US"/>
+          </a:p>
+        </p:txBody>
+      </p:sp>
+      <p:sp>
+        <p:nvSpPr>
+          <p:cNvPr id="12" name="Freeform 11">
+            <a:extLst>
+              <a:ext uri="{FF2B5EF4-FFF2-40B4-BE49-F238E27FC236}">
+                <a16:creationId xmlns:a16="http://schemas.microsoft.com/office/drawing/2014/main" id="{5B2F08F5-AFC5-C26A-4408-F33739D959FD}"/>
+              </a:ext>
+            </a:extLst>
+          </p:cNvPr>
+          <p:cNvSpPr/>
+          <p:nvPr/>
+        </p:nvSpPr>
+        <p:spPr>
+          <a:xfrm>
+            <a:off x="5229922" y="3796886"/>
+            <a:ext cx="1360449" cy="381104"/>
+          </a:xfrm>
+          <a:custGeom>
+            <a:avLst/>
+            <a:gdLst>
+              <a:gd name="connsiteX0" fmla="*/ 0 w 1360449"/>
+              <a:gd name="connsiteY0" fmla="*/ 381104 h 381104"/>
+              <a:gd name="connsiteX1" fmla="*/ 167268 w 1360449"/>
+              <a:gd name="connsiteY1" fmla="*/ 343934 h 381104"/>
+              <a:gd name="connsiteX2" fmla="*/ 226741 w 1360449"/>
+              <a:gd name="connsiteY2" fmla="*/ 321631 h 381104"/>
+              <a:gd name="connsiteX3" fmla="*/ 249044 w 1360449"/>
+              <a:gd name="connsiteY3" fmla="*/ 303046 h 381104"/>
+              <a:gd name="connsiteX4" fmla="*/ 304800 w 1360449"/>
+              <a:gd name="connsiteY4" fmla="*/ 243573 h 381104"/>
+              <a:gd name="connsiteX5" fmla="*/ 315951 w 1360449"/>
+              <a:gd name="connsiteY5" fmla="*/ 217553 h 381104"/>
+              <a:gd name="connsiteX6" fmla="*/ 360556 w 1360449"/>
+              <a:gd name="connsiteY6" fmla="*/ 165514 h 381104"/>
+              <a:gd name="connsiteX7" fmla="*/ 412595 w 1360449"/>
+              <a:gd name="connsiteY7" fmla="*/ 94890 h 381104"/>
+              <a:gd name="connsiteX8" fmla="*/ 509239 w 1360449"/>
+              <a:gd name="connsiteY8" fmla="*/ 31699 h 381104"/>
+              <a:gd name="connsiteX9" fmla="*/ 572429 w 1360449"/>
+              <a:gd name="connsiteY9" fmla="*/ 9397 h 381104"/>
+              <a:gd name="connsiteX10" fmla="*/ 620751 w 1360449"/>
+              <a:gd name="connsiteY10" fmla="*/ 1963 h 381104"/>
+              <a:gd name="connsiteX11" fmla="*/ 698810 w 1360449"/>
+              <a:gd name="connsiteY11" fmla="*/ 1963 h 381104"/>
+              <a:gd name="connsiteX12" fmla="*/ 788019 w 1360449"/>
+              <a:gd name="connsiteY12" fmla="*/ 24265 h 381104"/>
+              <a:gd name="connsiteX13" fmla="*/ 843776 w 1360449"/>
+              <a:gd name="connsiteY13" fmla="*/ 54002 h 381104"/>
+              <a:gd name="connsiteX14" fmla="*/ 914400 w 1360449"/>
+              <a:gd name="connsiteY14" fmla="*/ 94890 h 381104"/>
+              <a:gd name="connsiteX15" fmla="*/ 947854 w 1360449"/>
+              <a:gd name="connsiteY15" fmla="*/ 132060 h 381104"/>
+              <a:gd name="connsiteX16" fmla="*/ 1011044 w 1360449"/>
+              <a:gd name="connsiteY16" fmla="*/ 206402 h 381104"/>
+              <a:gd name="connsiteX17" fmla="*/ 1040780 w 1360449"/>
+              <a:gd name="connsiteY17" fmla="*/ 258441 h 381104"/>
+              <a:gd name="connsiteX18" fmla="*/ 1074234 w 1360449"/>
+              <a:gd name="connsiteY18" fmla="*/ 295612 h 381104"/>
+              <a:gd name="connsiteX19" fmla="*/ 1122556 w 1360449"/>
+              <a:gd name="connsiteY19" fmla="*/ 329065 h 381104"/>
+              <a:gd name="connsiteX20" fmla="*/ 1152293 w 1360449"/>
+              <a:gd name="connsiteY20" fmla="*/ 336499 h 381104"/>
+              <a:gd name="connsiteX21" fmla="*/ 1182029 w 1360449"/>
+              <a:gd name="connsiteY21" fmla="*/ 351368 h 381104"/>
+              <a:gd name="connsiteX22" fmla="*/ 1252654 w 1360449"/>
+              <a:gd name="connsiteY22" fmla="*/ 366236 h 381104"/>
+              <a:gd name="connsiteX23" fmla="*/ 1315844 w 1360449"/>
+              <a:gd name="connsiteY23" fmla="*/ 373670 h 381104"/>
+              <a:gd name="connsiteX24" fmla="*/ 1360449 w 1360449"/>
+              <a:gd name="connsiteY24" fmla="*/ 381104 h 381104"/>
+            </a:gdLst>
+            <a:ahLst/>
+            <a:cxnLst>
+              <a:cxn ang="0">
+                <a:pos x="connsiteX0" y="connsiteY0"/>
+              </a:cxn>
+              <a:cxn ang="0">
+                <a:pos x="connsiteX1" y="connsiteY1"/>
+              </a:cxn>
+              <a:cxn ang="0">
+                <a:pos x="connsiteX2" y="connsiteY2"/>
+              </a:cxn>
+              <a:cxn ang="0">
+                <a:pos x="connsiteX3" y="connsiteY3"/>
+              </a:cxn>
+              <a:cxn ang="0">
+                <a:pos x="connsiteX4" y="connsiteY4"/>
+              </a:cxn>
+              <a:cxn ang="0">
+                <a:pos x="connsiteX5" y="connsiteY5"/>
+              </a:cxn>
+              <a:cxn ang="0">
+                <a:pos x="connsiteX6" y="connsiteY6"/>
+              </a:cxn>
+              <a:cxn ang="0">
+                <a:pos x="connsiteX7" y="connsiteY7"/>
+              </a:cxn>
+              <a:cxn ang="0">
+                <a:pos x="connsiteX8" y="connsiteY8"/>
+              </a:cxn>
+              <a:cxn ang="0">
+                <a:pos x="connsiteX9" y="connsiteY9"/>
+              </a:cxn>
+              <a:cxn ang="0">
+                <a:pos x="connsiteX10" y="connsiteY10"/>
+              </a:cxn>
+              <a:cxn ang="0">
+                <a:pos x="connsiteX11" y="connsiteY11"/>
+              </a:cxn>
+              <a:cxn ang="0">
+                <a:pos x="connsiteX12" y="connsiteY12"/>
+              </a:cxn>
+              <a:cxn ang="0">
+                <a:pos x="connsiteX13" y="connsiteY13"/>
+              </a:cxn>
+              <a:cxn ang="0">
+                <a:pos x="connsiteX14" y="connsiteY14"/>
+              </a:cxn>
+              <a:cxn ang="0">
+                <a:pos x="connsiteX15" y="connsiteY15"/>
+              </a:cxn>
+              <a:cxn ang="0">
+                <a:pos x="connsiteX16" y="connsiteY16"/>
+              </a:cxn>
+              <a:cxn ang="0">
+                <a:pos x="connsiteX17" y="connsiteY17"/>
+              </a:cxn>
+              <a:cxn ang="0">
+                <a:pos x="connsiteX18" y="connsiteY18"/>
+              </a:cxn>
+              <a:cxn ang="0">
+                <a:pos x="connsiteX19" y="connsiteY19"/>
+              </a:cxn>
+              <a:cxn ang="0">
+                <a:pos x="connsiteX20" y="connsiteY20"/>
+              </a:cxn>
+              <a:cxn ang="0">
+                <a:pos x="connsiteX21" y="connsiteY21"/>
+              </a:cxn>
+              <a:cxn ang="0">
+                <a:pos x="connsiteX22" y="connsiteY22"/>
+              </a:cxn>
+              <a:cxn ang="0">
+                <a:pos x="connsiteX23" y="connsiteY23"/>
+              </a:cxn>
+              <a:cxn ang="0">
+                <a:pos x="connsiteX24" y="connsiteY24"/>
+              </a:cxn>
+            </a:cxnLst>
+            <a:rect l="l" t="t" r="r" b="b"/>
+            <a:pathLst>
+              <a:path w="1360449" h="381104">
+                <a:moveTo>
+                  <a:pt x="0" y="381104"/>
+                </a:moveTo>
+                <a:cubicBezTo>
+                  <a:pt x="64739" y="367475"/>
+                  <a:pt x="129478" y="353846"/>
+                  <a:pt x="167268" y="343934"/>
+                </a:cubicBezTo>
+                <a:cubicBezTo>
+                  <a:pt x="205058" y="334022"/>
+                  <a:pt x="226741" y="321631"/>
+                  <a:pt x="226741" y="321631"/>
+                </a:cubicBezTo>
+                <a:cubicBezTo>
+                  <a:pt x="240370" y="314816"/>
+                  <a:pt x="236034" y="316056"/>
+                  <a:pt x="249044" y="303046"/>
+                </a:cubicBezTo>
+                <a:cubicBezTo>
+                  <a:pt x="262054" y="290036"/>
+                  <a:pt x="293649" y="257822"/>
+                  <a:pt x="304800" y="243573"/>
+                </a:cubicBezTo>
+                <a:cubicBezTo>
+                  <a:pt x="315951" y="229324"/>
+                  <a:pt x="306658" y="230563"/>
+                  <a:pt x="315951" y="217553"/>
+                </a:cubicBezTo>
+                <a:cubicBezTo>
+                  <a:pt x="325244" y="204543"/>
+                  <a:pt x="344449" y="185958"/>
+                  <a:pt x="360556" y="165514"/>
+                </a:cubicBezTo>
+                <a:cubicBezTo>
+                  <a:pt x="376663" y="145070"/>
+                  <a:pt x="387815" y="117192"/>
+                  <a:pt x="412595" y="94890"/>
+                </a:cubicBezTo>
+                <a:cubicBezTo>
+                  <a:pt x="437375" y="72588"/>
+                  <a:pt x="482600" y="45948"/>
+                  <a:pt x="509239" y="31699"/>
+                </a:cubicBezTo>
+                <a:cubicBezTo>
+                  <a:pt x="535878" y="17450"/>
+                  <a:pt x="553844" y="14353"/>
+                  <a:pt x="572429" y="9397"/>
+                </a:cubicBezTo>
+                <a:cubicBezTo>
+                  <a:pt x="591014" y="4441"/>
+                  <a:pt x="599688" y="3202"/>
+                  <a:pt x="620751" y="1963"/>
+                </a:cubicBezTo>
+                <a:cubicBezTo>
+                  <a:pt x="641814" y="724"/>
+                  <a:pt x="670932" y="-1754"/>
+                  <a:pt x="698810" y="1963"/>
+                </a:cubicBezTo>
+                <a:cubicBezTo>
+                  <a:pt x="726688" y="5680"/>
+                  <a:pt x="763858" y="15592"/>
+                  <a:pt x="788019" y="24265"/>
+                </a:cubicBezTo>
+                <a:cubicBezTo>
+                  <a:pt x="812180" y="32938"/>
+                  <a:pt x="822713" y="42231"/>
+                  <a:pt x="843776" y="54002"/>
+                </a:cubicBezTo>
+                <a:cubicBezTo>
+                  <a:pt x="864839" y="65773"/>
+                  <a:pt x="897054" y="81880"/>
+                  <a:pt x="914400" y="94890"/>
+                </a:cubicBezTo>
+                <a:cubicBezTo>
+                  <a:pt x="931746" y="107900"/>
+                  <a:pt x="931747" y="113475"/>
+                  <a:pt x="947854" y="132060"/>
+                </a:cubicBezTo>
+                <a:cubicBezTo>
+                  <a:pt x="963961" y="150645"/>
+                  <a:pt x="995556" y="185338"/>
+                  <a:pt x="1011044" y="206402"/>
+                </a:cubicBezTo>
+                <a:cubicBezTo>
+                  <a:pt x="1026532" y="227465"/>
+                  <a:pt x="1030248" y="243573"/>
+                  <a:pt x="1040780" y="258441"/>
+                </a:cubicBezTo>
+                <a:cubicBezTo>
+                  <a:pt x="1051312" y="273309"/>
+                  <a:pt x="1060605" y="283841"/>
+                  <a:pt x="1074234" y="295612"/>
+                </a:cubicBezTo>
+                <a:cubicBezTo>
+                  <a:pt x="1087863" y="307383"/>
+                  <a:pt x="1109546" y="322251"/>
+                  <a:pt x="1122556" y="329065"/>
+                </a:cubicBezTo>
+                <a:cubicBezTo>
+                  <a:pt x="1135566" y="335879"/>
+                  <a:pt x="1142381" y="332782"/>
+                  <a:pt x="1152293" y="336499"/>
+                </a:cubicBezTo>
+                <a:cubicBezTo>
+                  <a:pt x="1162205" y="340216"/>
+                  <a:pt x="1165302" y="346412"/>
+                  <a:pt x="1182029" y="351368"/>
+                </a:cubicBezTo>
+                <a:cubicBezTo>
+                  <a:pt x="1198756" y="356324"/>
+                  <a:pt x="1230352" y="362519"/>
+                  <a:pt x="1252654" y="366236"/>
+                </a:cubicBezTo>
+                <a:cubicBezTo>
+                  <a:pt x="1274956" y="369953"/>
+                  <a:pt x="1297878" y="371192"/>
+                  <a:pt x="1315844" y="373670"/>
+                </a:cubicBezTo>
+                <a:cubicBezTo>
+                  <a:pt x="1333810" y="376148"/>
+                  <a:pt x="1347129" y="378626"/>
+                  <a:pt x="1360449" y="381104"/>
+                </a:cubicBezTo>
+              </a:path>
+            </a:pathLst>
+          </a:custGeom>
+          <a:noFill/>
+          <a:ln w="12700">
+            <a:solidFill>
+              <a:schemeClr val="accent5"/>
+            </a:solidFill>
+          </a:ln>
+        </p:spPr>
+        <p:style>
+          <a:lnRef idx="2">
+            <a:schemeClr val="accent1">
+              <a:shade val="15000"/>
+            </a:schemeClr>
+          </a:lnRef>
+          <a:fillRef idx="1">
+            <a:schemeClr val="accent1"/>
+          </a:fillRef>
+          <a:effectRef idx="0">
+            <a:schemeClr val="accent1"/>
+          </a:effectRef>
+          <a:fontRef idx="minor">
+            <a:schemeClr val="lt1"/>
+          </a:fontRef>
+        </p:style>
+        <p:txBody>
+          <a:bodyPr rtlCol="0" anchor="ctr"/>
+          <a:lstStyle/>
+          <a:p>
+            <a:pPr algn="ctr"/>
+            <a:endParaRPr lang="en-US"/>
+          </a:p>
+        </p:txBody>
+      </p:sp>
+      <mc:AlternateContent xmlns:mc="http://schemas.openxmlformats.org/markup-compatibility/2006">
+        <mc:Choice xmlns:p14="http://schemas.microsoft.com/office/powerpoint/2010/main" Requires="p14">
+          <p:contentPart p14:bwMode="auto" r:id="rId2">
+            <p14:nvContentPartPr>
+              <p14:cNvPr id="13" name="Ink 12">
+                <a:extLst>
+                  <a:ext uri="{FF2B5EF4-FFF2-40B4-BE49-F238E27FC236}">
+                    <a16:creationId xmlns:a16="http://schemas.microsoft.com/office/drawing/2014/main" id="{8618A8A1-4324-6057-2D0B-1B563A28A6D6}"/>
+                  </a:ext>
+                </a:extLst>
+              </p14:cNvPr>
+              <p14:cNvContentPartPr/>
+              <p14:nvPr/>
+            </p14:nvContentPartPr>
+            <p14:xfrm>
+              <a:off x="5765855" y="4119910"/>
+              <a:ext cx="133920" cy="53640"/>
+            </p14:xfrm>
+          </p:contentPart>
+        </mc:Choice>
+        <mc:Fallback>
+          <p:pic>
+            <p:nvPicPr>
+              <p:cNvPr id="13" name="Ink 12">
+                <a:extLst>
+                  <a:ext uri="{FF2B5EF4-FFF2-40B4-BE49-F238E27FC236}">
+                    <a16:creationId xmlns:a16="http://schemas.microsoft.com/office/drawing/2014/main" id="{8618A8A1-4324-6057-2D0B-1B563A28A6D6}"/>
+                  </a:ext>
+                </a:extLst>
+              </p:cNvPr>
+              <p:cNvPicPr/>
+              <p:nvPr/>
+            </p:nvPicPr>
+            <p:blipFill>
+              <a:blip r:embed="rId3"/>
+              <a:stretch>
+                <a:fillRect/>
+              </a:stretch>
+            </p:blipFill>
+            <p:spPr>
+              <a:xfrm>
+                <a:off x="5757215" y="4110910"/>
+                <a:ext cx="151560" cy="71280"/>
+              </a:xfrm>
+              <a:prstGeom prst="rect">
+                <a:avLst/>
+              </a:prstGeom>
+            </p:spPr>
+          </p:pic>
+        </mc:Fallback>
+      </mc:AlternateContent>
+      <mc:AlternateContent xmlns:mc="http://schemas.openxmlformats.org/markup-compatibility/2006">
+        <mc:Choice xmlns:p14="http://schemas.microsoft.com/office/powerpoint/2010/main" Requires="p14">
+          <p:contentPart p14:bwMode="auto" r:id="rId4">
+            <p14:nvContentPartPr>
+              <p14:cNvPr id="14" name="Ink 13">
+                <a:extLst>
+                  <a:ext uri="{FF2B5EF4-FFF2-40B4-BE49-F238E27FC236}">
+                    <a16:creationId xmlns:a16="http://schemas.microsoft.com/office/drawing/2014/main" id="{39C9C4CF-7BF9-94F6-2315-A27E5945B9AE}"/>
+                  </a:ext>
+                </a:extLst>
+              </p14:cNvPr>
+              <p14:cNvContentPartPr/>
+              <p14:nvPr/>
+            </p14:nvContentPartPr>
+            <p14:xfrm>
+              <a:off x="5410895" y="3980950"/>
+              <a:ext cx="192240" cy="187920"/>
+            </p14:xfrm>
+          </p:contentPart>
+        </mc:Choice>
+        <mc:Fallback>
+          <p:pic>
+            <p:nvPicPr>
+              <p:cNvPr id="14" name="Ink 13">
+                <a:extLst>
+                  <a:ext uri="{FF2B5EF4-FFF2-40B4-BE49-F238E27FC236}">
+                    <a16:creationId xmlns:a16="http://schemas.microsoft.com/office/drawing/2014/main" id="{39C9C4CF-7BF9-94F6-2315-A27E5945B9AE}"/>
+                  </a:ext>
+                </a:extLst>
+              </p:cNvPr>
+              <p:cNvPicPr/>
+              <p:nvPr/>
+            </p:nvPicPr>
+            <p:blipFill>
+              <a:blip r:embed="rId5"/>
+              <a:stretch>
+                <a:fillRect/>
+              </a:stretch>
+            </p:blipFill>
+            <p:spPr>
+              <a:xfrm>
+                <a:off x="5401895" y="3971950"/>
+                <a:ext cx="209880" cy="205560"/>
+              </a:xfrm>
+              <a:prstGeom prst="rect">
+                <a:avLst/>
+              </a:prstGeom>
+            </p:spPr>
+          </p:pic>
+        </mc:Fallback>
+      </mc:AlternateContent>
+      <mc:AlternateContent xmlns:mc="http://schemas.openxmlformats.org/markup-compatibility/2006">
+        <mc:Choice xmlns:p14="http://schemas.microsoft.com/office/powerpoint/2010/main" Requires="p14">
+          <p:contentPart p14:bwMode="auto" r:id="rId6">
+            <p14:nvContentPartPr>
+              <p14:cNvPr id="15" name="Ink 14">
+                <a:extLst>
+                  <a:ext uri="{FF2B5EF4-FFF2-40B4-BE49-F238E27FC236}">
+                    <a16:creationId xmlns:a16="http://schemas.microsoft.com/office/drawing/2014/main" id="{FA91CDB5-B051-EAC6-EEFF-84DF9F2146D1}"/>
+                  </a:ext>
+                </a:extLst>
+              </p14:cNvPr>
+              <p14:cNvContentPartPr/>
+              <p14:nvPr/>
+            </p14:nvContentPartPr>
+            <p14:xfrm>
+              <a:off x="5330615" y="3967990"/>
+              <a:ext cx="380160" cy="205560"/>
+            </p14:xfrm>
+          </p:contentPart>
+        </mc:Choice>
+        <mc:Fallback>
+          <p:pic>
+            <p:nvPicPr>
+              <p:cNvPr id="15" name="Ink 14">
+                <a:extLst>
+                  <a:ext uri="{FF2B5EF4-FFF2-40B4-BE49-F238E27FC236}">
+                    <a16:creationId xmlns:a16="http://schemas.microsoft.com/office/drawing/2014/main" id="{FA91CDB5-B051-EAC6-EEFF-84DF9F2146D1}"/>
+                  </a:ext>
+                </a:extLst>
+              </p:cNvPr>
+              <p:cNvPicPr/>
+              <p:nvPr/>
+            </p:nvPicPr>
+            <p:blipFill>
+              <a:blip r:embed="rId7"/>
+              <a:stretch>
+                <a:fillRect/>
+              </a:stretch>
+            </p:blipFill>
+            <p:spPr>
+              <a:xfrm>
+                <a:off x="5321615" y="3958990"/>
+                <a:ext cx="397800" cy="223200"/>
+              </a:xfrm>
+              <a:prstGeom prst="rect">
+                <a:avLst/>
+              </a:prstGeom>
+            </p:spPr>
+          </p:pic>
+        </mc:Fallback>
+      </mc:AlternateContent>
+      <mc:AlternateContent xmlns:mc="http://schemas.openxmlformats.org/markup-compatibility/2006">
+        <mc:Choice xmlns:p14="http://schemas.microsoft.com/office/powerpoint/2010/main" Requires="p14">
+          <p:contentPart p14:bwMode="auto" r:id="rId8">
+            <p14:nvContentPartPr>
+              <p14:cNvPr id="16" name="Ink 15">
+                <a:extLst>
+                  <a:ext uri="{FF2B5EF4-FFF2-40B4-BE49-F238E27FC236}">
+                    <a16:creationId xmlns:a16="http://schemas.microsoft.com/office/drawing/2014/main" id="{A6E6E6DD-B4AB-85BD-6C91-65D28EBF6FFD}"/>
+                  </a:ext>
+                </a:extLst>
+              </p14:cNvPr>
+              <p14:cNvContentPartPr/>
+              <p14:nvPr/>
+            </p14:nvContentPartPr>
+            <p14:xfrm>
+              <a:off x="5458415" y="4027030"/>
+              <a:ext cx="286200" cy="134280"/>
+            </p14:xfrm>
+          </p:contentPart>
+        </mc:Choice>
+        <mc:Fallback>
+          <p:pic>
+            <p:nvPicPr>
+              <p:cNvPr id="16" name="Ink 15">
+                <a:extLst>
+                  <a:ext uri="{FF2B5EF4-FFF2-40B4-BE49-F238E27FC236}">
+                    <a16:creationId xmlns:a16="http://schemas.microsoft.com/office/drawing/2014/main" id="{A6E6E6DD-B4AB-85BD-6C91-65D28EBF6FFD}"/>
+                  </a:ext>
+                </a:extLst>
+              </p:cNvPr>
+              <p:cNvPicPr/>
+              <p:nvPr/>
+            </p:nvPicPr>
+            <p:blipFill>
+              <a:blip r:embed="rId9"/>
+              <a:stretch>
+                <a:fillRect/>
+              </a:stretch>
+            </p:blipFill>
+            <p:spPr>
+              <a:xfrm>
+                <a:off x="5449775" y="4018390"/>
+                <a:ext cx="303840" cy="151920"/>
+              </a:xfrm>
+              <a:prstGeom prst="rect">
+                <a:avLst/>
+              </a:prstGeom>
+            </p:spPr>
+          </p:pic>
+        </mc:Fallback>
+      </mc:AlternateContent>
+      <mc:AlternateContent xmlns:mc="http://schemas.openxmlformats.org/markup-compatibility/2006">
+        <mc:Choice xmlns:p14="http://schemas.microsoft.com/office/powerpoint/2010/main" Requires="p14">
+          <p:contentPart p14:bwMode="auto" r:id="rId10">
+            <p14:nvContentPartPr>
+              <p14:cNvPr id="17" name="Ink 16">
+                <a:extLst>
+                  <a:ext uri="{FF2B5EF4-FFF2-40B4-BE49-F238E27FC236}">
+                    <a16:creationId xmlns:a16="http://schemas.microsoft.com/office/drawing/2014/main" id="{1B2FFCDE-5C4F-92C8-27CF-40660F8F8C87}"/>
+                  </a:ext>
+                </a:extLst>
+              </p14:cNvPr>
+              <p14:cNvContentPartPr/>
+              <p14:nvPr/>
+            </p14:nvContentPartPr>
+            <p14:xfrm>
+              <a:off x="5626175" y="3844870"/>
+              <a:ext cx="120240" cy="221400"/>
+            </p14:xfrm>
+          </p:contentPart>
+        </mc:Choice>
+        <mc:Fallback>
+          <p:pic>
+            <p:nvPicPr>
+              <p:cNvPr id="17" name="Ink 16">
+                <a:extLst>
+                  <a:ext uri="{FF2B5EF4-FFF2-40B4-BE49-F238E27FC236}">
+                    <a16:creationId xmlns:a16="http://schemas.microsoft.com/office/drawing/2014/main" id="{1B2FFCDE-5C4F-92C8-27CF-40660F8F8C87}"/>
+                  </a:ext>
+                </a:extLst>
+              </p:cNvPr>
+              <p:cNvPicPr/>
+              <p:nvPr/>
+            </p:nvPicPr>
+            <p:blipFill>
+              <a:blip r:embed="rId11"/>
+              <a:stretch>
+                <a:fillRect/>
+              </a:stretch>
+            </p:blipFill>
+            <p:spPr>
+              <a:xfrm>
+                <a:off x="5617175" y="3835870"/>
+                <a:ext cx="137880" cy="239040"/>
+              </a:xfrm>
+              <a:prstGeom prst="rect">
+                <a:avLst/>
+              </a:prstGeom>
+            </p:spPr>
+          </p:pic>
+        </mc:Fallback>
+      </mc:AlternateContent>
+      <p:cxnSp>
+        <p:nvCxnSpPr>
+          <p:cNvPr id="19" name="Straight Arrow Connector 18">
+            <a:extLst>
+              <a:ext uri="{FF2B5EF4-FFF2-40B4-BE49-F238E27FC236}">
+                <a16:creationId xmlns:a16="http://schemas.microsoft.com/office/drawing/2014/main" id="{B3969938-AE36-24A0-D9A0-B579CC517EC9}"/>
+              </a:ext>
+            </a:extLst>
+          </p:cNvPr>
+          <p:cNvCxnSpPr>
+            <a:cxnSpLocks/>
+          </p:cNvCxnSpPr>
+          <p:nvPr/>
+        </p:nvCxnSpPr>
+        <p:spPr>
+          <a:xfrm>
+            <a:off x="5601515" y="3590925"/>
+            <a:ext cx="0" cy="331180"/>
+          </a:xfrm>
+          <a:prstGeom prst="straightConnector1">
+            <a:avLst/>
+          </a:prstGeom>
+          <a:ln w="6350">
+            <a:prstDash val="dash"/>
+            <a:tailEnd type="triangle" w="sm" len="sm"/>
+          </a:ln>
+        </p:spPr>
+        <p:style>
+          <a:lnRef idx="2">
+            <a:schemeClr val="accent1"/>
+          </a:lnRef>
+          <a:fillRef idx="0">
+            <a:schemeClr val="accent1"/>
+          </a:fillRef>
+          <a:effectRef idx="1">
+            <a:schemeClr val="accent1"/>
+          </a:effectRef>
+          <a:fontRef idx="minor">
+            <a:schemeClr val="tx1"/>
+          </a:fontRef>
+        </p:style>
+      </p:cxnSp>
+    </p:spTree>
+    <p:extLst>
+      <p:ext uri="{BB962C8B-B14F-4D97-AF65-F5344CB8AC3E}">
+        <p14:creationId xmlns:p14="http://schemas.microsoft.com/office/powerpoint/2010/main" val="905118588"/>
       </p:ext>
     </p:extLst>
   </p:cSld>

--- a/docs/Attention_Figures.pptx
+++ b/docs/Attention_Figures.pptx
@@ -8209,1076 +8209,1887 @@
           <a:chExt cx="0" cy="0"/>
         </a:xfrm>
       </p:grpSpPr>
-      <p:cxnSp>
-        <p:nvCxnSpPr>
-          <p:cNvPr id="5" name="Straight Connector 4">
+      <p:grpSp>
+        <p:nvGrpSpPr>
+          <p:cNvPr id="34" name="Group 33">
             <a:extLst>
               <a:ext uri="{FF2B5EF4-FFF2-40B4-BE49-F238E27FC236}">
-                <a16:creationId xmlns:a16="http://schemas.microsoft.com/office/drawing/2014/main" id="{D8E765FA-AB64-8D67-EFE3-E75C3C26DCCF}"/>
+                <a16:creationId xmlns:a16="http://schemas.microsoft.com/office/drawing/2014/main" id="{E67EE5F7-C0D7-0D32-B91C-0111E378F942}"/>
               </a:ext>
             </a:extLst>
           </p:cNvPr>
-          <p:cNvCxnSpPr/>
+          <p:cNvGrpSpPr/>
           <p:nvPr/>
-        </p:nvCxnSpPr>
-        <p:spPr>
+        </p:nvGrpSpPr>
+        <p:grpSpPr>
           <a:xfrm>
             <a:off x="4594302" y="2449551"/>
-            <a:ext cx="0" cy="1728439"/>
+            <a:ext cx="2371613" cy="1917446"/>
+            <a:chOff x="4594302" y="2449551"/>
+            <a:chExt cx="2371613" cy="1917446"/>
           </a:xfrm>
-          <a:prstGeom prst="line">
-            <a:avLst/>
-          </a:prstGeom>
-          <a:ln>
-            <a:headEnd type="triangle"/>
-            <a:tailEnd type="none"/>
-          </a:ln>
-        </p:spPr>
-        <p:style>
-          <a:lnRef idx="2">
-            <a:schemeClr val="accent1"/>
-          </a:lnRef>
-          <a:fillRef idx="0">
-            <a:schemeClr val="accent1"/>
-          </a:fillRef>
-          <a:effectRef idx="1">
-            <a:schemeClr val="accent1"/>
-          </a:effectRef>
-          <a:fontRef idx="minor">
-            <a:schemeClr val="tx1"/>
-          </a:fontRef>
-        </p:style>
-      </p:cxnSp>
-      <p:cxnSp>
-        <p:nvCxnSpPr>
-          <p:cNvPr id="6" name="Straight Connector 5">
-            <a:extLst>
-              <a:ext uri="{FF2B5EF4-FFF2-40B4-BE49-F238E27FC236}">
-                <a16:creationId xmlns:a16="http://schemas.microsoft.com/office/drawing/2014/main" id="{45DE9FD6-EB7D-1F4E-6470-53968C5C4B2C}"/>
-              </a:ext>
-            </a:extLst>
-          </p:cNvPr>
-          <p:cNvCxnSpPr>
-            <a:cxnSpLocks/>
-          </p:cNvCxnSpPr>
-          <p:nvPr/>
-        </p:nvCxnSpPr>
-        <p:spPr>
-          <a:xfrm flipH="1">
-            <a:off x="4594302" y="4177990"/>
-            <a:ext cx="2352908" cy="0"/>
-          </a:xfrm>
-          <a:prstGeom prst="line">
-            <a:avLst/>
-          </a:prstGeom>
-          <a:ln>
-            <a:headEnd type="triangle"/>
-            <a:tailEnd type="none"/>
-          </a:ln>
-        </p:spPr>
-        <p:style>
-          <a:lnRef idx="2">
-            <a:schemeClr val="accent1"/>
-          </a:lnRef>
-          <a:fillRef idx="0">
-            <a:schemeClr val="accent1"/>
-          </a:fillRef>
-          <a:effectRef idx="1">
-            <a:schemeClr val="accent1"/>
-          </a:effectRef>
-          <a:fontRef idx="minor">
-            <a:schemeClr val="tx1"/>
-          </a:fontRef>
-        </p:style>
-      </p:cxnSp>
-      <p:cxnSp>
-        <p:nvCxnSpPr>
-          <p:cNvPr id="10" name="Straight Connector 9">
-            <a:extLst>
-              <a:ext uri="{FF2B5EF4-FFF2-40B4-BE49-F238E27FC236}">
-                <a16:creationId xmlns:a16="http://schemas.microsoft.com/office/drawing/2014/main" id="{042CC93E-DB1E-045D-E010-D36E20277009}"/>
-              </a:ext>
-            </a:extLst>
-          </p:cNvPr>
-          <p:cNvCxnSpPr>
-            <a:cxnSpLocks/>
-          </p:cNvCxnSpPr>
-          <p:nvPr/>
-        </p:nvCxnSpPr>
-        <p:spPr>
-          <a:xfrm flipV="1">
-            <a:off x="5754411" y="3124200"/>
-            <a:ext cx="8108" cy="1053790"/>
-          </a:xfrm>
-          <a:prstGeom prst="line">
-            <a:avLst/>
-          </a:prstGeom>
-          <a:ln w="9525">
-            <a:prstDash val="dash"/>
-          </a:ln>
-        </p:spPr>
-        <p:style>
-          <a:lnRef idx="2">
-            <a:schemeClr val="accent1"/>
-          </a:lnRef>
-          <a:fillRef idx="0">
-            <a:schemeClr val="accent1"/>
-          </a:fillRef>
-          <a:effectRef idx="1">
-            <a:schemeClr val="accent1"/>
-          </a:effectRef>
-          <a:fontRef idx="minor">
-            <a:schemeClr val="tx1"/>
-          </a:fontRef>
-        </p:style>
-      </p:cxnSp>
-      <p:sp>
-        <p:nvSpPr>
-          <p:cNvPr id="11" name="Freeform 10">
-            <a:extLst>
-              <a:ext uri="{FF2B5EF4-FFF2-40B4-BE49-F238E27FC236}">
-                <a16:creationId xmlns:a16="http://schemas.microsoft.com/office/drawing/2014/main" id="{ED4069DB-9E04-3BDA-2519-4FD81760ACFF}"/>
-              </a:ext>
-            </a:extLst>
-          </p:cNvPr>
-          <p:cNvSpPr/>
-          <p:nvPr/>
-        </p:nvSpPr>
-        <p:spPr>
-          <a:xfrm>
-            <a:off x="4728117" y="3266170"/>
-            <a:ext cx="1219200" cy="911820"/>
-          </a:xfrm>
-          <a:custGeom>
-            <a:avLst/>
-            <a:gdLst>
-              <a:gd name="connsiteX0" fmla="*/ 0 w 1219200"/>
-              <a:gd name="connsiteY0" fmla="*/ 911820 h 911820"/>
-              <a:gd name="connsiteX1" fmla="*/ 133815 w 1219200"/>
-              <a:gd name="connsiteY1" fmla="*/ 889518 h 911820"/>
-              <a:gd name="connsiteX2" fmla="*/ 260195 w 1219200"/>
-              <a:gd name="connsiteY2" fmla="*/ 841196 h 911820"/>
-              <a:gd name="connsiteX3" fmla="*/ 327103 w 1219200"/>
-              <a:gd name="connsiteY3" fmla="*/ 796591 h 911820"/>
-              <a:gd name="connsiteX4" fmla="*/ 379142 w 1219200"/>
-              <a:gd name="connsiteY4" fmla="*/ 744552 h 911820"/>
-              <a:gd name="connsiteX5" fmla="*/ 434898 w 1219200"/>
-              <a:gd name="connsiteY5" fmla="*/ 666493 h 911820"/>
-              <a:gd name="connsiteX6" fmla="*/ 475785 w 1219200"/>
-              <a:gd name="connsiteY6" fmla="*/ 588435 h 911820"/>
-              <a:gd name="connsiteX7" fmla="*/ 486937 w 1219200"/>
-              <a:gd name="connsiteY7" fmla="*/ 536396 h 911820"/>
-              <a:gd name="connsiteX8" fmla="*/ 524107 w 1219200"/>
-              <a:gd name="connsiteY8" fmla="*/ 369128 h 911820"/>
-              <a:gd name="connsiteX9" fmla="*/ 550127 w 1219200"/>
-              <a:gd name="connsiteY9" fmla="*/ 253898 h 911820"/>
-              <a:gd name="connsiteX10" fmla="*/ 579863 w 1219200"/>
-              <a:gd name="connsiteY10" fmla="*/ 112650 h 911820"/>
-              <a:gd name="connsiteX11" fmla="*/ 598449 w 1219200"/>
-              <a:gd name="connsiteY11" fmla="*/ 53176 h 911820"/>
-              <a:gd name="connsiteX12" fmla="*/ 617034 w 1219200"/>
-              <a:gd name="connsiteY12" fmla="*/ 16006 h 911820"/>
-              <a:gd name="connsiteX13" fmla="*/ 635620 w 1219200"/>
-              <a:gd name="connsiteY13" fmla="*/ 8571 h 911820"/>
-              <a:gd name="connsiteX14" fmla="*/ 676507 w 1219200"/>
-              <a:gd name="connsiteY14" fmla="*/ 1137 h 911820"/>
-              <a:gd name="connsiteX15" fmla="*/ 728546 w 1219200"/>
-              <a:gd name="connsiteY15" fmla="*/ 34591 h 911820"/>
-              <a:gd name="connsiteX16" fmla="*/ 747132 w 1219200"/>
-              <a:gd name="connsiteY16" fmla="*/ 134952 h 911820"/>
-              <a:gd name="connsiteX17" fmla="*/ 765717 w 1219200"/>
-              <a:gd name="connsiteY17" fmla="*/ 227879 h 911820"/>
-              <a:gd name="connsiteX18" fmla="*/ 780585 w 1219200"/>
-              <a:gd name="connsiteY18" fmla="*/ 357976 h 911820"/>
-              <a:gd name="connsiteX19" fmla="*/ 802888 w 1219200"/>
-              <a:gd name="connsiteY19" fmla="*/ 473206 h 911820"/>
-              <a:gd name="connsiteX20" fmla="*/ 821473 w 1219200"/>
-              <a:gd name="connsiteY20" fmla="*/ 584718 h 911820"/>
-              <a:gd name="connsiteX21" fmla="*/ 866078 w 1219200"/>
-              <a:gd name="connsiteY21" fmla="*/ 662776 h 911820"/>
-              <a:gd name="connsiteX22" fmla="*/ 910683 w 1219200"/>
-              <a:gd name="connsiteY22" fmla="*/ 733401 h 911820"/>
-              <a:gd name="connsiteX23" fmla="*/ 973873 w 1219200"/>
-              <a:gd name="connsiteY23" fmla="*/ 785440 h 911820"/>
-              <a:gd name="connsiteX24" fmla="*/ 1011044 w 1219200"/>
-              <a:gd name="connsiteY24" fmla="*/ 822610 h 911820"/>
-              <a:gd name="connsiteX25" fmla="*/ 1111405 w 1219200"/>
-              <a:gd name="connsiteY25" fmla="*/ 870932 h 911820"/>
-              <a:gd name="connsiteX26" fmla="*/ 1167161 w 1219200"/>
-              <a:gd name="connsiteY26" fmla="*/ 889518 h 911820"/>
-              <a:gd name="connsiteX27" fmla="*/ 1219200 w 1219200"/>
-              <a:gd name="connsiteY27" fmla="*/ 900669 h 911820"/>
-            </a:gdLst>
-            <a:ahLst/>
-            <a:cxnLst>
-              <a:cxn ang="0">
-                <a:pos x="connsiteX0" y="connsiteY0"/>
-              </a:cxn>
-              <a:cxn ang="0">
-                <a:pos x="connsiteX1" y="connsiteY1"/>
-              </a:cxn>
-              <a:cxn ang="0">
-                <a:pos x="connsiteX2" y="connsiteY2"/>
-              </a:cxn>
-              <a:cxn ang="0">
-                <a:pos x="connsiteX3" y="connsiteY3"/>
-              </a:cxn>
-              <a:cxn ang="0">
-                <a:pos x="connsiteX4" y="connsiteY4"/>
-              </a:cxn>
-              <a:cxn ang="0">
-                <a:pos x="connsiteX5" y="connsiteY5"/>
-              </a:cxn>
-              <a:cxn ang="0">
-                <a:pos x="connsiteX6" y="connsiteY6"/>
-              </a:cxn>
-              <a:cxn ang="0">
-                <a:pos x="connsiteX7" y="connsiteY7"/>
-              </a:cxn>
-              <a:cxn ang="0">
-                <a:pos x="connsiteX8" y="connsiteY8"/>
-              </a:cxn>
-              <a:cxn ang="0">
-                <a:pos x="connsiteX9" y="connsiteY9"/>
-              </a:cxn>
-              <a:cxn ang="0">
-                <a:pos x="connsiteX10" y="connsiteY10"/>
-              </a:cxn>
-              <a:cxn ang="0">
-                <a:pos x="connsiteX11" y="connsiteY11"/>
-              </a:cxn>
-              <a:cxn ang="0">
-                <a:pos x="connsiteX12" y="connsiteY12"/>
-              </a:cxn>
-              <a:cxn ang="0">
-                <a:pos x="connsiteX13" y="connsiteY13"/>
-              </a:cxn>
-              <a:cxn ang="0">
-                <a:pos x="connsiteX14" y="connsiteY14"/>
-              </a:cxn>
-              <a:cxn ang="0">
-                <a:pos x="connsiteX15" y="connsiteY15"/>
-              </a:cxn>
-              <a:cxn ang="0">
-                <a:pos x="connsiteX16" y="connsiteY16"/>
-              </a:cxn>
-              <a:cxn ang="0">
-                <a:pos x="connsiteX17" y="connsiteY17"/>
-              </a:cxn>
-              <a:cxn ang="0">
-                <a:pos x="connsiteX18" y="connsiteY18"/>
-              </a:cxn>
-              <a:cxn ang="0">
-                <a:pos x="connsiteX19" y="connsiteY19"/>
-              </a:cxn>
-              <a:cxn ang="0">
-                <a:pos x="connsiteX20" y="connsiteY20"/>
-              </a:cxn>
-              <a:cxn ang="0">
-                <a:pos x="connsiteX21" y="connsiteY21"/>
-              </a:cxn>
-              <a:cxn ang="0">
-                <a:pos x="connsiteX22" y="connsiteY22"/>
-              </a:cxn>
-              <a:cxn ang="0">
-                <a:pos x="connsiteX23" y="connsiteY23"/>
-              </a:cxn>
-              <a:cxn ang="0">
-                <a:pos x="connsiteX24" y="connsiteY24"/>
-              </a:cxn>
-              <a:cxn ang="0">
-                <a:pos x="connsiteX25" y="connsiteY25"/>
-              </a:cxn>
-              <a:cxn ang="0">
-                <a:pos x="connsiteX26" y="connsiteY26"/>
-              </a:cxn>
-              <a:cxn ang="0">
-                <a:pos x="connsiteX27" y="connsiteY27"/>
-              </a:cxn>
-            </a:cxnLst>
-            <a:rect l="l" t="t" r="r" b="b"/>
-            <a:pathLst>
-              <a:path w="1219200" h="911820">
-                <a:moveTo>
-                  <a:pt x="0" y="911820"/>
-                </a:moveTo>
-                <a:cubicBezTo>
-                  <a:pt x="45224" y="906554"/>
-                  <a:pt x="90449" y="901289"/>
-                  <a:pt x="133815" y="889518"/>
-                </a:cubicBezTo>
-                <a:cubicBezTo>
-                  <a:pt x="177181" y="877747"/>
-                  <a:pt x="227980" y="856684"/>
-                  <a:pt x="260195" y="841196"/>
-                </a:cubicBezTo>
-                <a:cubicBezTo>
-                  <a:pt x="292410" y="825708"/>
-                  <a:pt x="307279" y="812698"/>
-                  <a:pt x="327103" y="796591"/>
-                </a:cubicBezTo>
-                <a:cubicBezTo>
-                  <a:pt x="346927" y="780484"/>
-                  <a:pt x="361176" y="766235"/>
-                  <a:pt x="379142" y="744552"/>
-                </a:cubicBezTo>
-                <a:cubicBezTo>
-                  <a:pt x="397108" y="722869"/>
-                  <a:pt x="418791" y="692512"/>
-                  <a:pt x="434898" y="666493"/>
-                </a:cubicBezTo>
-                <a:cubicBezTo>
-                  <a:pt x="451005" y="640474"/>
-                  <a:pt x="467112" y="610118"/>
-                  <a:pt x="475785" y="588435"/>
-                </a:cubicBezTo>
-                <a:cubicBezTo>
-                  <a:pt x="484458" y="566752"/>
-                  <a:pt x="478883" y="572947"/>
-                  <a:pt x="486937" y="536396"/>
-                </a:cubicBezTo>
-                <a:cubicBezTo>
-                  <a:pt x="494991" y="499845"/>
-                  <a:pt x="513575" y="416211"/>
-                  <a:pt x="524107" y="369128"/>
-                </a:cubicBezTo>
-                <a:cubicBezTo>
-                  <a:pt x="534639" y="322045"/>
-                  <a:pt x="540834" y="296644"/>
-                  <a:pt x="550127" y="253898"/>
-                </a:cubicBezTo>
-                <a:cubicBezTo>
-                  <a:pt x="559420" y="211152"/>
-                  <a:pt x="571809" y="146104"/>
-                  <a:pt x="579863" y="112650"/>
-                </a:cubicBezTo>
-                <a:cubicBezTo>
-                  <a:pt x="587917" y="79196"/>
-                  <a:pt x="592254" y="69283"/>
-                  <a:pt x="598449" y="53176"/>
-                </a:cubicBezTo>
-                <a:cubicBezTo>
-                  <a:pt x="604644" y="37069"/>
-                  <a:pt x="617034" y="16006"/>
-                  <a:pt x="617034" y="16006"/>
-                </a:cubicBezTo>
-                <a:cubicBezTo>
-                  <a:pt x="623229" y="8572"/>
-                  <a:pt x="625708" y="11049"/>
-                  <a:pt x="635620" y="8571"/>
-                </a:cubicBezTo>
-                <a:cubicBezTo>
-                  <a:pt x="645532" y="6093"/>
-                  <a:pt x="661019" y="-3200"/>
-                  <a:pt x="676507" y="1137"/>
-                </a:cubicBezTo>
-                <a:cubicBezTo>
-                  <a:pt x="691995" y="5474"/>
-                  <a:pt x="716775" y="12289"/>
-                  <a:pt x="728546" y="34591"/>
-                </a:cubicBezTo>
-                <a:cubicBezTo>
-                  <a:pt x="740317" y="56893"/>
-                  <a:pt x="740937" y="102737"/>
-                  <a:pt x="747132" y="134952"/>
-                </a:cubicBezTo>
-                <a:cubicBezTo>
-                  <a:pt x="753327" y="167167"/>
-                  <a:pt x="760142" y="190708"/>
-                  <a:pt x="765717" y="227879"/>
-                </a:cubicBezTo>
-                <a:cubicBezTo>
-                  <a:pt x="771292" y="265050"/>
-                  <a:pt x="774390" y="317088"/>
-                  <a:pt x="780585" y="357976"/>
-                </a:cubicBezTo>
-                <a:cubicBezTo>
-                  <a:pt x="786780" y="398864"/>
-                  <a:pt x="796073" y="435416"/>
-                  <a:pt x="802888" y="473206"/>
-                </a:cubicBezTo>
-                <a:cubicBezTo>
-                  <a:pt x="809703" y="510996"/>
-                  <a:pt x="810941" y="553123"/>
-                  <a:pt x="821473" y="584718"/>
-                </a:cubicBezTo>
-                <a:cubicBezTo>
-                  <a:pt x="832005" y="616313"/>
-                  <a:pt x="851210" y="637996"/>
-                  <a:pt x="866078" y="662776"/>
-                </a:cubicBezTo>
-                <a:cubicBezTo>
-                  <a:pt x="880946" y="687556"/>
-                  <a:pt x="892717" y="712957"/>
-                  <a:pt x="910683" y="733401"/>
-                </a:cubicBezTo>
-                <a:cubicBezTo>
-                  <a:pt x="928649" y="753845"/>
-                  <a:pt x="957146" y="770572"/>
-                  <a:pt x="973873" y="785440"/>
-                </a:cubicBezTo>
-                <a:cubicBezTo>
-                  <a:pt x="990600" y="800308"/>
-                  <a:pt x="988122" y="808361"/>
-                  <a:pt x="1011044" y="822610"/>
-                </a:cubicBezTo>
-                <a:cubicBezTo>
-                  <a:pt x="1033966" y="836859"/>
-                  <a:pt x="1085386" y="859781"/>
-                  <a:pt x="1111405" y="870932"/>
-                </a:cubicBezTo>
-                <a:cubicBezTo>
-                  <a:pt x="1137424" y="882083"/>
-                  <a:pt x="1149195" y="884562"/>
-                  <a:pt x="1167161" y="889518"/>
-                </a:cubicBezTo>
-                <a:cubicBezTo>
-                  <a:pt x="1185127" y="894474"/>
-                  <a:pt x="1202163" y="897571"/>
-                  <a:pt x="1219200" y="900669"/>
-                </a:cubicBezTo>
-              </a:path>
-            </a:pathLst>
-          </a:custGeom>
-          <a:noFill/>
-          <a:ln w="12700">
-            <a:solidFill>
-              <a:schemeClr val="accent2"/>
-            </a:solidFill>
-          </a:ln>
-        </p:spPr>
-        <p:style>
-          <a:lnRef idx="2">
-            <a:schemeClr val="accent1">
-              <a:shade val="15000"/>
-            </a:schemeClr>
-          </a:lnRef>
-          <a:fillRef idx="1">
-            <a:schemeClr val="accent1"/>
-          </a:fillRef>
-          <a:effectRef idx="0">
-            <a:schemeClr val="accent1"/>
-          </a:effectRef>
-          <a:fontRef idx="minor">
-            <a:schemeClr val="lt1"/>
-          </a:fontRef>
-        </p:style>
-        <p:txBody>
-          <a:bodyPr rtlCol="0" anchor="ctr"/>
-          <a:lstStyle/>
-          <a:p>
-            <a:pPr algn="ctr"/>
-            <a:endParaRPr lang="en-US"/>
-          </a:p>
-        </p:txBody>
-      </p:sp>
-      <p:sp>
-        <p:nvSpPr>
-          <p:cNvPr id="12" name="Freeform 11">
-            <a:extLst>
-              <a:ext uri="{FF2B5EF4-FFF2-40B4-BE49-F238E27FC236}">
-                <a16:creationId xmlns:a16="http://schemas.microsoft.com/office/drawing/2014/main" id="{5B2F08F5-AFC5-C26A-4408-F33739D959FD}"/>
-              </a:ext>
-            </a:extLst>
-          </p:cNvPr>
-          <p:cNvSpPr/>
-          <p:nvPr/>
-        </p:nvSpPr>
-        <p:spPr>
-          <a:xfrm>
-            <a:off x="5229922" y="3796886"/>
-            <a:ext cx="1360449" cy="381104"/>
-          </a:xfrm>
-          <a:custGeom>
-            <a:avLst/>
-            <a:gdLst>
-              <a:gd name="connsiteX0" fmla="*/ 0 w 1360449"/>
-              <a:gd name="connsiteY0" fmla="*/ 381104 h 381104"/>
-              <a:gd name="connsiteX1" fmla="*/ 167268 w 1360449"/>
-              <a:gd name="connsiteY1" fmla="*/ 343934 h 381104"/>
-              <a:gd name="connsiteX2" fmla="*/ 226741 w 1360449"/>
-              <a:gd name="connsiteY2" fmla="*/ 321631 h 381104"/>
-              <a:gd name="connsiteX3" fmla="*/ 249044 w 1360449"/>
-              <a:gd name="connsiteY3" fmla="*/ 303046 h 381104"/>
-              <a:gd name="connsiteX4" fmla="*/ 304800 w 1360449"/>
-              <a:gd name="connsiteY4" fmla="*/ 243573 h 381104"/>
-              <a:gd name="connsiteX5" fmla="*/ 315951 w 1360449"/>
-              <a:gd name="connsiteY5" fmla="*/ 217553 h 381104"/>
-              <a:gd name="connsiteX6" fmla="*/ 360556 w 1360449"/>
-              <a:gd name="connsiteY6" fmla="*/ 165514 h 381104"/>
-              <a:gd name="connsiteX7" fmla="*/ 412595 w 1360449"/>
-              <a:gd name="connsiteY7" fmla="*/ 94890 h 381104"/>
-              <a:gd name="connsiteX8" fmla="*/ 509239 w 1360449"/>
-              <a:gd name="connsiteY8" fmla="*/ 31699 h 381104"/>
-              <a:gd name="connsiteX9" fmla="*/ 572429 w 1360449"/>
-              <a:gd name="connsiteY9" fmla="*/ 9397 h 381104"/>
-              <a:gd name="connsiteX10" fmla="*/ 620751 w 1360449"/>
-              <a:gd name="connsiteY10" fmla="*/ 1963 h 381104"/>
-              <a:gd name="connsiteX11" fmla="*/ 698810 w 1360449"/>
-              <a:gd name="connsiteY11" fmla="*/ 1963 h 381104"/>
-              <a:gd name="connsiteX12" fmla="*/ 788019 w 1360449"/>
-              <a:gd name="connsiteY12" fmla="*/ 24265 h 381104"/>
-              <a:gd name="connsiteX13" fmla="*/ 843776 w 1360449"/>
-              <a:gd name="connsiteY13" fmla="*/ 54002 h 381104"/>
-              <a:gd name="connsiteX14" fmla="*/ 914400 w 1360449"/>
-              <a:gd name="connsiteY14" fmla="*/ 94890 h 381104"/>
-              <a:gd name="connsiteX15" fmla="*/ 947854 w 1360449"/>
-              <a:gd name="connsiteY15" fmla="*/ 132060 h 381104"/>
-              <a:gd name="connsiteX16" fmla="*/ 1011044 w 1360449"/>
-              <a:gd name="connsiteY16" fmla="*/ 206402 h 381104"/>
-              <a:gd name="connsiteX17" fmla="*/ 1040780 w 1360449"/>
-              <a:gd name="connsiteY17" fmla="*/ 258441 h 381104"/>
-              <a:gd name="connsiteX18" fmla="*/ 1074234 w 1360449"/>
-              <a:gd name="connsiteY18" fmla="*/ 295612 h 381104"/>
-              <a:gd name="connsiteX19" fmla="*/ 1122556 w 1360449"/>
-              <a:gd name="connsiteY19" fmla="*/ 329065 h 381104"/>
-              <a:gd name="connsiteX20" fmla="*/ 1152293 w 1360449"/>
-              <a:gd name="connsiteY20" fmla="*/ 336499 h 381104"/>
-              <a:gd name="connsiteX21" fmla="*/ 1182029 w 1360449"/>
-              <a:gd name="connsiteY21" fmla="*/ 351368 h 381104"/>
-              <a:gd name="connsiteX22" fmla="*/ 1252654 w 1360449"/>
-              <a:gd name="connsiteY22" fmla="*/ 366236 h 381104"/>
-              <a:gd name="connsiteX23" fmla="*/ 1315844 w 1360449"/>
-              <a:gd name="connsiteY23" fmla="*/ 373670 h 381104"/>
-              <a:gd name="connsiteX24" fmla="*/ 1360449 w 1360449"/>
-              <a:gd name="connsiteY24" fmla="*/ 381104 h 381104"/>
-            </a:gdLst>
-            <a:ahLst/>
-            <a:cxnLst>
-              <a:cxn ang="0">
-                <a:pos x="connsiteX0" y="connsiteY0"/>
-              </a:cxn>
-              <a:cxn ang="0">
-                <a:pos x="connsiteX1" y="connsiteY1"/>
-              </a:cxn>
-              <a:cxn ang="0">
-                <a:pos x="connsiteX2" y="connsiteY2"/>
-              </a:cxn>
-              <a:cxn ang="0">
-                <a:pos x="connsiteX3" y="connsiteY3"/>
-              </a:cxn>
-              <a:cxn ang="0">
-                <a:pos x="connsiteX4" y="connsiteY4"/>
-              </a:cxn>
-              <a:cxn ang="0">
-                <a:pos x="connsiteX5" y="connsiteY5"/>
-              </a:cxn>
-              <a:cxn ang="0">
-                <a:pos x="connsiteX6" y="connsiteY6"/>
-              </a:cxn>
-              <a:cxn ang="0">
-                <a:pos x="connsiteX7" y="connsiteY7"/>
-              </a:cxn>
-              <a:cxn ang="0">
-                <a:pos x="connsiteX8" y="connsiteY8"/>
-              </a:cxn>
-              <a:cxn ang="0">
-                <a:pos x="connsiteX9" y="connsiteY9"/>
-              </a:cxn>
-              <a:cxn ang="0">
-                <a:pos x="connsiteX10" y="connsiteY10"/>
-              </a:cxn>
-              <a:cxn ang="0">
-                <a:pos x="connsiteX11" y="connsiteY11"/>
-              </a:cxn>
-              <a:cxn ang="0">
-                <a:pos x="connsiteX12" y="connsiteY12"/>
-              </a:cxn>
-              <a:cxn ang="0">
-                <a:pos x="connsiteX13" y="connsiteY13"/>
-              </a:cxn>
-              <a:cxn ang="0">
-                <a:pos x="connsiteX14" y="connsiteY14"/>
-              </a:cxn>
-              <a:cxn ang="0">
-                <a:pos x="connsiteX15" y="connsiteY15"/>
-              </a:cxn>
-              <a:cxn ang="0">
-                <a:pos x="connsiteX16" y="connsiteY16"/>
-              </a:cxn>
-              <a:cxn ang="0">
-                <a:pos x="connsiteX17" y="connsiteY17"/>
-              </a:cxn>
-              <a:cxn ang="0">
-                <a:pos x="connsiteX18" y="connsiteY18"/>
-              </a:cxn>
-              <a:cxn ang="0">
-                <a:pos x="connsiteX19" y="connsiteY19"/>
-              </a:cxn>
-              <a:cxn ang="0">
-                <a:pos x="connsiteX20" y="connsiteY20"/>
-              </a:cxn>
-              <a:cxn ang="0">
-                <a:pos x="connsiteX21" y="connsiteY21"/>
-              </a:cxn>
-              <a:cxn ang="0">
-                <a:pos x="connsiteX22" y="connsiteY22"/>
-              </a:cxn>
-              <a:cxn ang="0">
-                <a:pos x="connsiteX23" y="connsiteY23"/>
-              </a:cxn>
-              <a:cxn ang="0">
-                <a:pos x="connsiteX24" y="connsiteY24"/>
-              </a:cxn>
-            </a:cxnLst>
-            <a:rect l="l" t="t" r="r" b="b"/>
-            <a:pathLst>
-              <a:path w="1360449" h="381104">
-                <a:moveTo>
-                  <a:pt x="0" y="381104"/>
-                </a:moveTo>
-                <a:cubicBezTo>
-                  <a:pt x="64739" y="367475"/>
-                  <a:pt x="129478" y="353846"/>
-                  <a:pt x="167268" y="343934"/>
-                </a:cubicBezTo>
-                <a:cubicBezTo>
-                  <a:pt x="205058" y="334022"/>
-                  <a:pt x="226741" y="321631"/>
-                  <a:pt x="226741" y="321631"/>
-                </a:cubicBezTo>
-                <a:cubicBezTo>
-                  <a:pt x="240370" y="314816"/>
-                  <a:pt x="236034" y="316056"/>
-                  <a:pt x="249044" y="303046"/>
-                </a:cubicBezTo>
-                <a:cubicBezTo>
-                  <a:pt x="262054" y="290036"/>
-                  <a:pt x="293649" y="257822"/>
-                  <a:pt x="304800" y="243573"/>
-                </a:cubicBezTo>
-                <a:cubicBezTo>
-                  <a:pt x="315951" y="229324"/>
-                  <a:pt x="306658" y="230563"/>
-                  <a:pt x="315951" y="217553"/>
-                </a:cubicBezTo>
-                <a:cubicBezTo>
-                  <a:pt x="325244" y="204543"/>
-                  <a:pt x="344449" y="185958"/>
-                  <a:pt x="360556" y="165514"/>
-                </a:cubicBezTo>
-                <a:cubicBezTo>
-                  <a:pt x="376663" y="145070"/>
-                  <a:pt x="387815" y="117192"/>
-                  <a:pt x="412595" y="94890"/>
-                </a:cubicBezTo>
-                <a:cubicBezTo>
-                  <a:pt x="437375" y="72588"/>
-                  <a:pt x="482600" y="45948"/>
-                  <a:pt x="509239" y="31699"/>
-                </a:cubicBezTo>
-                <a:cubicBezTo>
-                  <a:pt x="535878" y="17450"/>
-                  <a:pt x="553844" y="14353"/>
-                  <a:pt x="572429" y="9397"/>
-                </a:cubicBezTo>
-                <a:cubicBezTo>
-                  <a:pt x="591014" y="4441"/>
-                  <a:pt x="599688" y="3202"/>
-                  <a:pt x="620751" y="1963"/>
-                </a:cubicBezTo>
-                <a:cubicBezTo>
-                  <a:pt x="641814" y="724"/>
-                  <a:pt x="670932" y="-1754"/>
-                  <a:pt x="698810" y="1963"/>
-                </a:cubicBezTo>
-                <a:cubicBezTo>
-                  <a:pt x="726688" y="5680"/>
-                  <a:pt x="763858" y="15592"/>
-                  <a:pt x="788019" y="24265"/>
-                </a:cubicBezTo>
-                <a:cubicBezTo>
-                  <a:pt x="812180" y="32938"/>
-                  <a:pt x="822713" y="42231"/>
-                  <a:pt x="843776" y="54002"/>
-                </a:cubicBezTo>
-                <a:cubicBezTo>
-                  <a:pt x="864839" y="65773"/>
-                  <a:pt x="897054" y="81880"/>
-                  <a:pt x="914400" y="94890"/>
-                </a:cubicBezTo>
-                <a:cubicBezTo>
-                  <a:pt x="931746" y="107900"/>
-                  <a:pt x="931747" y="113475"/>
-                  <a:pt x="947854" y="132060"/>
-                </a:cubicBezTo>
-                <a:cubicBezTo>
-                  <a:pt x="963961" y="150645"/>
-                  <a:pt x="995556" y="185338"/>
-                  <a:pt x="1011044" y="206402"/>
-                </a:cubicBezTo>
-                <a:cubicBezTo>
-                  <a:pt x="1026532" y="227465"/>
-                  <a:pt x="1030248" y="243573"/>
-                  <a:pt x="1040780" y="258441"/>
-                </a:cubicBezTo>
-                <a:cubicBezTo>
-                  <a:pt x="1051312" y="273309"/>
-                  <a:pt x="1060605" y="283841"/>
-                  <a:pt x="1074234" y="295612"/>
-                </a:cubicBezTo>
-                <a:cubicBezTo>
-                  <a:pt x="1087863" y="307383"/>
-                  <a:pt x="1109546" y="322251"/>
-                  <a:pt x="1122556" y="329065"/>
-                </a:cubicBezTo>
-                <a:cubicBezTo>
-                  <a:pt x="1135566" y="335879"/>
-                  <a:pt x="1142381" y="332782"/>
-                  <a:pt x="1152293" y="336499"/>
-                </a:cubicBezTo>
-                <a:cubicBezTo>
-                  <a:pt x="1162205" y="340216"/>
-                  <a:pt x="1165302" y="346412"/>
-                  <a:pt x="1182029" y="351368"/>
-                </a:cubicBezTo>
-                <a:cubicBezTo>
-                  <a:pt x="1198756" y="356324"/>
-                  <a:pt x="1230352" y="362519"/>
-                  <a:pt x="1252654" y="366236"/>
-                </a:cubicBezTo>
-                <a:cubicBezTo>
-                  <a:pt x="1274956" y="369953"/>
-                  <a:pt x="1297878" y="371192"/>
-                  <a:pt x="1315844" y="373670"/>
-                </a:cubicBezTo>
-                <a:cubicBezTo>
-                  <a:pt x="1333810" y="376148"/>
-                  <a:pt x="1347129" y="378626"/>
-                  <a:pt x="1360449" y="381104"/>
-                </a:cubicBezTo>
-              </a:path>
-            </a:pathLst>
-          </a:custGeom>
-          <a:noFill/>
-          <a:ln w="12700">
-            <a:solidFill>
-              <a:schemeClr val="accent5"/>
-            </a:solidFill>
-          </a:ln>
-        </p:spPr>
-        <p:style>
-          <a:lnRef idx="2">
-            <a:schemeClr val="accent1">
-              <a:shade val="15000"/>
-            </a:schemeClr>
-          </a:lnRef>
-          <a:fillRef idx="1">
-            <a:schemeClr val="accent1"/>
-          </a:fillRef>
-          <a:effectRef idx="0">
-            <a:schemeClr val="accent1"/>
-          </a:effectRef>
-          <a:fontRef idx="minor">
-            <a:schemeClr val="lt1"/>
-          </a:fontRef>
-        </p:style>
-        <p:txBody>
-          <a:bodyPr rtlCol="0" anchor="ctr"/>
-          <a:lstStyle/>
-          <a:p>
-            <a:pPr algn="ctr"/>
-            <a:endParaRPr lang="en-US"/>
-          </a:p>
-        </p:txBody>
-      </p:sp>
-      <mc:AlternateContent xmlns:mc="http://schemas.openxmlformats.org/markup-compatibility/2006">
-        <mc:Choice xmlns:p14="http://schemas.microsoft.com/office/powerpoint/2010/main" Requires="p14">
-          <p:contentPart p14:bwMode="auto" r:id="rId2">
-            <p14:nvContentPartPr>
-              <p14:cNvPr id="13" name="Ink 12">
-                <a:extLst>
-                  <a:ext uri="{FF2B5EF4-FFF2-40B4-BE49-F238E27FC236}">
-                    <a16:creationId xmlns:a16="http://schemas.microsoft.com/office/drawing/2014/main" id="{8618A8A1-4324-6057-2D0B-1B563A28A6D6}"/>
-                  </a:ext>
-                </a:extLst>
-              </p14:cNvPr>
-              <p14:cNvContentPartPr/>
-              <p14:nvPr/>
-            </p14:nvContentPartPr>
-            <p14:xfrm>
-              <a:off x="5765855" y="4119910"/>
-              <a:ext cx="133920" cy="53640"/>
-            </p14:xfrm>
-          </p:contentPart>
-        </mc:Choice>
-        <mc:Fallback>
-          <p:pic>
-            <p:nvPicPr>
-              <p:cNvPr id="13" name="Ink 12">
-                <a:extLst>
-                  <a:ext uri="{FF2B5EF4-FFF2-40B4-BE49-F238E27FC236}">
-                    <a16:creationId xmlns:a16="http://schemas.microsoft.com/office/drawing/2014/main" id="{8618A8A1-4324-6057-2D0B-1B563A28A6D6}"/>
-                  </a:ext>
-                </a:extLst>
-              </p:cNvPr>
-              <p:cNvPicPr/>
-              <p:nvPr/>
-            </p:nvPicPr>
-            <p:blipFill>
-              <a:blip r:embed="rId3"/>
-              <a:stretch>
-                <a:fillRect/>
-              </a:stretch>
-            </p:blipFill>
-            <p:spPr>
-              <a:xfrm>
-                <a:off x="5757215" y="4110910"/>
-                <a:ext cx="151560" cy="71280"/>
-              </a:xfrm>
-              <a:prstGeom prst="rect">
-                <a:avLst/>
-              </a:prstGeom>
-            </p:spPr>
-          </p:pic>
-        </mc:Fallback>
-      </mc:AlternateContent>
-      <mc:AlternateContent xmlns:mc="http://schemas.openxmlformats.org/markup-compatibility/2006">
-        <mc:Choice xmlns:p14="http://schemas.microsoft.com/office/powerpoint/2010/main" Requires="p14">
-          <p:contentPart p14:bwMode="auto" r:id="rId4">
-            <p14:nvContentPartPr>
-              <p14:cNvPr id="14" name="Ink 13">
-                <a:extLst>
-                  <a:ext uri="{FF2B5EF4-FFF2-40B4-BE49-F238E27FC236}">
-                    <a16:creationId xmlns:a16="http://schemas.microsoft.com/office/drawing/2014/main" id="{39C9C4CF-7BF9-94F6-2315-A27E5945B9AE}"/>
-                  </a:ext>
-                </a:extLst>
-              </p14:cNvPr>
-              <p14:cNvContentPartPr/>
-              <p14:nvPr/>
-            </p14:nvContentPartPr>
-            <p14:xfrm>
-              <a:off x="5410895" y="3980950"/>
-              <a:ext cx="192240" cy="187920"/>
-            </p14:xfrm>
-          </p:contentPart>
-        </mc:Choice>
-        <mc:Fallback>
-          <p:pic>
-            <p:nvPicPr>
-              <p:cNvPr id="14" name="Ink 13">
-                <a:extLst>
-                  <a:ext uri="{FF2B5EF4-FFF2-40B4-BE49-F238E27FC236}">
-                    <a16:creationId xmlns:a16="http://schemas.microsoft.com/office/drawing/2014/main" id="{39C9C4CF-7BF9-94F6-2315-A27E5945B9AE}"/>
-                  </a:ext>
-                </a:extLst>
-              </p:cNvPr>
-              <p:cNvPicPr/>
-              <p:nvPr/>
-            </p:nvPicPr>
-            <p:blipFill>
-              <a:blip r:embed="rId5"/>
-              <a:stretch>
-                <a:fillRect/>
-              </a:stretch>
-            </p:blipFill>
-            <p:spPr>
-              <a:xfrm>
-                <a:off x="5401895" y="3971950"/>
-                <a:ext cx="209880" cy="205560"/>
-              </a:xfrm>
-              <a:prstGeom prst="rect">
-                <a:avLst/>
-              </a:prstGeom>
-            </p:spPr>
-          </p:pic>
-        </mc:Fallback>
-      </mc:AlternateContent>
-      <mc:AlternateContent xmlns:mc="http://schemas.openxmlformats.org/markup-compatibility/2006">
-        <mc:Choice xmlns:p14="http://schemas.microsoft.com/office/powerpoint/2010/main" Requires="p14">
-          <p:contentPart p14:bwMode="auto" r:id="rId6">
-            <p14:nvContentPartPr>
-              <p14:cNvPr id="15" name="Ink 14">
-                <a:extLst>
-                  <a:ext uri="{FF2B5EF4-FFF2-40B4-BE49-F238E27FC236}">
-                    <a16:creationId xmlns:a16="http://schemas.microsoft.com/office/drawing/2014/main" id="{FA91CDB5-B051-EAC6-EEFF-84DF9F2146D1}"/>
-                  </a:ext>
-                </a:extLst>
-              </p14:cNvPr>
-              <p14:cNvContentPartPr/>
-              <p14:nvPr/>
-            </p14:nvContentPartPr>
-            <p14:xfrm>
-              <a:off x="5330615" y="3967990"/>
-              <a:ext cx="380160" cy="205560"/>
-            </p14:xfrm>
-          </p:contentPart>
-        </mc:Choice>
-        <mc:Fallback>
-          <p:pic>
-            <p:nvPicPr>
-              <p:cNvPr id="15" name="Ink 14">
-                <a:extLst>
-                  <a:ext uri="{FF2B5EF4-FFF2-40B4-BE49-F238E27FC236}">
-                    <a16:creationId xmlns:a16="http://schemas.microsoft.com/office/drawing/2014/main" id="{FA91CDB5-B051-EAC6-EEFF-84DF9F2146D1}"/>
-                  </a:ext>
-                </a:extLst>
-              </p:cNvPr>
-              <p:cNvPicPr/>
-              <p:nvPr/>
-            </p:nvPicPr>
-            <p:blipFill>
-              <a:blip r:embed="rId7"/>
-              <a:stretch>
-                <a:fillRect/>
-              </a:stretch>
-            </p:blipFill>
-            <p:spPr>
-              <a:xfrm>
-                <a:off x="5321615" y="3958990"/>
-                <a:ext cx="397800" cy="223200"/>
-              </a:xfrm>
-              <a:prstGeom prst="rect">
-                <a:avLst/>
-              </a:prstGeom>
-            </p:spPr>
-          </p:pic>
-        </mc:Fallback>
-      </mc:AlternateContent>
-      <mc:AlternateContent xmlns:mc="http://schemas.openxmlformats.org/markup-compatibility/2006">
-        <mc:Choice xmlns:p14="http://schemas.microsoft.com/office/powerpoint/2010/main" Requires="p14">
-          <p:contentPart p14:bwMode="auto" r:id="rId8">
-            <p14:nvContentPartPr>
-              <p14:cNvPr id="16" name="Ink 15">
-                <a:extLst>
-                  <a:ext uri="{FF2B5EF4-FFF2-40B4-BE49-F238E27FC236}">
-                    <a16:creationId xmlns:a16="http://schemas.microsoft.com/office/drawing/2014/main" id="{A6E6E6DD-B4AB-85BD-6C91-65D28EBF6FFD}"/>
-                  </a:ext>
-                </a:extLst>
-              </p14:cNvPr>
-              <p14:cNvContentPartPr/>
-              <p14:nvPr/>
-            </p14:nvContentPartPr>
-            <p14:xfrm>
-              <a:off x="5458415" y="4027030"/>
-              <a:ext cx="286200" cy="134280"/>
-            </p14:xfrm>
-          </p:contentPart>
-        </mc:Choice>
-        <mc:Fallback>
-          <p:pic>
-            <p:nvPicPr>
-              <p:cNvPr id="16" name="Ink 15">
-                <a:extLst>
-                  <a:ext uri="{FF2B5EF4-FFF2-40B4-BE49-F238E27FC236}">
-                    <a16:creationId xmlns:a16="http://schemas.microsoft.com/office/drawing/2014/main" id="{A6E6E6DD-B4AB-85BD-6C91-65D28EBF6FFD}"/>
-                  </a:ext>
-                </a:extLst>
-              </p:cNvPr>
-              <p:cNvPicPr/>
-              <p:nvPr/>
-            </p:nvPicPr>
-            <p:blipFill>
-              <a:blip r:embed="rId9"/>
-              <a:stretch>
-                <a:fillRect/>
-              </a:stretch>
-            </p:blipFill>
-            <p:spPr>
-              <a:xfrm>
-                <a:off x="5449775" y="4018390"/>
-                <a:ext cx="303840" cy="151920"/>
-              </a:xfrm>
-              <a:prstGeom prst="rect">
-                <a:avLst/>
-              </a:prstGeom>
-            </p:spPr>
-          </p:pic>
-        </mc:Fallback>
-      </mc:AlternateContent>
-      <mc:AlternateContent xmlns:mc="http://schemas.openxmlformats.org/markup-compatibility/2006">
-        <mc:Choice xmlns:p14="http://schemas.microsoft.com/office/powerpoint/2010/main" Requires="p14">
-          <p:contentPart p14:bwMode="auto" r:id="rId10">
-            <p14:nvContentPartPr>
-              <p14:cNvPr id="17" name="Ink 16">
-                <a:extLst>
-                  <a:ext uri="{FF2B5EF4-FFF2-40B4-BE49-F238E27FC236}">
-                    <a16:creationId xmlns:a16="http://schemas.microsoft.com/office/drawing/2014/main" id="{1B2FFCDE-5C4F-92C8-27CF-40660F8F8C87}"/>
-                  </a:ext>
-                </a:extLst>
-              </p14:cNvPr>
-              <p14:cNvContentPartPr/>
-              <p14:nvPr/>
-            </p14:nvContentPartPr>
-            <p14:xfrm>
-              <a:off x="5626175" y="3844870"/>
-              <a:ext cx="120240" cy="221400"/>
-            </p14:xfrm>
-          </p:contentPart>
-        </mc:Choice>
-        <mc:Fallback>
-          <p:pic>
-            <p:nvPicPr>
-              <p:cNvPr id="17" name="Ink 16">
-                <a:extLst>
-                  <a:ext uri="{FF2B5EF4-FFF2-40B4-BE49-F238E27FC236}">
-                    <a16:creationId xmlns:a16="http://schemas.microsoft.com/office/drawing/2014/main" id="{1B2FFCDE-5C4F-92C8-27CF-40660F8F8C87}"/>
-                  </a:ext>
-                </a:extLst>
-              </p:cNvPr>
-              <p:cNvPicPr/>
-              <p:nvPr/>
-            </p:nvPicPr>
-            <p:blipFill>
-              <a:blip r:embed="rId11"/>
-              <a:stretch>
-                <a:fillRect/>
-              </a:stretch>
-            </p:blipFill>
-            <p:spPr>
-              <a:xfrm>
-                <a:off x="5617175" y="3835870"/>
-                <a:ext cx="137880" cy="239040"/>
-              </a:xfrm>
-              <a:prstGeom prst="rect">
-                <a:avLst/>
-              </a:prstGeom>
-            </p:spPr>
-          </p:pic>
-        </mc:Fallback>
-      </mc:AlternateContent>
-      <p:cxnSp>
-        <p:nvCxnSpPr>
-          <p:cNvPr id="19" name="Straight Arrow Connector 18">
-            <a:extLst>
-              <a:ext uri="{FF2B5EF4-FFF2-40B4-BE49-F238E27FC236}">
-                <a16:creationId xmlns:a16="http://schemas.microsoft.com/office/drawing/2014/main" id="{B3969938-AE36-24A0-D9A0-B579CC517EC9}"/>
-              </a:ext>
-            </a:extLst>
-          </p:cNvPr>
-          <p:cNvCxnSpPr>
-            <a:cxnSpLocks/>
-          </p:cNvCxnSpPr>
-          <p:nvPr/>
-        </p:nvCxnSpPr>
-        <p:spPr>
-          <a:xfrm>
-            <a:off x="5601515" y="3590925"/>
-            <a:ext cx="0" cy="331180"/>
-          </a:xfrm>
-          <a:prstGeom prst="straightConnector1">
-            <a:avLst/>
-          </a:prstGeom>
-          <a:ln w="6350">
-            <a:prstDash val="dash"/>
-            <a:tailEnd type="triangle" w="sm" len="sm"/>
-          </a:ln>
-        </p:spPr>
-        <p:style>
-          <a:lnRef idx="2">
-            <a:schemeClr val="accent1"/>
-          </a:lnRef>
-          <a:fillRef idx="0">
-            <a:schemeClr val="accent1"/>
-          </a:fillRef>
-          <a:effectRef idx="1">
-            <a:schemeClr val="accent1"/>
-          </a:effectRef>
-          <a:fontRef idx="minor">
-            <a:schemeClr val="tx1"/>
-          </a:fontRef>
-        </p:style>
-      </p:cxnSp>
+        </p:grpSpPr>
+        <p:cxnSp>
+          <p:nvCxnSpPr>
+            <p:cNvPr id="5" name="Straight Connector 4">
+              <a:extLst>
+                <a:ext uri="{FF2B5EF4-FFF2-40B4-BE49-F238E27FC236}">
+                  <a16:creationId xmlns:a16="http://schemas.microsoft.com/office/drawing/2014/main" id="{D8E765FA-AB64-8D67-EFE3-E75C3C26DCCF}"/>
+                </a:ext>
+              </a:extLst>
+            </p:cNvPr>
+            <p:cNvCxnSpPr/>
+            <p:nvPr/>
+          </p:nvCxnSpPr>
+          <p:spPr>
+            <a:xfrm>
+              <a:off x="4594302" y="2449551"/>
+              <a:ext cx="0" cy="1728439"/>
+            </a:xfrm>
+            <a:prstGeom prst="line">
+              <a:avLst/>
+            </a:prstGeom>
+            <a:ln>
+              <a:headEnd type="triangle"/>
+              <a:tailEnd type="none"/>
+            </a:ln>
+          </p:spPr>
+          <p:style>
+            <a:lnRef idx="2">
+              <a:schemeClr val="accent1"/>
+            </a:lnRef>
+            <a:fillRef idx="0">
+              <a:schemeClr val="accent1"/>
+            </a:fillRef>
+            <a:effectRef idx="1">
+              <a:schemeClr val="accent1"/>
+            </a:effectRef>
+            <a:fontRef idx="minor">
+              <a:schemeClr val="tx1"/>
+            </a:fontRef>
+          </p:style>
+        </p:cxnSp>
+        <p:cxnSp>
+          <p:nvCxnSpPr>
+            <p:cNvPr id="6" name="Straight Connector 5">
+              <a:extLst>
+                <a:ext uri="{FF2B5EF4-FFF2-40B4-BE49-F238E27FC236}">
+                  <a16:creationId xmlns:a16="http://schemas.microsoft.com/office/drawing/2014/main" id="{45DE9FD6-EB7D-1F4E-6470-53968C5C4B2C}"/>
+                </a:ext>
+              </a:extLst>
+            </p:cNvPr>
+            <p:cNvCxnSpPr>
+              <a:cxnSpLocks/>
+            </p:cNvCxnSpPr>
+            <p:nvPr/>
+          </p:nvCxnSpPr>
+          <p:spPr>
+            <a:xfrm flipH="1">
+              <a:off x="4594302" y="4177990"/>
+              <a:ext cx="2352908" cy="0"/>
+            </a:xfrm>
+            <a:prstGeom prst="line">
+              <a:avLst/>
+            </a:prstGeom>
+            <a:ln>
+              <a:headEnd type="triangle"/>
+              <a:tailEnd type="none"/>
+            </a:ln>
+          </p:spPr>
+          <p:style>
+            <a:lnRef idx="2">
+              <a:schemeClr val="accent1"/>
+            </a:lnRef>
+            <a:fillRef idx="0">
+              <a:schemeClr val="accent1"/>
+            </a:fillRef>
+            <a:effectRef idx="1">
+              <a:schemeClr val="accent1"/>
+            </a:effectRef>
+            <a:fontRef idx="minor">
+              <a:schemeClr val="tx1"/>
+            </a:fontRef>
+          </p:style>
+        </p:cxnSp>
+        <p:cxnSp>
+          <p:nvCxnSpPr>
+            <p:cNvPr id="10" name="Straight Connector 9">
+              <a:extLst>
+                <a:ext uri="{FF2B5EF4-FFF2-40B4-BE49-F238E27FC236}">
+                  <a16:creationId xmlns:a16="http://schemas.microsoft.com/office/drawing/2014/main" id="{042CC93E-DB1E-045D-E010-D36E20277009}"/>
+                </a:ext>
+              </a:extLst>
+            </p:cNvPr>
+            <p:cNvCxnSpPr>
+              <a:cxnSpLocks/>
+            </p:cNvCxnSpPr>
+            <p:nvPr/>
+          </p:nvCxnSpPr>
+          <p:spPr>
+            <a:xfrm flipV="1">
+              <a:off x="5758295" y="3124200"/>
+              <a:ext cx="4224" cy="1206500"/>
+            </a:xfrm>
+            <a:prstGeom prst="line">
+              <a:avLst/>
+            </a:prstGeom>
+            <a:ln w="9525">
+              <a:prstDash val="dash"/>
+            </a:ln>
+          </p:spPr>
+          <p:style>
+            <a:lnRef idx="2">
+              <a:schemeClr val="accent1"/>
+            </a:lnRef>
+            <a:fillRef idx="0">
+              <a:schemeClr val="accent1"/>
+            </a:fillRef>
+            <a:effectRef idx="1">
+              <a:schemeClr val="accent1"/>
+            </a:effectRef>
+            <a:fontRef idx="minor">
+              <a:schemeClr val="tx1"/>
+            </a:fontRef>
+          </p:style>
+        </p:cxnSp>
+        <p:sp>
+          <p:nvSpPr>
+            <p:cNvPr id="11" name="Freeform 10">
+              <a:extLst>
+                <a:ext uri="{FF2B5EF4-FFF2-40B4-BE49-F238E27FC236}">
+                  <a16:creationId xmlns:a16="http://schemas.microsoft.com/office/drawing/2014/main" id="{ED4069DB-9E04-3BDA-2519-4FD81760ACFF}"/>
+                </a:ext>
+              </a:extLst>
+            </p:cNvPr>
+            <p:cNvSpPr/>
+            <p:nvPr/>
+          </p:nvSpPr>
+          <p:spPr>
+            <a:xfrm>
+              <a:off x="4728117" y="3266170"/>
+              <a:ext cx="1219200" cy="911820"/>
+            </a:xfrm>
+            <a:custGeom>
+              <a:avLst/>
+              <a:gdLst>
+                <a:gd name="connsiteX0" fmla="*/ 0 w 1219200"/>
+                <a:gd name="connsiteY0" fmla="*/ 911820 h 911820"/>
+                <a:gd name="connsiteX1" fmla="*/ 133815 w 1219200"/>
+                <a:gd name="connsiteY1" fmla="*/ 889518 h 911820"/>
+                <a:gd name="connsiteX2" fmla="*/ 260195 w 1219200"/>
+                <a:gd name="connsiteY2" fmla="*/ 841196 h 911820"/>
+                <a:gd name="connsiteX3" fmla="*/ 327103 w 1219200"/>
+                <a:gd name="connsiteY3" fmla="*/ 796591 h 911820"/>
+                <a:gd name="connsiteX4" fmla="*/ 379142 w 1219200"/>
+                <a:gd name="connsiteY4" fmla="*/ 744552 h 911820"/>
+                <a:gd name="connsiteX5" fmla="*/ 434898 w 1219200"/>
+                <a:gd name="connsiteY5" fmla="*/ 666493 h 911820"/>
+                <a:gd name="connsiteX6" fmla="*/ 475785 w 1219200"/>
+                <a:gd name="connsiteY6" fmla="*/ 588435 h 911820"/>
+                <a:gd name="connsiteX7" fmla="*/ 486937 w 1219200"/>
+                <a:gd name="connsiteY7" fmla="*/ 536396 h 911820"/>
+                <a:gd name="connsiteX8" fmla="*/ 524107 w 1219200"/>
+                <a:gd name="connsiteY8" fmla="*/ 369128 h 911820"/>
+                <a:gd name="connsiteX9" fmla="*/ 550127 w 1219200"/>
+                <a:gd name="connsiteY9" fmla="*/ 253898 h 911820"/>
+                <a:gd name="connsiteX10" fmla="*/ 579863 w 1219200"/>
+                <a:gd name="connsiteY10" fmla="*/ 112650 h 911820"/>
+                <a:gd name="connsiteX11" fmla="*/ 598449 w 1219200"/>
+                <a:gd name="connsiteY11" fmla="*/ 53176 h 911820"/>
+                <a:gd name="connsiteX12" fmla="*/ 617034 w 1219200"/>
+                <a:gd name="connsiteY12" fmla="*/ 16006 h 911820"/>
+                <a:gd name="connsiteX13" fmla="*/ 635620 w 1219200"/>
+                <a:gd name="connsiteY13" fmla="*/ 8571 h 911820"/>
+                <a:gd name="connsiteX14" fmla="*/ 676507 w 1219200"/>
+                <a:gd name="connsiteY14" fmla="*/ 1137 h 911820"/>
+                <a:gd name="connsiteX15" fmla="*/ 728546 w 1219200"/>
+                <a:gd name="connsiteY15" fmla="*/ 34591 h 911820"/>
+                <a:gd name="connsiteX16" fmla="*/ 747132 w 1219200"/>
+                <a:gd name="connsiteY16" fmla="*/ 134952 h 911820"/>
+                <a:gd name="connsiteX17" fmla="*/ 765717 w 1219200"/>
+                <a:gd name="connsiteY17" fmla="*/ 227879 h 911820"/>
+                <a:gd name="connsiteX18" fmla="*/ 780585 w 1219200"/>
+                <a:gd name="connsiteY18" fmla="*/ 357976 h 911820"/>
+                <a:gd name="connsiteX19" fmla="*/ 802888 w 1219200"/>
+                <a:gd name="connsiteY19" fmla="*/ 473206 h 911820"/>
+                <a:gd name="connsiteX20" fmla="*/ 821473 w 1219200"/>
+                <a:gd name="connsiteY20" fmla="*/ 584718 h 911820"/>
+                <a:gd name="connsiteX21" fmla="*/ 866078 w 1219200"/>
+                <a:gd name="connsiteY21" fmla="*/ 662776 h 911820"/>
+                <a:gd name="connsiteX22" fmla="*/ 910683 w 1219200"/>
+                <a:gd name="connsiteY22" fmla="*/ 733401 h 911820"/>
+                <a:gd name="connsiteX23" fmla="*/ 973873 w 1219200"/>
+                <a:gd name="connsiteY23" fmla="*/ 785440 h 911820"/>
+                <a:gd name="connsiteX24" fmla="*/ 1011044 w 1219200"/>
+                <a:gd name="connsiteY24" fmla="*/ 822610 h 911820"/>
+                <a:gd name="connsiteX25" fmla="*/ 1111405 w 1219200"/>
+                <a:gd name="connsiteY25" fmla="*/ 870932 h 911820"/>
+                <a:gd name="connsiteX26" fmla="*/ 1167161 w 1219200"/>
+                <a:gd name="connsiteY26" fmla="*/ 889518 h 911820"/>
+                <a:gd name="connsiteX27" fmla="*/ 1219200 w 1219200"/>
+                <a:gd name="connsiteY27" fmla="*/ 900669 h 911820"/>
+              </a:gdLst>
+              <a:ahLst/>
+              <a:cxnLst>
+                <a:cxn ang="0">
+                  <a:pos x="connsiteX0" y="connsiteY0"/>
+                </a:cxn>
+                <a:cxn ang="0">
+                  <a:pos x="connsiteX1" y="connsiteY1"/>
+                </a:cxn>
+                <a:cxn ang="0">
+                  <a:pos x="connsiteX2" y="connsiteY2"/>
+                </a:cxn>
+                <a:cxn ang="0">
+                  <a:pos x="connsiteX3" y="connsiteY3"/>
+                </a:cxn>
+                <a:cxn ang="0">
+                  <a:pos x="connsiteX4" y="connsiteY4"/>
+                </a:cxn>
+                <a:cxn ang="0">
+                  <a:pos x="connsiteX5" y="connsiteY5"/>
+                </a:cxn>
+                <a:cxn ang="0">
+                  <a:pos x="connsiteX6" y="connsiteY6"/>
+                </a:cxn>
+                <a:cxn ang="0">
+                  <a:pos x="connsiteX7" y="connsiteY7"/>
+                </a:cxn>
+                <a:cxn ang="0">
+                  <a:pos x="connsiteX8" y="connsiteY8"/>
+                </a:cxn>
+                <a:cxn ang="0">
+                  <a:pos x="connsiteX9" y="connsiteY9"/>
+                </a:cxn>
+                <a:cxn ang="0">
+                  <a:pos x="connsiteX10" y="connsiteY10"/>
+                </a:cxn>
+                <a:cxn ang="0">
+                  <a:pos x="connsiteX11" y="connsiteY11"/>
+                </a:cxn>
+                <a:cxn ang="0">
+                  <a:pos x="connsiteX12" y="connsiteY12"/>
+                </a:cxn>
+                <a:cxn ang="0">
+                  <a:pos x="connsiteX13" y="connsiteY13"/>
+                </a:cxn>
+                <a:cxn ang="0">
+                  <a:pos x="connsiteX14" y="connsiteY14"/>
+                </a:cxn>
+                <a:cxn ang="0">
+                  <a:pos x="connsiteX15" y="connsiteY15"/>
+                </a:cxn>
+                <a:cxn ang="0">
+                  <a:pos x="connsiteX16" y="connsiteY16"/>
+                </a:cxn>
+                <a:cxn ang="0">
+                  <a:pos x="connsiteX17" y="connsiteY17"/>
+                </a:cxn>
+                <a:cxn ang="0">
+                  <a:pos x="connsiteX18" y="connsiteY18"/>
+                </a:cxn>
+                <a:cxn ang="0">
+                  <a:pos x="connsiteX19" y="connsiteY19"/>
+                </a:cxn>
+                <a:cxn ang="0">
+                  <a:pos x="connsiteX20" y="connsiteY20"/>
+                </a:cxn>
+                <a:cxn ang="0">
+                  <a:pos x="connsiteX21" y="connsiteY21"/>
+                </a:cxn>
+                <a:cxn ang="0">
+                  <a:pos x="connsiteX22" y="connsiteY22"/>
+                </a:cxn>
+                <a:cxn ang="0">
+                  <a:pos x="connsiteX23" y="connsiteY23"/>
+                </a:cxn>
+                <a:cxn ang="0">
+                  <a:pos x="connsiteX24" y="connsiteY24"/>
+                </a:cxn>
+                <a:cxn ang="0">
+                  <a:pos x="connsiteX25" y="connsiteY25"/>
+                </a:cxn>
+                <a:cxn ang="0">
+                  <a:pos x="connsiteX26" y="connsiteY26"/>
+                </a:cxn>
+                <a:cxn ang="0">
+                  <a:pos x="connsiteX27" y="connsiteY27"/>
+                </a:cxn>
+              </a:cxnLst>
+              <a:rect l="l" t="t" r="r" b="b"/>
+              <a:pathLst>
+                <a:path w="1219200" h="911820">
+                  <a:moveTo>
+                    <a:pt x="0" y="911820"/>
+                  </a:moveTo>
+                  <a:cubicBezTo>
+                    <a:pt x="45224" y="906554"/>
+                    <a:pt x="90449" y="901289"/>
+                    <a:pt x="133815" y="889518"/>
+                  </a:cubicBezTo>
+                  <a:cubicBezTo>
+                    <a:pt x="177181" y="877747"/>
+                    <a:pt x="227980" y="856684"/>
+                    <a:pt x="260195" y="841196"/>
+                  </a:cubicBezTo>
+                  <a:cubicBezTo>
+                    <a:pt x="292410" y="825708"/>
+                    <a:pt x="307279" y="812698"/>
+                    <a:pt x="327103" y="796591"/>
+                  </a:cubicBezTo>
+                  <a:cubicBezTo>
+                    <a:pt x="346927" y="780484"/>
+                    <a:pt x="361176" y="766235"/>
+                    <a:pt x="379142" y="744552"/>
+                  </a:cubicBezTo>
+                  <a:cubicBezTo>
+                    <a:pt x="397108" y="722869"/>
+                    <a:pt x="418791" y="692512"/>
+                    <a:pt x="434898" y="666493"/>
+                  </a:cubicBezTo>
+                  <a:cubicBezTo>
+                    <a:pt x="451005" y="640474"/>
+                    <a:pt x="467112" y="610118"/>
+                    <a:pt x="475785" y="588435"/>
+                  </a:cubicBezTo>
+                  <a:cubicBezTo>
+                    <a:pt x="484458" y="566752"/>
+                    <a:pt x="478883" y="572947"/>
+                    <a:pt x="486937" y="536396"/>
+                  </a:cubicBezTo>
+                  <a:cubicBezTo>
+                    <a:pt x="494991" y="499845"/>
+                    <a:pt x="513575" y="416211"/>
+                    <a:pt x="524107" y="369128"/>
+                  </a:cubicBezTo>
+                  <a:cubicBezTo>
+                    <a:pt x="534639" y="322045"/>
+                    <a:pt x="540834" y="296644"/>
+                    <a:pt x="550127" y="253898"/>
+                  </a:cubicBezTo>
+                  <a:cubicBezTo>
+                    <a:pt x="559420" y="211152"/>
+                    <a:pt x="571809" y="146104"/>
+                    <a:pt x="579863" y="112650"/>
+                  </a:cubicBezTo>
+                  <a:cubicBezTo>
+                    <a:pt x="587917" y="79196"/>
+                    <a:pt x="592254" y="69283"/>
+                    <a:pt x="598449" y="53176"/>
+                  </a:cubicBezTo>
+                  <a:cubicBezTo>
+                    <a:pt x="604644" y="37069"/>
+                    <a:pt x="617034" y="16006"/>
+                    <a:pt x="617034" y="16006"/>
+                  </a:cubicBezTo>
+                  <a:cubicBezTo>
+                    <a:pt x="623229" y="8572"/>
+                    <a:pt x="625708" y="11049"/>
+                    <a:pt x="635620" y="8571"/>
+                  </a:cubicBezTo>
+                  <a:cubicBezTo>
+                    <a:pt x="645532" y="6093"/>
+                    <a:pt x="661019" y="-3200"/>
+                    <a:pt x="676507" y="1137"/>
+                  </a:cubicBezTo>
+                  <a:cubicBezTo>
+                    <a:pt x="691995" y="5474"/>
+                    <a:pt x="716775" y="12289"/>
+                    <a:pt x="728546" y="34591"/>
+                  </a:cubicBezTo>
+                  <a:cubicBezTo>
+                    <a:pt x="740317" y="56893"/>
+                    <a:pt x="740937" y="102737"/>
+                    <a:pt x="747132" y="134952"/>
+                  </a:cubicBezTo>
+                  <a:cubicBezTo>
+                    <a:pt x="753327" y="167167"/>
+                    <a:pt x="760142" y="190708"/>
+                    <a:pt x="765717" y="227879"/>
+                  </a:cubicBezTo>
+                  <a:cubicBezTo>
+                    <a:pt x="771292" y="265050"/>
+                    <a:pt x="774390" y="317088"/>
+                    <a:pt x="780585" y="357976"/>
+                  </a:cubicBezTo>
+                  <a:cubicBezTo>
+                    <a:pt x="786780" y="398864"/>
+                    <a:pt x="796073" y="435416"/>
+                    <a:pt x="802888" y="473206"/>
+                  </a:cubicBezTo>
+                  <a:cubicBezTo>
+                    <a:pt x="809703" y="510996"/>
+                    <a:pt x="810941" y="553123"/>
+                    <a:pt x="821473" y="584718"/>
+                  </a:cubicBezTo>
+                  <a:cubicBezTo>
+                    <a:pt x="832005" y="616313"/>
+                    <a:pt x="851210" y="637996"/>
+                    <a:pt x="866078" y="662776"/>
+                  </a:cubicBezTo>
+                  <a:cubicBezTo>
+                    <a:pt x="880946" y="687556"/>
+                    <a:pt x="892717" y="712957"/>
+                    <a:pt x="910683" y="733401"/>
+                  </a:cubicBezTo>
+                  <a:cubicBezTo>
+                    <a:pt x="928649" y="753845"/>
+                    <a:pt x="957146" y="770572"/>
+                    <a:pt x="973873" y="785440"/>
+                  </a:cubicBezTo>
+                  <a:cubicBezTo>
+                    <a:pt x="990600" y="800308"/>
+                    <a:pt x="988122" y="808361"/>
+                    <a:pt x="1011044" y="822610"/>
+                  </a:cubicBezTo>
+                  <a:cubicBezTo>
+                    <a:pt x="1033966" y="836859"/>
+                    <a:pt x="1085386" y="859781"/>
+                    <a:pt x="1111405" y="870932"/>
+                  </a:cubicBezTo>
+                  <a:cubicBezTo>
+                    <a:pt x="1137424" y="882083"/>
+                    <a:pt x="1149195" y="884562"/>
+                    <a:pt x="1167161" y="889518"/>
+                  </a:cubicBezTo>
+                  <a:cubicBezTo>
+                    <a:pt x="1185127" y="894474"/>
+                    <a:pt x="1202163" y="897571"/>
+                    <a:pt x="1219200" y="900669"/>
+                  </a:cubicBezTo>
+                </a:path>
+              </a:pathLst>
+            </a:custGeom>
+            <a:noFill/>
+            <a:ln w="12700">
+              <a:solidFill>
+                <a:schemeClr val="accent2"/>
+              </a:solidFill>
+            </a:ln>
+          </p:spPr>
+          <p:style>
+            <a:lnRef idx="2">
+              <a:schemeClr val="accent1">
+                <a:shade val="15000"/>
+              </a:schemeClr>
+            </a:lnRef>
+            <a:fillRef idx="1">
+              <a:schemeClr val="accent1"/>
+            </a:fillRef>
+            <a:effectRef idx="0">
+              <a:schemeClr val="accent1"/>
+            </a:effectRef>
+            <a:fontRef idx="minor">
+              <a:schemeClr val="lt1"/>
+            </a:fontRef>
+          </p:style>
+          <p:txBody>
+            <a:bodyPr rtlCol="0" anchor="ctr"/>
+            <a:lstStyle/>
+            <a:p>
+              <a:pPr algn="ctr"/>
+              <a:endParaRPr lang="en-US"/>
+            </a:p>
+          </p:txBody>
+        </p:sp>
+        <p:sp>
+          <p:nvSpPr>
+            <p:cNvPr id="12" name="Freeform 11">
+              <a:extLst>
+                <a:ext uri="{FF2B5EF4-FFF2-40B4-BE49-F238E27FC236}">
+                  <a16:creationId xmlns:a16="http://schemas.microsoft.com/office/drawing/2014/main" id="{5B2F08F5-AFC5-C26A-4408-F33739D959FD}"/>
+                </a:ext>
+              </a:extLst>
+            </p:cNvPr>
+            <p:cNvSpPr/>
+            <p:nvPr/>
+          </p:nvSpPr>
+          <p:spPr>
+            <a:xfrm>
+              <a:off x="5229922" y="3796886"/>
+              <a:ext cx="1360449" cy="381104"/>
+            </a:xfrm>
+            <a:custGeom>
+              <a:avLst/>
+              <a:gdLst>
+                <a:gd name="connsiteX0" fmla="*/ 0 w 1360449"/>
+                <a:gd name="connsiteY0" fmla="*/ 381104 h 381104"/>
+                <a:gd name="connsiteX1" fmla="*/ 167268 w 1360449"/>
+                <a:gd name="connsiteY1" fmla="*/ 343934 h 381104"/>
+                <a:gd name="connsiteX2" fmla="*/ 226741 w 1360449"/>
+                <a:gd name="connsiteY2" fmla="*/ 321631 h 381104"/>
+                <a:gd name="connsiteX3" fmla="*/ 249044 w 1360449"/>
+                <a:gd name="connsiteY3" fmla="*/ 303046 h 381104"/>
+                <a:gd name="connsiteX4" fmla="*/ 304800 w 1360449"/>
+                <a:gd name="connsiteY4" fmla="*/ 243573 h 381104"/>
+                <a:gd name="connsiteX5" fmla="*/ 315951 w 1360449"/>
+                <a:gd name="connsiteY5" fmla="*/ 217553 h 381104"/>
+                <a:gd name="connsiteX6" fmla="*/ 360556 w 1360449"/>
+                <a:gd name="connsiteY6" fmla="*/ 165514 h 381104"/>
+                <a:gd name="connsiteX7" fmla="*/ 412595 w 1360449"/>
+                <a:gd name="connsiteY7" fmla="*/ 94890 h 381104"/>
+                <a:gd name="connsiteX8" fmla="*/ 509239 w 1360449"/>
+                <a:gd name="connsiteY8" fmla="*/ 31699 h 381104"/>
+                <a:gd name="connsiteX9" fmla="*/ 572429 w 1360449"/>
+                <a:gd name="connsiteY9" fmla="*/ 9397 h 381104"/>
+                <a:gd name="connsiteX10" fmla="*/ 620751 w 1360449"/>
+                <a:gd name="connsiteY10" fmla="*/ 1963 h 381104"/>
+                <a:gd name="connsiteX11" fmla="*/ 698810 w 1360449"/>
+                <a:gd name="connsiteY11" fmla="*/ 1963 h 381104"/>
+                <a:gd name="connsiteX12" fmla="*/ 788019 w 1360449"/>
+                <a:gd name="connsiteY12" fmla="*/ 24265 h 381104"/>
+                <a:gd name="connsiteX13" fmla="*/ 843776 w 1360449"/>
+                <a:gd name="connsiteY13" fmla="*/ 54002 h 381104"/>
+                <a:gd name="connsiteX14" fmla="*/ 914400 w 1360449"/>
+                <a:gd name="connsiteY14" fmla="*/ 94890 h 381104"/>
+                <a:gd name="connsiteX15" fmla="*/ 947854 w 1360449"/>
+                <a:gd name="connsiteY15" fmla="*/ 132060 h 381104"/>
+                <a:gd name="connsiteX16" fmla="*/ 1011044 w 1360449"/>
+                <a:gd name="connsiteY16" fmla="*/ 206402 h 381104"/>
+                <a:gd name="connsiteX17" fmla="*/ 1040780 w 1360449"/>
+                <a:gd name="connsiteY17" fmla="*/ 258441 h 381104"/>
+                <a:gd name="connsiteX18" fmla="*/ 1074234 w 1360449"/>
+                <a:gd name="connsiteY18" fmla="*/ 295612 h 381104"/>
+                <a:gd name="connsiteX19" fmla="*/ 1122556 w 1360449"/>
+                <a:gd name="connsiteY19" fmla="*/ 329065 h 381104"/>
+                <a:gd name="connsiteX20" fmla="*/ 1152293 w 1360449"/>
+                <a:gd name="connsiteY20" fmla="*/ 336499 h 381104"/>
+                <a:gd name="connsiteX21" fmla="*/ 1182029 w 1360449"/>
+                <a:gd name="connsiteY21" fmla="*/ 351368 h 381104"/>
+                <a:gd name="connsiteX22" fmla="*/ 1252654 w 1360449"/>
+                <a:gd name="connsiteY22" fmla="*/ 366236 h 381104"/>
+                <a:gd name="connsiteX23" fmla="*/ 1315844 w 1360449"/>
+                <a:gd name="connsiteY23" fmla="*/ 373670 h 381104"/>
+                <a:gd name="connsiteX24" fmla="*/ 1360449 w 1360449"/>
+                <a:gd name="connsiteY24" fmla="*/ 381104 h 381104"/>
+              </a:gdLst>
+              <a:ahLst/>
+              <a:cxnLst>
+                <a:cxn ang="0">
+                  <a:pos x="connsiteX0" y="connsiteY0"/>
+                </a:cxn>
+                <a:cxn ang="0">
+                  <a:pos x="connsiteX1" y="connsiteY1"/>
+                </a:cxn>
+                <a:cxn ang="0">
+                  <a:pos x="connsiteX2" y="connsiteY2"/>
+                </a:cxn>
+                <a:cxn ang="0">
+                  <a:pos x="connsiteX3" y="connsiteY3"/>
+                </a:cxn>
+                <a:cxn ang="0">
+                  <a:pos x="connsiteX4" y="connsiteY4"/>
+                </a:cxn>
+                <a:cxn ang="0">
+                  <a:pos x="connsiteX5" y="connsiteY5"/>
+                </a:cxn>
+                <a:cxn ang="0">
+                  <a:pos x="connsiteX6" y="connsiteY6"/>
+                </a:cxn>
+                <a:cxn ang="0">
+                  <a:pos x="connsiteX7" y="connsiteY7"/>
+                </a:cxn>
+                <a:cxn ang="0">
+                  <a:pos x="connsiteX8" y="connsiteY8"/>
+                </a:cxn>
+                <a:cxn ang="0">
+                  <a:pos x="connsiteX9" y="connsiteY9"/>
+                </a:cxn>
+                <a:cxn ang="0">
+                  <a:pos x="connsiteX10" y="connsiteY10"/>
+                </a:cxn>
+                <a:cxn ang="0">
+                  <a:pos x="connsiteX11" y="connsiteY11"/>
+                </a:cxn>
+                <a:cxn ang="0">
+                  <a:pos x="connsiteX12" y="connsiteY12"/>
+                </a:cxn>
+                <a:cxn ang="0">
+                  <a:pos x="connsiteX13" y="connsiteY13"/>
+                </a:cxn>
+                <a:cxn ang="0">
+                  <a:pos x="connsiteX14" y="connsiteY14"/>
+                </a:cxn>
+                <a:cxn ang="0">
+                  <a:pos x="connsiteX15" y="connsiteY15"/>
+                </a:cxn>
+                <a:cxn ang="0">
+                  <a:pos x="connsiteX16" y="connsiteY16"/>
+                </a:cxn>
+                <a:cxn ang="0">
+                  <a:pos x="connsiteX17" y="connsiteY17"/>
+                </a:cxn>
+                <a:cxn ang="0">
+                  <a:pos x="connsiteX18" y="connsiteY18"/>
+                </a:cxn>
+                <a:cxn ang="0">
+                  <a:pos x="connsiteX19" y="connsiteY19"/>
+                </a:cxn>
+                <a:cxn ang="0">
+                  <a:pos x="connsiteX20" y="connsiteY20"/>
+                </a:cxn>
+                <a:cxn ang="0">
+                  <a:pos x="connsiteX21" y="connsiteY21"/>
+                </a:cxn>
+                <a:cxn ang="0">
+                  <a:pos x="connsiteX22" y="connsiteY22"/>
+                </a:cxn>
+                <a:cxn ang="0">
+                  <a:pos x="connsiteX23" y="connsiteY23"/>
+                </a:cxn>
+                <a:cxn ang="0">
+                  <a:pos x="connsiteX24" y="connsiteY24"/>
+                </a:cxn>
+              </a:cxnLst>
+              <a:rect l="l" t="t" r="r" b="b"/>
+              <a:pathLst>
+                <a:path w="1360449" h="381104">
+                  <a:moveTo>
+                    <a:pt x="0" y="381104"/>
+                  </a:moveTo>
+                  <a:cubicBezTo>
+                    <a:pt x="64739" y="367475"/>
+                    <a:pt x="129478" y="353846"/>
+                    <a:pt x="167268" y="343934"/>
+                  </a:cubicBezTo>
+                  <a:cubicBezTo>
+                    <a:pt x="205058" y="334022"/>
+                    <a:pt x="226741" y="321631"/>
+                    <a:pt x="226741" y="321631"/>
+                  </a:cubicBezTo>
+                  <a:cubicBezTo>
+                    <a:pt x="240370" y="314816"/>
+                    <a:pt x="236034" y="316056"/>
+                    <a:pt x="249044" y="303046"/>
+                  </a:cubicBezTo>
+                  <a:cubicBezTo>
+                    <a:pt x="262054" y="290036"/>
+                    <a:pt x="293649" y="257822"/>
+                    <a:pt x="304800" y="243573"/>
+                  </a:cubicBezTo>
+                  <a:cubicBezTo>
+                    <a:pt x="315951" y="229324"/>
+                    <a:pt x="306658" y="230563"/>
+                    <a:pt x="315951" y="217553"/>
+                  </a:cubicBezTo>
+                  <a:cubicBezTo>
+                    <a:pt x="325244" y="204543"/>
+                    <a:pt x="344449" y="185958"/>
+                    <a:pt x="360556" y="165514"/>
+                  </a:cubicBezTo>
+                  <a:cubicBezTo>
+                    <a:pt x="376663" y="145070"/>
+                    <a:pt x="387815" y="117192"/>
+                    <a:pt x="412595" y="94890"/>
+                  </a:cubicBezTo>
+                  <a:cubicBezTo>
+                    <a:pt x="437375" y="72588"/>
+                    <a:pt x="482600" y="45948"/>
+                    <a:pt x="509239" y="31699"/>
+                  </a:cubicBezTo>
+                  <a:cubicBezTo>
+                    <a:pt x="535878" y="17450"/>
+                    <a:pt x="553844" y="14353"/>
+                    <a:pt x="572429" y="9397"/>
+                  </a:cubicBezTo>
+                  <a:cubicBezTo>
+                    <a:pt x="591014" y="4441"/>
+                    <a:pt x="599688" y="3202"/>
+                    <a:pt x="620751" y="1963"/>
+                  </a:cubicBezTo>
+                  <a:cubicBezTo>
+                    <a:pt x="641814" y="724"/>
+                    <a:pt x="670932" y="-1754"/>
+                    <a:pt x="698810" y="1963"/>
+                  </a:cubicBezTo>
+                  <a:cubicBezTo>
+                    <a:pt x="726688" y="5680"/>
+                    <a:pt x="763858" y="15592"/>
+                    <a:pt x="788019" y="24265"/>
+                  </a:cubicBezTo>
+                  <a:cubicBezTo>
+                    <a:pt x="812180" y="32938"/>
+                    <a:pt x="822713" y="42231"/>
+                    <a:pt x="843776" y="54002"/>
+                  </a:cubicBezTo>
+                  <a:cubicBezTo>
+                    <a:pt x="864839" y="65773"/>
+                    <a:pt x="897054" y="81880"/>
+                    <a:pt x="914400" y="94890"/>
+                  </a:cubicBezTo>
+                  <a:cubicBezTo>
+                    <a:pt x="931746" y="107900"/>
+                    <a:pt x="931747" y="113475"/>
+                    <a:pt x="947854" y="132060"/>
+                  </a:cubicBezTo>
+                  <a:cubicBezTo>
+                    <a:pt x="963961" y="150645"/>
+                    <a:pt x="995556" y="185338"/>
+                    <a:pt x="1011044" y="206402"/>
+                  </a:cubicBezTo>
+                  <a:cubicBezTo>
+                    <a:pt x="1026532" y="227465"/>
+                    <a:pt x="1030248" y="243573"/>
+                    <a:pt x="1040780" y="258441"/>
+                  </a:cubicBezTo>
+                  <a:cubicBezTo>
+                    <a:pt x="1051312" y="273309"/>
+                    <a:pt x="1060605" y="283841"/>
+                    <a:pt x="1074234" y="295612"/>
+                  </a:cubicBezTo>
+                  <a:cubicBezTo>
+                    <a:pt x="1087863" y="307383"/>
+                    <a:pt x="1109546" y="322251"/>
+                    <a:pt x="1122556" y="329065"/>
+                  </a:cubicBezTo>
+                  <a:cubicBezTo>
+                    <a:pt x="1135566" y="335879"/>
+                    <a:pt x="1142381" y="332782"/>
+                    <a:pt x="1152293" y="336499"/>
+                  </a:cubicBezTo>
+                  <a:cubicBezTo>
+                    <a:pt x="1162205" y="340216"/>
+                    <a:pt x="1165302" y="346412"/>
+                    <a:pt x="1182029" y="351368"/>
+                  </a:cubicBezTo>
+                  <a:cubicBezTo>
+                    <a:pt x="1198756" y="356324"/>
+                    <a:pt x="1230352" y="362519"/>
+                    <a:pt x="1252654" y="366236"/>
+                  </a:cubicBezTo>
+                  <a:cubicBezTo>
+                    <a:pt x="1274956" y="369953"/>
+                    <a:pt x="1297878" y="371192"/>
+                    <a:pt x="1315844" y="373670"/>
+                  </a:cubicBezTo>
+                  <a:cubicBezTo>
+                    <a:pt x="1333810" y="376148"/>
+                    <a:pt x="1347129" y="378626"/>
+                    <a:pt x="1360449" y="381104"/>
+                  </a:cubicBezTo>
+                </a:path>
+              </a:pathLst>
+            </a:custGeom>
+            <a:noFill/>
+            <a:ln w="12700">
+              <a:solidFill>
+                <a:schemeClr val="accent5"/>
+              </a:solidFill>
+            </a:ln>
+          </p:spPr>
+          <p:style>
+            <a:lnRef idx="2">
+              <a:schemeClr val="accent1">
+                <a:shade val="15000"/>
+              </a:schemeClr>
+            </a:lnRef>
+            <a:fillRef idx="1">
+              <a:schemeClr val="accent1"/>
+            </a:fillRef>
+            <a:effectRef idx="0">
+              <a:schemeClr val="accent1"/>
+            </a:effectRef>
+            <a:fontRef idx="minor">
+              <a:schemeClr val="lt1"/>
+            </a:fontRef>
+          </p:style>
+          <p:txBody>
+            <a:bodyPr rtlCol="0" anchor="ctr"/>
+            <a:lstStyle/>
+            <a:p>
+              <a:pPr algn="ctr"/>
+              <a:endParaRPr lang="en-US"/>
+            </a:p>
+          </p:txBody>
+        </p:sp>
+        <mc:AlternateContent xmlns:mc="http://schemas.openxmlformats.org/markup-compatibility/2006">
+          <mc:Choice xmlns:p14="http://schemas.microsoft.com/office/powerpoint/2010/main" Requires="p14">
+            <p:contentPart p14:bwMode="auto" r:id="rId2">
+              <p14:nvContentPartPr>
+                <p14:cNvPr id="13" name="Ink 12">
+                  <a:extLst>
+                    <a:ext uri="{FF2B5EF4-FFF2-40B4-BE49-F238E27FC236}">
+                      <a16:creationId xmlns:a16="http://schemas.microsoft.com/office/drawing/2014/main" id="{8618A8A1-4324-6057-2D0B-1B563A28A6D6}"/>
+                    </a:ext>
+                  </a:extLst>
+                </p14:cNvPr>
+                <p14:cNvContentPartPr/>
+                <p14:nvPr/>
+              </p14:nvContentPartPr>
+              <p14:xfrm>
+                <a:off x="5765855" y="4119910"/>
+                <a:ext cx="133920" cy="53640"/>
+              </p14:xfrm>
+            </p:contentPart>
+          </mc:Choice>
+          <mc:Fallback>
+            <p:pic>
+              <p:nvPicPr>
+                <p:cNvPr id="13" name="Ink 12">
+                  <a:extLst>
+                    <a:ext uri="{FF2B5EF4-FFF2-40B4-BE49-F238E27FC236}">
+                      <a16:creationId xmlns:a16="http://schemas.microsoft.com/office/drawing/2014/main" id="{8618A8A1-4324-6057-2D0B-1B563A28A6D6}"/>
+                    </a:ext>
+                  </a:extLst>
+                </p:cNvPr>
+                <p:cNvPicPr/>
+                <p:nvPr/>
+              </p:nvPicPr>
+              <p:blipFill>
+                <a:blip r:embed="rId3"/>
+                <a:stretch>
+                  <a:fillRect/>
+                </a:stretch>
+              </p:blipFill>
+              <p:spPr>
+                <a:xfrm>
+                  <a:off x="5757215" y="4110910"/>
+                  <a:ext cx="151560" cy="71280"/>
+                </a:xfrm>
+                <a:prstGeom prst="rect">
+                  <a:avLst/>
+                </a:prstGeom>
+              </p:spPr>
+            </p:pic>
+          </mc:Fallback>
+        </mc:AlternateContent>
+        <mc:AlternateContent xmlns:mc="http://schemas.openxmlformats.org/markup-compatibility/2006">
+          <mc:Choice xmlns:p14="http://schemas.microsoft.com/office/powerpoint/2010/main" Requires="p14">
+            <p:contentPart p14:bwMode="auto" r:id="rId4">
+              <p14:nvContentPartPr>
+                <p14:cNvPr id="14" name="Ink 13">
+                  <a:extLst>
+                    <a:ext uri="{FF2B5EF4-FFF2-40B4-BE49-F238E27FC236}">
+                      <a16:creationId xmlns:a16="http://schemas.microsoft.com/office/drawing/2014/main" id="{39C9C4CF-7BF9-94F6-2315-A27E5945B9AE}"/>
+                    </a:ext>
+                  </a:extLst>
+                </p14:cNvPr>
+                <p14:cNvContentPartPr/>
+                <p14:nvPr/>
+              </p14:nvContentPartPr>
+              <p14:xfrm>
+                <a:off x="5410895" y="3980950"/>
+                <a:ext cx="192240" cy="187920"/>
+              </p14:xfrm>
+            </p:contentPart>
+          </mc:Choice>
+          <mc:Fallback>
+            <p:pic>
+              <p:nvPicPr>
+                <p:cNvPr id="14" name="Ink 13">
+                  <a:extLst>
+                    <a:ext uri="{FF2B5EF4-FFF2-40B4-BE49-F238E27FC236}">
+                      <a16:creationId xmlns:a16="http://schemas.microsoft.com/office/drawing/2014/main" id="{39C9C4CF-7BF9-94F6-2315-A27E5945B9AE}"/>
+                    </a:ext>
+                  </a:extLst>
+                </p:cNvPr>
+                <p:cNvPicPr/>
+                <p:nvPr/>
+              </p:nvPicPr>
+              <p:blipFill>
+                <a:blip r:embed="rId5"/>
+                <a:stretch>
+                  <a:fillRect/>
+                </a:stretch>
+              </p:blipFill>
+              <p:spPr>
+                <a:xfrm>
+                  <a:off x="5401895" y="3971950"/>
+                  <a:ext cx="209880" cy="205560"/>
+                </a:xfrm>
+                <a:prstGeom prst="rect">
+                  <a:avLst/>
+                </a:prstGeom>
+              </p:spPr>
+            </p:pic>
+          </mc:Fallback>
+        </mc:AlternateContent>
+        <mc:AlternateContent xmlns:mc="http://schemas.openxmlformats.org/markup-compatibility/2006">
+          <mc:Choice xmlns:p14="http://schemas.microsoft.com/office/powerpoint/2010/main" Requires="p14">
+            <p:contentPart p14:bwMode="auto" r:id="rId6">
+              <p14:nvContentPartPr>
+                <p14:cNvPr id="15" name="Ink 14">
+                  <a:extLst>
+                    <a:ext uri="{FF2B5EF4-FFF2-40B4-BE49-F238E27FC236}">
+                      <a16:creationId xmlns:a16="http://schemas.microsoft.com/office/drawing/2014/main" id="{FA91CDB5-B051-EAC6-EEFF-84DF9F2146D1}"/>
+                    </a:ext>
+                  </a:extLst>
+                </p14:cNvPr>
+                <p14:cNvContentPartPr/>
+                <p14:nvPr/>
+              </p14:nvContentPartPr>
+              <p14:xfrm>
+                <a:off x="5330615" y="3967990"/>
+                <a:ext cx="380160" cy="205560"/>
+              </p14:xfrm>
+            </p:contentPart>
+          </mc:Choice>
+          <mc:Fallback>
+            <p:pic>
+              <p:nvPicPr>
+                <p:cNvPr id="15" name="Ink 14">
+                  <a:extLst>
+                    <a:ext uri="{FF2B5EF4-FFF2-40B4-BE49-F238E27FC236}">
+                      <a16:creationId xmlns:a16="http://schemas.microsoft.com/office/drawing/2014/main" id="{FA91CDB5-B051-EAC6-EEFF-84DF9F2146D1}"/>
+                    </a:ext>
+                  </a:extLst>
+                </p:cNvPr>
+                <p:cNvPicPr/>
+                <p:nvPr/>
+              </p:nvPicPr>
+              <p:blipFill>
+                <a:blip r:embed="rId7"/>
+                <a:stretch>
+                  <a:fillRect/>
+                </a:stretch>
+              </p:blipFill>
+              <p:spPr>
+                <a:xfrm>
+                  <a:off x="5321615" y="3958990"/>
+                  <a:ext cx="397800" cy="223200"/>
+                </a:xfrm>
+                <a:prstGeom prst="rect">
+                  <a:avLst/>
+                </a:prstGeom>
+              </p:spPr>
+            </p:pic>
+          </mc:Fallback>
+        </mc:AlternateContent>
+        <mc:AlternateContent xmlns:mc="http://schemas.openxmlformats.org/markup-compatibility/2006">
+          <mc:Choice xmlns:p14="http://schemas.microsoft.com/office/powerpoint/2010/main" Requires="p14">
+            <p:contentPart p14:bwMode="auto" r:id="rId8">
+              <p14:nvContentPartPr>
+                <p14:cNvPr id="16" name="Ink 15">
+                  <a:extLst>
+                    <a:ext uri="{FF2B5EF4-FFF2-40B4-BE49-F238E27FC236}">
+                      <a16:creationId xmlns:a16="http://schemas.microsoft.com/office/drawing/2014/main" id="{A6E6E6DD-B4AB-85BD-6C91-65D28EBF6FFD}"/>
+                    </a:ext>
+                  </a:extLst>
+                </p14:cNvPr>
+                <p14:cNvContentPartPr/>
+                <p14:nvPr/>
+              </p14:nvContentPartPr>
+              <p14:xfrm>
+                <a:off x="5458415" y="4027030"/>
+                <a:ext cx="286200" cy="134280"/>
+              </p14:xfrm>
+            </p:contentPart>
+          </mc:Choice>
+          <mc:Fallback>
+            <p:pic>
+              <p:nvPicPr>
+                <p:cNvPr id="16" name="Ink 15">
+                  <a:extLst>
+                    <a:ext uri="{FF2B5EF4-FFF2-40B4-BE49-F238E27FC236}">
+                      <a16:creationId xmlns:a16="http://schemas.microsoft.com/office/drawing/2014/main" id="{A6E6E6DD-B4AB-85BD-6C91-65D28EBF6FFD}"/>
+                    </a:ext>
+                  </a:extLst>
+                </p:cNvPr>
+                <p:cNvPicPr/>
+                <p:nvPr/>
+              </p:nvPicPr>
+              <p:blipFill>
+                <a:blip r:embed="rId9"/>
+                <a:stretch>
+                  <a:fillRect/>
+                </a:stretch>
+              </p:blipFill>
+              <p:spPr>
+                <a:xfrm>
+                  <a:off x="5449775" y="4018390"/>
+                  <a:ext cx="303840" cy="151920"/>
+                </a:xfrm>
+                <a:prstGeom prst="rect">
+                  <a:avLst/>
+                </a:prstGeom>
+              </p:spPr>
+            </p:pic>
+          </mc:Fallback>
+        </mc:AlternateContent>
+        <mc:AlternateContent xmlns:mc="http://schemas.openxmlformats.org/markup-compatibility/2006">
+          <mc:Choice xmlns:p14="http://schemas.microsoft.com/office/powerpoint/2010/main" Requires="p14">
+            <p:contentPart p14:bwMode="auto" r:id="rId10">
+              <p14:nvContentPartPr>
+                <p14:cNvPr id="17" name="Ink 16">
+                  <a:extLst>
+                    <a:ext uri="{FF2B5EF4-FFF2-40B4-BE49-F238E27FC236}">
+                      <a16:creationId xmlns:a16="http://schemas.microsoft.com/office/drawing/2014/main" id="{1B2FFCDE-5C4F-92C8-27CF-40660F8F8C87}"/>
+                    </a:ext>
+                  </a:extLst>
+                </p14:cNvPr>
+                <p14:cNvContentPartPr/>
+                <p14:nvPr/>
+              </p14:nvContentPartPr>
+              <p14:xfrm>
+                <a:off x="5626175" y="3844870"/>
+                <a:ext cx="120240" cy="221400"/>
+              </p14:xfrm>
+            </p:contentPart>
+          </mc:Choice>
+          <mc:Fallback>
+            <p:pic>
+              <p:nvPicPr>
+                <p:cNvPr id="17" name="Ink 16">
+                  <a:extLst>
+                    <a:ext uri="{FF2B5EF4-FFF2-40B4-BE49-F238E27FC236}">
+                      <a16:creationId xmlns:a16="http://schemas.microsoft.com/office/drawing/2014/main" id="{1B2FFCDE-5C4F-92C8-27CF-40660F8F8C87}"/>
+                    </a:ext>
+                  </a:extLst>
+                </p:cNvPr>
+                <p:cNvPicPr/>
+                <p:nvPr/>
+              </p:nvPicPr>
+              <p:blipFill>
+                <a:blip r:embed="rId11"/>
+                <a:stretch>
+                  <a:fillRect/>
+                </a:stretch>
+              </p:blipFill>
+              <p:spPr>
+                <a:xfrm>
+                  <a:off x="5617175" y="3835870"/>
+                  <a:ext cx="137880" cy="239040"/>
+                </a:xfrm>
+                <a:prstGeom prst="rect">
+                  <a:avLst/>
+                </a:prstGeom>
+              </p:spPr>
+            </p:pic>
+          </mc:Fallback>
+        </mc:AlternateContent>
+        <p:cxnSp>
+          <p:nvCxnSpPr>
+            <p:cNvPr id="19" name="Straight Arrow Connector 18">
+              <a:extLst>
+                <a:ext uri="{FF2B5EF4-FFF2-40B4-BE49-F238E27FC236}">
+                  <a16:creationId xmlns:a16="http://schemas.microsoft.com/office/drawing/2014/main" id="{B3969938-AE36-24A0-D9A0-B579CC517EC9}"/>
+                </a:ext>
+              </a:extLst>
+            </p:cNvPr>
+            <p:cNvCxnSpPr>
+              <a:cxnSpLocks/>
+            </p:cNvCxnSpPr>
+            <p:nvPr/>
+          </p:nvCxnSpPr>
+          <p:spPr>
+            <a:xfrm>
+              <a:off x="5601515" y="3590925"/>
+              <a:ext cx="0" cy="331180"/>
+            </a:xfrm>
+            <a:prstGeom prst="straightConnector1">
+              <a:avLst/>
+            </a:prstGeom>
+            <a:ln w="6350">
+              <a:prstDash val="dash"/>
+              <a:tailEnd type="triangle" w="sm" len="sm"/>
+            </a:ln>
+          </p:spPr>
+          <p:style>
+            <a:lnRef idx="2">
+              <a:schemeClr val="accent1"/>
+            </a:lnRef>
+            <a:fillRef idx="0">
+              <a:schemeClr val="accent1"/>
+            </a:fillRef>
+            <a:effectRef idx="1">
+              <a:schemeClr val="accent1"/>
+            </a:effectRef>
+            <a:fontRef idx="minor">
+              <a:schemeClr val="tx1"/>
+            </a:fontRef>
+          </p:style>
+        </p:cxnSp>
+        <mc:AlternateContent xmlns:mc="http://schemas.openxmlformats.org/markup-compatibility/2006">
+          <mc:Choice xmlns:a14="http://schemas.microsoft.com/office/drawing/2010/main" Requires="a14">
+            <p:sp>
+              <p:nvSpPr>
+                <p:cNvPr id="24" name="TextBox 23">
+                  <a:extLst>
+                    <a:ext uri="{FF2B5EF4-FFF2-40B4-BE49-F238E27FC236}">
+                      <a16:creationId xmlns:a16="http://schemas.microsoft.com/office/drawing/2014/main" id="{D788361A-7D8E-7094-7AB0-02FA13D6C5CA}"/>
+                    </a:ext>
+                  </a:extLst>
+                </p:cNvPr>
+                <p:cNvSpPr txBox="1"/>
+                <p:nvPr/>
+              </p:nvSpPr>
+              <p:spPr>
+                <a:xfrm>
+                  <a:off x="4840578" y="3087463"/>
+                  <a:ext cx="801373" cy="215444"/>
+                </a:xfrm>
+                <a:prstGeom prst="rect">
+                  <a:avLst/>
+                </a:prstGeom>
+                <a:noFill/>
+              </p:spPr>
+              <p:txBody>
+                <a:bodyPr wrap="none" rtlCol="0">
+                  <a:spAutoFit/>
+                </a:bodyPr>
+                <a:lstStyle/>
+                <a:p>
+                  <a14:m>
+                    <m:oMathPara xmlns:m="http://schemas.openxmlformats.org/officeDocument/2006/math">
+                      <m:oMathParaPr>
+                        <m:jc m:val="centerGroup"/>
+                      </m:oMathParaPr>
+                      <m:oMath xmlns:m="http://schemas.openxmlformats.org/officeDocument/2006/math">
+                        <m:r>
+                          <a:rPr lang="en-US" sz="800" i="1" dirty="0" smtClean="0">
+                            <a:latin typeface="Cambria Math" panose="02040503050406030204" pitchFamily="18" charset="0"/>
+                          </a:rPr>
+                          <m:t>𝑝</m:t>
+                        </m:r>
+                        <m:d>
+                          <m:dPr>
+                            <m:ctrlPr>
+                              <a:rPr lang="en-US" sz="800" i="1" dirty="0" smtClean="0">
+                                <a:latin typeface="Cambria Math" panose="02040503050406030204" pitchFamily="18" charset="0"/>
+                              </a:rPr>
+                            </m:ctrlPr>
+                          </m:dPr>
+                          <m:e>
+                            <m:r>
+                              <a:rPr lang="en-US" sz="800" b="0" i="1" dirty="0" smtClean="0">
+                                <a:latin typeface="Cambria Math" panose="02040503050406030204" pitchFamily="18" charset="0"/>
+                              </a:rPr>
+                              <m:t>𝑥</m:t>
+                            </m:r>
+                            <m:r>
+                              <a:rPr lang="en-US" sz="800" b="0" i="1" dirty="0" smtClean="0">
+                                <a:latin typeface="Cambria Math" panose="02040503050406030204" pitchFamily="18" charset="0"/>
+                              </a:rPr>
+                              <m:t>|</m:t>
+                            </m:r>
+                            <m:sSub>
+                              <m:sSubPr>
+                                <m:ctrlPr>
+                                  <a:rPr lang="en-US" sz="800" b="0" i="1" dirty="0" smtClean="0">
+                                    <a:latin typeface="Cambria Math" panose="02040503050406030204" pitchFamily="18" charset="0"/>
+                                  </a:rPr>
+                                </m:ctrlPr>
+                              </m:sSubPr>
+                              <m:e>
+                                <m:r>
+                                  <a:rPr lang="en-US" sz="800" b="0" i="1" dirty="0" smtClean="0">
+                                    <a:latin typeface="Cambria Math" panose="02040503050406030204" pitchFamily="18" charset="0"/>
+                                    <a:ea typeface="Cambria Math" panose="02040503050406030204" pitchFamily="18" charset="0"/>
+                                  </a:rPr>
+                                  <m:t>𝒞</m:t>
+                                </m:r>
+                              </m:e>
+                              <m:sub>
+                                <m:r>
+                                  <a:rPr lang="en-US" sz="800" b="0" i="1" dirty="0" smtClean="0">
+                                    <a:latin typeface="Cambria Math" panose="02040503050406030204" pitchFamily="18" charset="0"/>
+                                  </a:rPr>
+                                  <m:t>1</m:t>
+                                </m:r>
+                              </m:sub>
+                            </m:sSub>
+                          </m:e>
+                        </m:d>
+                        <m:r>
+                          <a:rPr lang="en-US" sz="800" b="0" i="1" dirty="0" smtClean="0">
+                            <a:latin typeface="Cambria Math" panose="02040503050406030204" pitchFamily="18" charset="0"/>
+                          </a:rPr>
+                          <m:t>𝑃</m:t>
+                        </m:r>
+                        <m:d>
+                          <m:dPr>
+                            <m:ctrlPr>
+                              <a:rPr lang="en-US" sz="800" b="0" i="1" dirty="0" smtClean="0">
+                                <a:latin typeface="Cambria Math" panose="02040503050406030204" pitchFamily="18" charset="0"/>
+                              </a:rPr>
+                            </m:ctrlPr>
+                          </m:dPr>
+                          <m:e>
+                            <m:sSub>
+                              <m:sSubPr>
+                                <m:ctrlPr>
+                                  <a:rPr lang="en-US" sz="800" b="0" i="1" dirty="0" smtClean="0">
+                                    <a:latin typeface="Cambria Math" panose="02040503050406030204" pitchFamily="18" charset="0"/>
+                                  </a:rPr>
+                                </m:ctrlPr>
+                              </m:sSubPr>
+                              <m:e>
+                                <m:r>
+                                  <a:rPr lang="en-US" sz="800" b="0" i="1" dirty="0" smtClean="0">
+                                    <a:latin typeface="Cambria Math" panose="02040503050406030204" pitchFamily="18" charset="0"/>
+                                    <a:ea typeface="Cambria Math" panose="02040503050406030204" pitchFamily="18" charset="0"/>
+                                  </a:rPr>
+                                  <m:t>𝒞</m:t>
+                                </m:r>
+                              </m:e>
+                              <m:sub>
+                                <m:r>
+                                  <a:rPr lang="en-US" sz="800" b="0" i="1" dirty="0" smtClean="0">
+                                    <a:latin typeface="Cambria Math" panose="02040503050406030204" pitchFamily="18" charset="0"/>
+                                  </a:rPr>
+                                  <m:t>1</m:t>
+                                </m:r>
+                              </m:sub>
+                            </m:sSub>
+                          </m:e>
+                        </m:d>
+                      </m:oMath>
+                    </m:oMathPara>
+                  </a14:m>
+                  <a:endParaRPr lang="en-US" sz="800" dirty="0"/>
+                </a:p>
+              </p:txBody>
+            </p:sp>
+          </mc:Choice>
+          <mc:Fallback>
+            <p:sp>
+              <p:nvSpPr>
+                <p:cNvPr id="24" name="TextBox 23">
+                  <a:extLst>
+                    <a:ext uri="{FF2B5EF4-FFF2-40B4-BE49-F238E27FC236}">
+                      <a16:creationId xmlns:a16="http://schemas.microsoft.com/office/drawing/2014/main" id="{D788361A-7D8E-7094-7AB0-02FA13D6C5CA}"/>
+                    </a:ext>
+                  </a:extLst>
+                </p:cNvPr>
+                <p:cNvSpPr txBox="1">
+                  <a:spLocks noRot="1" noChangeAspect="1" noMove="1" noResize="1" noEditPoints="1" noAdjustHandles="1" noChangeArrowheads="1" noChangeShapeType="1" noTextEdit="1"/>
+                </p:cNvSpPr>
+                <p:nvPr/>
+              </p:nvSpPr>
+              <p:spPr>
+                <a:xfrm>
+                  <a:off x="4840578" y="3087463"/>
+                  <a:ext cx="801373" cy="215444"/>
+                </a:xfrm>
+                <a:prstGeom prst="rect">
+                  <a:avLst/>
+                </a:prstGeom>
+                <a:blipFill>
+                  <a:blip r:embed="rId12"/>
+                  <a:stretch>
+                    <a:fillRect/>
+                  </a:stretch>
+                </a:blipFill>
+              </p:spPr>
+              <p:txBody>
+                <a:bodyPr/>
+                <a:lstStyle/>
+                <a:p>
+                  <a:r>
+                    <a:rPr lang="en-US">
+                      <a:noFill/>
+                    </a:rPr>
+                    <a:t> </a:t>
+                  </a:r>
+                </a:p>
+              </p:txBody>
+            </p:sp>
+          </mc:Fallback>
+        </mc:AlternateContent>
+        <mc:AlternateContent xmlns:mc="http://schemas.openxmlformats.org/markup-compatibility/2006">
+          <mc:Choice xmlns:a14="http://schemas.microsoft.com/office/drawing/2010/main" Requires="a14">
+            <p:sp>
+              <p:nvSpPr>
+                <p:cNvPr id="25" name="TextBox 24">
+                  <a:extLst>
+                    <a:ext uri="{FF2B5EF4-FFF2-40B4-BE49-F238E27FC236}">
+                      <a16:creationId xmlns:a16="http://schemas.microsoft.com/office/drawing/2014/main" id="{17D62309-A34E-EA80-DCB2-A629764000A7}"/>
+                    </a:ext>
+                  </a:extLst>
+                </p:cNvPr>
+                <p:cNvSpPr txBox="1"/>
+                <p:nvPr/>
+              </p:nvSpPr>
+              <p:spPr>
+                <a:xfrm>
+                  <a:off x="5701226" y="3588964"/>
+                  <a:ext cx="801373" cy="215444"/>
+                </a:xfrm>
+                <a:prstGeom prst="rect">
+                  <a:avLst/>
+                </a:prstGeom>
+                <a:noFill/>
+              </p:spPr>
+              <p:txBody>
+                <a:bodyPr wrap="none" rtlCol="0">
+                  <a:spAutoFit/>
+                </a:bodyPr>
+                <a:lstStyle/>
+                <a:p>
+                  <a14:m>
+                    <m:oMathPara xmlns:m="http://schemas.openxmlformats.org/officeDocument/2006/math">
+                      <m:oMathParaPr>
+                        <m:jc m:val="centerGroup"/>
+                      </m:oMathParaPr>
+                      <m:oMath xmlns:m="http://schemas.openxmlformats.org/officeDocument/2006/math">
+                        <m:r>
+                          <a:rPr lang="en-US" sz="800" i="1" dirty="0" smtClean="0">
+                            <a:latin typeface="Cambria Math" panose="02040503050406030204" pitchFamily="18" charset="0"/>
+                          </a:rPr>
+                          <m:t>𝑝</m:t>
+                        </m:r>
+                        <m:d>
+                          <m:dPr>
+                            <m:ctrlPr>
+                              <a:rPr lang="en-US" sz="800" i="1" dirty="0" smtClean="0">
+                                <a:latin typeface="Cambria Math" panose="02040503050406030204" pitchFamily="18" charset="0"/>
+                              </a:rPr>
+                            </m:ctrlPr>
+                          </m:dPr>
+                          <m:e>
+                            <m:r>
+                              <a:rPr lang="en-US" sz="800" b="0" i="1" dirty="0" smtClean="0">
+                                <a:latin typeface="Cambria Math" panose="02040503050406030204" pitchFamily="18" charset="0"/>
+                              </a:rPr>
+                              <m:t>𝑥</m:t>
+                            </m:r>
+                            <m:r>
+                              <a:rPr lang="en-US" sz="800" b="0" i="1" dirty="0" smtClean="0">
+                                <a:latin typeface="Cambria Math" panose="02040503050406030204" pitchFamily="18" charset="0"/>
+                              </a:rPr>
+                              <m:t>|</m:t>
+                            </m:r>
+                            <m:sSub>
+                              <m:sSubPr>
+                                <m:ctrlPr>
+                                  <a:rPr lang="en-US" sz="800" b="0" i="1" dirty="0" smtClean="0">
+                                    <a:latin typeface="Cambria Math" panose="02040503050406030204" pitchFamily="18" charset="0"/>
+                                  </a:rPr>
+                                </m:ctrlPr>
+                              </m:sSubPr>
+                              <m:e>
+                                <m:r>
+                                  <a:rPr lang="en-US" sz="800" b="0" i="1" dirty="0" smtClean="0">
+                                    <a:latin typeface="Cambria Math" panose="02040503050406030204" pitchFamily="18" charset="0"/>
+                                    <a:ea typeface="Cambria Math" panose="02040503050406030204" pitchFamily="18" charset="0"/>
+                                  </a:rPr>
+                                  <m:t>𝒞</m:t>
+                                </m:r>
+                              </m:e>
+                              <m:sub>
+                                <m:r>
+                                  <a:rPr lang="en-US" sz="800" b="0" i="1" dirty="0" smtClean="0">
+                                    <a:latin typeface="Cambria Math" panose="02040503050406030204" pitchFamily="18" charset="0"/>
+                                  </a:rPr>
+                                  <m:t>2</m:t>
+                                </m:r>
+                              </m:sub>
+                            </m:sSub>
+                          </m:e>
+                        </m:d>
+                        <m:r>
+                          <a:rPr lang="en-US" sz="800" b="0" i="1" dirty="0" smtClean="0">
+                            <a:latin typeface="Cambria Math" panose="02040503050406030204" pitchFamily="18" charset="0"/>
+                          </a:rPr>
+                          <m:t>𝑃</m:t>
+                        </m:r>
+                        <m:d>
+                          <m:dPr>
+                            <m:ctrlPr>
+                              <a:rPr lang="en-US" sz="800" b="0" i="1" dirty="0" smtClean="0">
+                                <a:latin typeface="Cambria Math" panose="02040503050406030204" pitchFamily="18" charset="0"/>
+                              </a:rPr>
+                            </m:ctrlPr>
+                          </m:dPr>
+                          <m:e>
+                            <m:sSub>
+                              <m:sSubPr>
+                                <m:ctrlPr>
+                                  <a:rPr lang="en-US" sz="800" b="0" i="1" dirty="0" smtClean="0">
+                                    <a:latin typeface="Cambria Math" panose="02040503050406030204" pitchFamily="18" charset="0"/>
+                                  </a:rPr>
+                                </m:ctrlPr>
+                              </m:sSubPr>
+                              <m:e>
+                                <m:r>
+                                  <a:rPr lang="en-US" sz="800" b="0" i="1" dirty="0" smtClean="0">
+                                    <a:latin typeface="Cambria Math" panose="02040503050406030204" pitchFamily="18" charset="0"/>
+                                    <a:ea typeface="Cambria Math" panose="02040503050406030204" pitchFamily="18" charset="0"/>
+                                  </a:rPr>
+                                  <m:t>𝒞</m:t>
+                                </m:r>
+                              </m:e>
+                              <m:sub>
+                                <m:r>
+                                  <a:rPr lang="en-US" sz="800" b="0" i="1" dirty="0" smtClean="0">
+                                    <a:latin typeface="Cambria Math" panose="02040503050406030204" pitchFamily="18" charset="0"/>
+                                  </a:rPr>
+                                  <m:t>2</m:t>
+                                </m:r>
+                              </m:sub>
+                            </m:sSub>
+                          </m:e>
+                        </m:d>
+                      </m:oMath>
+                    </m:oMathPara>
+                  </a14:m>
+                  <a:endParaRPr lang="en-US" sz="800" dirty="0"/>
+                </a:p>
+              </p:txBody>
+            </p:sp>
+          </mc:Choice>
+          <mc:Fallback>
+            <p:sp>
+              <p:nvSpPr>
+                <p:cNvPr id="25" name="TextBox 24">
+                  <a:extLst>
+                    <a:ext uri="{FF2B5EF4-FFF2-40B4-BE49-F238E27FC236}">
+                      <a16:creationId xmlns:a16="http://schemas.microsoft.com/office/drawing/2014/main" id="{17D62309-A34E-EA80-DCB2-A629764000A7}"/>
+                    </a:ext>
+                  </a:extLst>
+                </p:cNvPr>
+                <p:cNvSpPr txBox="1">
+                  <a:spLocks noRot="1" noChangeAspect="1" noMove="1" noResize="1" noEditPoints="1" noAdjustHandles="1" noChangeArrowheads="1" noChangeShapeType="1" noTextEdit="1"/>
+                </p:cNvSpPr>
+                <p:nvPr/>
+              </p:nvSpPr>
+              <p:spPr>
+                <a:xfrm>
+                  <a:off x="5701226" y="3588964"/>
+                  <a:ext cx="801373" cy="215444"/>
+                </a:xfrm>
+                <a:prstGeom prst="rect">
+                  <a:avLst/>
+                </a:prstGeom>
+                <a:blipFill>
+                  <a:blip r:embed="rId13"/>
+                  <a:stretch>
+                    <a:fillRect/>
+                  </a:stretch>
+                </a:blipFill>
+              </p:spPr>
+              <p:txBody>
+                <a:bodyPr/>
+                <a:lstStyle/>
+                <a:p>
+                  <a:r>
+                    <a:rPr lang="en-US">
+                      <a:noFill/>
+                    </a:rPr>
+                    <a:t> </a:t>
+                  </a:r>
+                </a:p>
+              </p:txBody>
+            </p:sp>
+          </mc:Fallback>
+        </mc:AlternateContent>
+        <mc:AlternateContent xmlns:mc="http://schemas.openxmlformats.org/markup-compatibility/2006">
+          <mc:Choice xmlns:a14="http://schemas.microsoft.com/office/drawing/2010/main" Requires="a14">
+            <p:sp>
+              <p:nvSpPr>
+                <p:cNvPr id="26" name="TextBox 25">
+                  <a:extLst>
+                    <a:ext uri="{FF2B5EF4-FFF2-40B4-BE49-F238E27FC236}">
+                      <a16:creationId xmlns:a16="http://schemas.microsoft.com/office/drawing/2014/main" id="{489E2E2F-5724-0493-AD89-8E559B822D36}"/>
+                    </a:ext>
+                  </a:extLst>
+                </p:cNvPr>
+                <p:cNvSpPr txBox="1"/>
+                <p:nvPr/>
+              </p:nvSpPr>
+              <p:spPr>
+                <a:xfrm>
+                  <a:off x="6702831" y="3945866"/>
+                  <a:ext cx="263084" cy="215444"/>
+                </a:xfrm>
+                <a:prstGeom prst="rect">
+                  <a:avLst/>
+                </a:prstGeom>
+                <a:noFill/>
+              </p:spPr>
+              <p:txBody>
+                <a:bodyPr wrap="none" rtlCol="0">
+                  <a:spAutoFit/>
+                </a:bodyPr>
+                <a:lstStyle/>
+                <a:p>
+                  <a14:m>
+                    <m:oMathPara xmlns:m="http://schemas.openxmlformats.org/officeDocument/2006/math">
+                      <m:oMathParaPr>
+                        <m:jc m:val="centerGroup"/>
+                      </m:oMathParaPr>
+                      <m:oMath xmlns:m="http://schemas.openxmlformats.org/officeDocument/2006/math">
+                        <m:r>
+                          <a:rPr lang="en-US" sz="800" i="1" dirty="0">
+                            <a:latin typeface="Cambria Math" panose="02040503050406030204" pitchFamily="18" charset="0"/>
+                          </a:rPr>
+                          <m:t>𝑥</m:t>
+                        </m:r>
+                      </m:oMath>
+                    </m:oMathPara>
+                  </a14:m>
+                  <a:endParaRPr lang="en-US" sz="800" dirty="0"/>
+                </a:p>
+              </p:txBody>
+            </p:sp>
+          </mc:Choice>
+          <mc:Fallback>
+            <p:sp>
+              <p:nvSpPr>
+                <p:cNvPr id="26" name="TextBox 25">
+                  <a:extLst>
+                    <a:ext uri="{FF2B5EF4-FFF2-40B4-BE49-F238E27FC236}">
+                      <a16:creationId xmlns:a16="http://schemas.microsoft.com/office/drawing/2014/main" id="{489E2E2F-5724-0493-AD89-8E559B822D36}"/>
+                    </a:ext>
+                  </a:extLst>
+                </p:cNvPr>
+                <p:cNvSpPr txBox="1">
+                  <a:spLocks noRot="1" noChangeAspect="1" noMove="1" noResize="1" noEditPoints="1" noAdjustHandles="1" noChangeArrowheads="1" noChangeShapeType="1" noTextEdit="1"/>
+                </p:cNvSpPr>
+                <p:nvPr/>
+              </p:nvSpPr>
+              <p:spPr>
+                <a:xfrm>
+                  <a:off x="6702831" y="3945866"/>
+                  <a:ext cx="263084" cy="215444"/>
+                </a:xfrm>
+                <a:prstGeom prst="rect">
+                  <a:avLst/>
+                </a:prstGeom>
+                <a:blipFill>
+                  <a:blip r:embed="rId14"/>
+                  <a:stretch>
+                    <a:fillRect/>
+                  </a:stretch>
+                </a:blipFill>
+              </p:spPr>
+              <p:txBody>
+                <a:bodyPr/>
+                <a:lstStyle/>
+                <a:p>
+                  <a:r>
+                    <a:rPr lang="en-US">
+                      <a:noFill/>
+                    </a:rPr>
+                    <a:t> </a:t>
+                  </a:r>
+                </a:p>
+              </p:txBody>
+            </p:sp>
+          </mc:Fallback>
+        </mc:AlternateContent>
+        <p:cxnSp>
+          <p:nvCxnSpPr>
+            <p:cNvPr id="28" name="Straight Connector 27">
+              <a:extLst>
+                <a:ext uri="{FF2B5EF4-FFF2-40B4-BE49-F238E27FC236}">
+                  <a16:creationId xmlns:a16="http://schemas.microsoft.com/office/drawing/2014/main" id="{7EF82A68-EAE9-F8D5-86A4-9765E5E6217E}"/>
+                </a:ext>
+              </a:extLst>
+            </p:cNvPr>
+            <p:cNvCxnSpPr>
+              <a:cxnSpLocks/>
+            </p:cNvCxnSpPr>
+            <p:nvPr/>
+          </p:nvCxnSpPr>
+          <p:spPr>
+            <a:xfrm>
+              <a:off x="4594302" y="4330700"/>
+              <a:ext cx="1160109" cy="0"/>
+            </a:xfrm>
+            <a:prstGeom prst="line">
+              <a:avLst/>
+            </a:prstGeom>
+            <a:ln w="9525">
+              <a:solidFill>
+                <a:schemeClr val="tx1"/>
+              </a:solidFill>
+              <a:headEnd type="triangle" w="sm" len="sm"/>
+              <a:tailEnd type="triangle" w="sm" len="sm"/>
+            </a:ln>
+          </p:spPr>
+          <p:style>
+            <a:lnRef idx="2">
+              <a:schemeClr val="accent1"/>
+            </a:lnRef>
+            <a:fillRef idx="0">
+              <a:schemeClr val="accent1"/>
+            </a:fillRef>
+            <a:effectRef idx="1">
+              <a:schemeClr val="accent1"/>
+            </a:effectRef>
+            <a:fontRef idx="minor">
+              <a:schemeClr val="tx1"/>
+            </a:fontRef>
+          </p:style>
+        </p:cxnSp>
+        <p:cxnSp>
+          <p:nvCxnSpPr>
+            <p:cNvPr id="30" name="Straight Connector 29">
+              <a:extLst>
+                <a:ext uri="{FF2B5EF4-FFF2-40B4-BE49-F238E27FC236}">
+                  <a16:creationId xmlns:a16="http://schemas.microsoft.com/office/drawing/2014/main" id="{49881BBB-2AE5-D9BC-4886-DA3497FCED81}"/>
+                </a:ext>
+              </a:extLst>
+            </p:cNvPr>
+            <p:cNvCxnSpPr>
+              <a:cxnSpLocks/>
+            </p:cNvCxnSpPr>
+            <p:nvPr/>
+          </p:nvCxnSpPr>
+          <p:spPr>
+            <a:xfrm>
+              <a:off x="5754411" y="4330700"/>
+              <a:ext cx="1160109" cy="0"/>
+            </a:xfrm>
+            <a:prstGeom prst="line">
+              <a:avLst/>
+            </a:prstGeom>
+            <a:ln w="9525">
+              <a:solidFill>
+                <a:schemeClr val="tx1"/>
+              </a:solidFill>
+              <a:headEnd type="triangle" w="sm" len="sm"/>
+              <a:tailEnd type="triangle" w="sm" len="sm"/>
+            </a:ln>
+          </p:spPr>
+          <p:style>
+            <a:lnRef idx="2">
+              <a:schemeClr val="accent1"/>
+            </a:lnRef>
+            <a:fillRef idx="0">
+              <a:schemeClr val="accent1"/>
+            </a:fillRef>
+            <a:effectRef idx="1">
+              <a:schemeClr val="accent1"/>
+            </a:effectRef>
+            <a:fontRef idx="minor">
+              <a:schemeClr val="tx1"/>
+            </a:fontRef>
+          </p:style>
+        </p:cxnSp>
+        <mc:AlternateContent xmlns:mc="http://schemas.openxmlformats.org/markup-compatibility/2006">
+          <mc:Choice xmlns:a14="http://schemas.microsoft.com/office/drawing/2010/main" Requires="a14">
+            <p:sp>
+              <p:nvSpPr>
+                <p:cNvPr id="32" name="TextBox 31">
+                  <a:extLst>
+                    <a:ext uri="{FF2B5EF4-FFF2-40B4-BE49-F238E27FC236}">
+                      <a16:creationId xmlns:a16="http://schemas.microsoft.com/office/drawing/2014/main" id="{6FAB2AEB-C2D0-5A35-D1EE-A5ECBE454863}"/>
+                    </a:ext>
+                  </a:extLst>
+                </p:cNvPr>
+                <p:cNvSpPr txBox="1"/>
+                <p:nvPr/>
+              </p:nvSpPr>
+              <p:spPr>
+                <a:xfrm>
+                  <a:off x="5076871" y="4151553"/>
+                  <a:ext cx="314637" cy="215444"/>
+                </a:xfrm>
+                <a:prstGeom prst="rect">
+                  <a:avLst/>
+                </a:prstGeom>
+                <a:noFill/>
+              </p:spPr>
+              <p:txBody>
+                <a:bodyPr wrap="none" rtlCol="0">
+                  <a:spAutoFit/>
+                </a:bodyPr>
+                <a:lstStyle/>
+                <a:p>
+                  <a14:m>
+                    <m:oMathPara xmlns:m="http://schemas.openxmlformats.org/officeDocument/2006/math">
+                      <m:oMathParaPr>
+                        <m:jc m:val="centerGroup"/>
+                      </m:oMathParaPr>
+                      <m:oMath xmlns:m="http://schemas.openxmlformats.org/officeDocument/2006/math">
+                        <m:sSub>
+                          <m:sSubPr>
+                            <m:ctrlPr>
+                              <a:rPr lang="en-US" sz="800" i="1" dirty="0" smtClean="0">
+                                <a:latin typeface="Cambria Math" panose="02040503050406030204" pitchFamily="18" charset="0"/>
+                              </a:rPr>
+                            </m:ctrlPr>
+                          </m:sSubPr>
+                          <m:e>
+                            <m:r>
+                              <a:rPr lang="en-US" sz="800" b="0" i="1" dirty="0" smtClean="0">
+                                <a:latin typeface="Cambria Math" panose="02040503050406030204" pitchFamily="18" charset="0"/>
+                                <a:ea typeface="Cambria Math" panose="02040503050406030204" pitchFamily="18" charset="0"/>
+                              </a:rPr>
+                              <m:t>𝑅</m:t>
+                            </m:r>
+                          </m:e>
+                          <m:sub>
+                            <m:r>
+                              <a:rPr lang="en-US" sz="800" i="1" dirty="0">
+                                <a:latin typeface="Cambria Math" panose="02040503050406030204" pitchFamily="18" charset="0"/>
+                              </a:rPr>
+                              <m:t>1</m:t>
+                            </m:r>
+                          </m:sub>
+                        </m:sSub>
+                      </m:oMath>
+                    </m:oMathPara>
+                  </a14:m>
+                  <a:endParaRPr lang="en-US" sz="800" dirty="0"/>
+                </a:p>
+              </p:txBody>
+            </p:sp>
+          </mc:Choice>
+          <mc:Fallback>
+            <p:sp>
+              <p:nvSpPr>
+                <p:cNvPr id="32" name="TextBox 31">
+                  <a:extLst>
+                    <a:ext uri="{FF2B5EF4-FFF2-40B4-BE49-F238E27FC236}">
+                      <a16:creationId xmlns:a16="http://schemas.microsoft.com/office/drawing/2014/main" id="{6FAB2AEB-C2D0-5A35-D1EE-A5ECBE454863}"/>
+                    </a:ext>
+                  </a:extLst>
+                </p:cNvPr>
+                <p:cNvSpPr txBox="1">
+                  <a:spLocks noRot="1" noChangeAspect="1" noMove="1" noResize="1" noEditPoints="1" noAdjustHandles="1" noChangeArrowheads="1" noChangeShapeType="1" noTextEdit="1"/>
+                </p:cNvSpPr>
+                <p:nvPr/>
+              </p:nvSpPr>
+              <p:spPr>
+                <a:xfrm>
+                  <a:off x="5076871" y="4151553"/>
+                  <a:ext cx="314637" cy="215444"/>
+                </a:xfrm>
+                <a:prstGeom prst="rect">
+                  <a:avLst/>
+                </a:prstGeom>
+                <a:blipFill>
+                  <a:blip r:embed="rId15"/>
+                  <a:stretch>
+                    <a:fillRect/>
+                  </a:stretch>
+                </a:blipFill>
+              </p:spPr>
+              <p:txBody>
+                <a:bodyPr/>
+                <a:lstStyle/>
+                <a:p>
+                  <a:r>
+                    <a:rPr lang="en-US">
+                      <a:noFill/>
+                    </a:rPr>
+                    <a:t> </a:t>
+                  </a:r>
+                </a:p>
+              </p:txBody>
+            </p:sp>
+          </mc:Fallback>
+        </mc:AlternateContent>
+        <mc:AlternateContent xmlns:mc="http://schemas.openxmlformats.org/markup-compatibility/2006">
+          <mc:Choice xmlns:a14="http://schemas.microsoft.com/office/drawing/2010/main" Requires="a14">
+            <p:sp>
+              <p:nvSpPr>
+                <p:cNvPr id="33" name="TextBox 32">
+                  <a:extLst>
+                    <a:ext uri="{FF2B5EF4-FFF2-40B4-BE49-F238E27FC236}">
+                      <a16:creationId xmlns:a16="http://schemas.microsoft.com/office/drawing/2014/main" id="{1AAE712B-880E-E7D8-9A88-942729031C6A}"/>
+                    </a:ext>
+                  </a:extLst>
+                </p:cNvPr>
+                <p:cNvSpPr txBox="1"/>
+                <p:nvPr/>
+              </p:nvSpPr>
+              <p:spPr>
+                <a:xfrm>
+                  <a:off x="6179642" y="4143676"/>
+                  <a:ext cx="317010" cy="215444"/>
+                </a:xfrm>
+                <a:prstGeom prst="rect">
+                  <a:avLst/>
+                </a:prstGeom>
+                <a:noFill/>
+              </p:spPr>
+              <p:txBody>
+                <a:bodyPr wrap="none" rtlCol="0">
+                  <a:spAutoFit/>
+                </a:bodyPr>
+                <a:lstStyle/>
+                <a:p>
+                  <a14:m>
+                    <m:oMathPara xmlns:m="http://schemas.openxmlformats.org/officeDocument/2006/math">
+                      <m:oMathParaPr>
+                        <m:jc m:val="centerGroup"/>
+                      </m:oMathParaPr>
+                      <m:oMath xmlns:m="http://schemas.openxmlformats.org/officeDocument/2006/math">
+                        <m:sSub>
+                          <m:sSubPr>
+                            <m:ctrlPr>
+                              <a:rPr lang="en-US" sz="800" i="1" dirty="0" smtClean="0">
+                                <a:latin typeface="Cambria Math" panose="02040503050406030204" pitchFamily="18" charset="0"/>
+                              </a:rPr>
+                            </m:ctrlPr>
+                          </m:sSubPr>
+                          <m:e>
+                            <m:r>
+                              <a:rPr lang="en-US" sz="800" b="0" i="1" dirty="0" smtClean="0">
+                                <a:latin typeface="Cambria Math" panose="02040503050406030204" pitchFamily="18" charset="0"/>
+                                <a:ea typeface="Cambria Math" panose="02040503050406030204" pitchFamily="18" charset="0"/>
+                              </a:rPr>
+                              <m:t>𝑅</m:t>
+                            </m:r>
+                          </m:e>
+                          <m:sub>
+                            <m:r>
+                              <a:rPr lang="en-US" sz="800" b="0" i="1" dirty="0" smtClean="0">
+                                <a:latin typeface="Cambria Math" panose="02040503050406030204" pitchFamily="18" charset="0"/>
+                                <a:ea typeface="Cambria Math" panose="02040503050406030204" pitchFamily="18" charset="0"/>
+                              </a:rPr>
+                              <m:t>2</m:t>
+                            </m:r>
+                          </m:sub>
+                        </m:sSub>
+                      </m:oMath>
+                    </m:oMathPara>
+                  </a14:m>
+                  <a:endParaRPr lang="en-US" sz="800" dirty="0"/>
+                </a:p>
+              </p:txBody>
+            </p:sp>
+          </mc:Choice>
+          <mc:Fallback>
+            <p:sp>
+              <p:nvSpPr>
+                <p:cNvPr id="33" name="TextBox 32">
+                  <a:extLst>
+                    <a:ext uri="{FF2B5EF4-FFF2-40B4-BE49-F238E27FC236}">
+                      <a16:creationId xmlns:a16="http://schemas.microsoft.com/office/drawing/2014/main" id="{1AAE712B-880E-E7D8-9A88-942729031C6A}"/>
+                    </a:ext>
+                  </a:extLst>
+                </p:cNvPr>
+                <p:cNvSpPr txBox="1">
+                  <a:spLocks noRot="1" noChangeAspect="1" noMove="1" noResize="1" noEditPoints="1" noAdjustHandles="1" noChangeArrowheads="1" noChangeShapeType="1" noTextEdit="1"/>
+                </p:cNvSpPr>
+                <p:nvPr/>
+              </p:nvSpPr>
+              <p:spPr>
+                <a:xfrm>
+                  <a:off x="6179642" y="4143676"/>
+                  <a:ext cx="317010" cy="215444"/>
+                </a:xfrm>
+                <a:prstGeom prst="rect">
+                  <a:avLst/>
+                </a:prstGeom>
+                <a:blipFill>
+                  <a:blip r:embed="rId16"/>
+                  <a:stretch>
+                    <a:fillRect/>
+                  </a:stretch>
+                </a:blipFill>
+              </p:spPr>
+              <p:txBody>
+                <a:bodyPr/>
+                <a:lstStyle/>
+                <a:p>
+                  <a:r>
+                    <a:rPr lang="en-US">
+                      <a:noFill/>
+                    </a:rPr>
+                    <a:t> </a:t>
+                  </a:r>
+                </a:p>
+              </p:txBody>
+            </p:sp>
+          </mc:Fallback>
+        </mc:AlternateContent>
+      </p:grpSp>
     </p:spTree>
     <p:extLst>
       <p:ext uri="{BB962C8B-B14F-4D97-AF65-F5344CB8AC3E}">
